--- a/docs/meeting_with_Sayiqan/20250721.pptx
+++ b/docs/meeting_with_Sayiqan/20250721.pptx
@@ -4193,7 +4193,7 @@
           <a:p>
             <a:fld id="{C29F3CA8-2E63-412C-AA06-0D760EBE5965}" type="datetime8">
               <a:rPr lang="he-IL" smtClean="0"/>
-              <a:t>20 יולי 25</a:t>
+              <a:t>21 יולי 25</a:t>
             </a:fld>
             <a:endParaRPr lang="he-IL"/>
           </a:p>
@@ -4559,7 +4559,7 @@
                 <a:ea typeface="+mn-ea"/>
                 <a:cs typeface="+mn-cs"/>
               </a:rPr>
-              <a:t>20 יולי 25</a:t>
+              <a:t>21 יולי 25</a:t>
             </a:fld>
             <a:endParaRPr kumimoji="0" lang="en-US" sz="1400" b="0" i="0" u="none" strike="noStrike" kern="1200" cap="none" spc="-1" normalizeH="0" baseline="0" noProof="0">
               <a:ln>
@@ -4660,7 +4660,7 @@
           <a:p>
             <a:fld id="{8E065D1C-C98B-44F5-AB2A-FEE3E85D0A94}" type="datetime8">
               <a:rPr lang="he-IL" smtClean="0"/>
-              <a:t>20 יולי 25</a:t>
+              <a:t>21 יולי 25</a:t>
             </a:fld>
             <a:endParaRPr lang="he-IL"/>
           </a:p>
@@ -6851,7 +6851,7 @@
           <a:p>
             <a:fld id="{8E065D1C-C98B-44F5-AB2A-FEE3E85D0A94}" type="datetime8">
               <a:rPr lang="he-IL" smtClean="0"/>
-              <a:t>20 יולי 25</a:t>
+              <a:t>21 יולי 25</a:t>
             </a:fld>
             <a:endParaRPr lang="he-IL"/>
           </a:p>
@@ -8340,8 +8340,8 @@
         </p:blipFill>
         <p:spPr>
           <a:xfrm>
-            <a:off x="502132" y="1844851"/>
-            <a:ext cx="11187736" cy="959310"/>
+            <a:off x="445588" y="1779623"/>
+            <a:ext cx="11300823" cy="969007"/>
           </a:xfrm>
           <a:prstGeom prst="rect">
             <a:avLst/>
@@ -8394,14 +8394,15 @@
         </p:nvPicPr>
         <p:blipFill>
           <a:blip r:embed="rId4"/>
+          <a:srcRect l="28726" r="21838"/>
           <a:stretch>
             <a:fillRect/>
           </a:stretch>
         </p:blipFill>
         <p:spPr>
           <a:xfrm>
-            <a:off x="1424037" y="3328644"/>
-            <a:ext cx="9343926" cy="959310"/>
+            <a:off x="3404009" y="3267155"/>
+            <a:ext cx="5383980" cy="1118119"/>
           </a:xfrm>
           <a:prstGeom prst="rect">
             <a:avLst/>
@@ -8461,8 +8462,69 @@
         </p:blipFill>
         <p:spPr>
           <a:xfrm>
-            <a:off x="2732337" y="5069840"/>
-            <a:ext cx="6727326" cy="373390"/>
+            <a:off x="1320097" y="5143483"/>
+            <a:ext cx="5212783" cy="289328"/>
+          </a:xfrm>
+          <a:prstGeom prst="rect">
+            <a:avLst/>
+          </a:prstGeom>
+          <a:solidFill>
+            <a:srgbClr val="FFFFFF">
+              <a:shade val="85000"/>
+            </a:srgbClr>
+          </a:solidFill>
+          <a:ln w="88900" cap="sq">
+            <a:solidFill>
+              <a:srgbClr val="FFFFFF"/>
+            </a:solidFill>
+            <a:miter lim="800000"/>
+          </a:ln>
+          <a:effectLst>
+            <a:outerShdw blurRad="55000" dist="18000" dir="5400000" algn="tl" rotWithShape="0">
+              <a:srgbClr val="000000">
+                <a:alpha val="40000"/>
+              </a:srgbClr>
+            </a:outerShdw>
+          </a:effectLst>
+          <a:scene3d>
+            <a:camera prst="orthographicFront"/>
+            <a:lightRig rig="twoPt" dir="t">
+              <a:rot lat="0" lon="0" rev="7200000"/>
+            </a:lightRig>
+          </a:scene3d>
+          <a:sp3d>
+            <a:bevelT w="25400" h="19050"/>
+            <a:contourClr>
+              <a:srgbClr val="FFFFFF"/>
+            </a:contourClr>
+          </a:sp3d>
+        </p:spPr>
+      </p:pic>
+      <p:pic>
+        <p:nvPicPr>
+          <p:cNvPr id="3" name="Picture 2">
+            <a:extLst>
+              <a:ext uri="{FF2B5EF4-FFF2-40B4-BE49-F238E27FC236}">
+                <a16:creationId xmlns:a16="http://schemas.microsoft.com/office/drawing/2014/main" id="{E432A034-89A8-3314-840A-C9522DB8B581}"/>
+              </a:ext>
+            </a:extLst>
+          </p:cNvPr>
+          <p:cNvPicPr>
+            <a:picLocks noChangeAspect="1"/>
+          </p:cNvPicPr>
+          <p:nvPr/>
+        </p:nvPicPr>
+        <p:blipFill>
+          <a:blip r:embed="rId4"/>
+          <a:srcRect l="77275" t="8827" r="862"/>
+          <a:stretch>
+            <a:fillRect/>
+          </a:stretch>
+        </p:blipFill>
+        <p:spPr>
+          <a:xfrm>
+            <a:off x="8685163" y="4903799"/>
+            <a:ext cx="2186740" cy="936226"/>
           </a:xfrm>
           <a:prstGeom prst="rect">
             <a:avLst/>
@@ -8922,10 +8984,10 @@
       </p:sp>
       <p:pic>
         <p:nvPicPr>
-          <p:cNvPr id="3074" name="Picture 2">
+          <p:cNvPr id="1026" name="Picture 2">
             <a:extLst>
               <a:ext uri="{FF2B5EF4-FFF2-40B4-BE49-F238E27FC236}">
-                <a16:creationId xmlns:a16="http://schemas.microsoft.com/office/drawing/2014/main" id="{47528186-2E19-D6D5-3C9E-63102DA5D589}"/>
+                <a16:creationId xmlns:a16="http://schemas.microsoft.com/office/drawing/2014/main" id="{B725F976-8442-80F6-5289-B69EBA8DC76C}"/>
               </a:ext>
             </a:extLst>
           </p:cNvPr>
@@ -8949,7 +9011,7 @@
         </p:blipFill>
         <p:spPr bwMode="auto">
           <a:xfrm>
-            <a:off x="1600200" y="1435735"/>
+            <a:off x="1600200" y="1334135"/>
             <a:ext cx="8991600" cy="4819650"/>
           </a:xfrm>
           <a:prstGeom prst="rect">
@@ -8985,15 +9047,6 @@
               <a:srgbClr val="FFFFFF"/>
             </a:contourClr>
           </a:sp3d>
-          <a:extLst>
-            <a:ext uri="{909E8E84-426E-40DD-AFC4-6F175D3DCCD1}">
-              <a14:hiddenFill xmlns:a14="http://schemas.microsoft.com/office/drawing/2010/main">
-                <a:solidFill>
-                  <a:srgbClr val="FFFFFF"/>
-                </a:solidFill>
-              </a14:hiddenFill>
-            </a:ext>
-          </a:extLst>
         </p:spPr>
       </p:pic>
     </p:spTree>
@@ -9419,10 +9472,10 @@
       </p:sp>
       <p:pic>
         <p:nvPicPr>
-          <p:cNvPr id="2050" name="Picture 2">
+          <p:cNvPr id="3" name="Picture 2">
             <a:extLst>
               <a:ext uri="{FF2B5EF4-FFF2-40B4-BE49-F238E27FC236}">
-                <a16:creationId xmlns:a16="http://schemas.microsoft.com/office/drawing/2014/main" id="{EF9BE791-8BC3-9424-E66D-4D0262BFC316}"/>
+                <a16:creationId xmlns:a16="http://schemas.microsoft.com/office/drawing/2014/main" id="{9559DD9A-569A-9109-72F1-5DAADA7F1629}"/>
               </a:ext>
             </a:extLst>
           </p:cNvPr>
@@ -9446,7 +9499,7 @@
         </p:blipFill>
         <p:spPr bwMode="auto">
           <a:xfrm>
-            <a:off x="1600200" y="1468920"/>
+            <a:off x="1600200" y="1361771"/>
             <a:ext cx="8991600" cy="4819650"/>
           </a:xfrm>
           <a:prstGeom prst="rect">
@@ -9482,15 +9535,6 @@
               <a:srgbClr val="FFFFFF"/>
             </a:contourClr>
           </a:sp3d>
-          <a:extLst>
-            <a:ext uri="{909E8E84-426E-40DD-AFC4-6F175D3DCCD1}">
-              <a14:hiddenFill xmlns:a14="http://schemas.microsoft.com/office/drawing/2010/main">
-                <a:solidFill>
-                  <a:srgbClr val="FFFFFF"/>
-                </a:solidFill>
-              </a14:hiddenFill>
-            </a:ext>
-          </a:extLst>
         </p:spPr>
       </p:pic>
     </p:spTree>
@@ -10401,10 +10445,10 @@
       </p:sp>
       <p:pic>
         <p:nvPicPr>
-          <p:cNvPr id="4" name="Picture 3">
+          <p:cNvPr id="7" name="Picture 6">
             <a:extLst>
               <a:ext uri="{FF2B5EF4-FFF2-40B4-BE49-F238E27FC236}">
-                <a16:creationId xmlns:a16="http://schemas.microsoft.com/office/drawing/2014/main" id="{88571D34-35AD-9ADE-EBE1-950E0CABF9F4}"/>
+                <a16:creationId xmlns:a16="http://schemas.microsoft.com/office/drawing/2014/main" id="{29822B9D-8C0A-4337-E845-1B80F61694EC}"/>
               </a:ext>
             </a:extLst>
           </p:cNvPr>
@@ -10421,8 +10465,8 @@
         </p:blipFill>
         <p:spPr>
           <a:xfrm>
-            <a:off x="79627" y="2620179"/>
-            <a:ext cx="12032745" cy="1617641"/>
+            <a:off x="1337950" y="1396928"/>
+            <a:ext cx="9516100" cy="4617791"/>
           </a:xfrm>
           <a:prstGeom prst="rect">
             <a:avLst/>
@@ -12565,32 +12609,69 @@
       </p:sp>
       <p:pic>
         <p:nvPicPr>
-          <p:cNvPr id="4" name="Picture 3" descr="A close up of words&#10;&#10;AI-generated content may be incorrect.">
+          <p:cNvPr id="3074" name="Picture 2">
             <a:extLst>
               <a:ext uri="{FF2B5EF4-FFF2-40B4-BE49-F238E27FC236}">
-                <a16:creationId xmlns:a16="http://schemas.microsoft.com/office/drawing/2014/main" id="{03676EA4-DB8C-15F2-570A-86F97700A260}"/>
+                <a16:creationId xmlns:a16="http://schemas.microsoft.com/office/drawing/2014/main" id="{25CAC6B0-0980-1F9D-6A16-A6408EABA335}"/>
               </a:ext>
             </a:extLst>
           </p:cNvPr>
           <p:cNvPicPr>
-            <a:picLocks noChangeAspect="1"/>
+            <a:picLocks noChangeAspect="1" noChangeArrowheads="1"/>
           </p:cNvPicPr>
           <p:nvPr/>
         </p:nvPicPr>
         <p:blipFill>
-          <a:blip r:embed="rId3"/>
+          <a:blip r:embed="rId3">
+            <a:extLst>
+              <a:ext uri="{28A0092B-C50C-407E-A947-70E740481C1C}">
+                <a14:useLocalDpi xmlns:a14="http://schemas.microsoft.com/office/drawing/2010/main" val="0"/>
+              </a:ext>
+            </a:extLst>
+          </a:blip>
+          <a:srcRect/>
           <a:stretch>
             <a:fillRect/>
           </a:stretch>
         </p:blipFill>
-        <p:spPr>
+        <p:spPr bwMode="auto">
           <a:xfrm>
-            <a:off x="1531575" y="1297504"/>
-            <a:ext cx="9128850" cy="4893219"/>
+            <a:off x="1600200" y="1313815"/>
+            <a:ext cx="8991600" cy="4819650"/>
           </a:xfrm>
           <a:prstGeom prst="rect">
             <a:avLst/>
           </a:prstGeom>
+          <a:solidFill>
+            <a:srgbClr val="FFFFFF">
+              <a:shade val="85000"/>
+            </a:srgbClr>
+          </a:solidFill>
+          <a:ln w="88900" cap="sq">
+            <a:solidFill>
+              <a:srgbClr val="FFFFFF"/>
+            </a:solidFill>
+            <a:miter lim="800000"/>
+          </a:ln>
+          <a:effectLst>
+            <a:outerShdw blurRad="55000" dist="18000" dir="5400000" algn="tl" rotWithShape="0">
+              <a:srgbClr val="000000">
+                <a:alpha val="40000"/>
+              </a:srgbClr>
+            </a:outerShdw>
+          </a:effectLst>
+          <a:scene3d>
+            <a:camera prst="orthographicFront"/>
+            <a:lightRig rig="twoPt" dir="t">
+              <a:rot lat="0" lon="0" rev="7200000"/>
+            </a:lightRig>
+          </a:scene3d>
+          <a:sp3d>
+            <a:bevelT w="25400" h="19050"/>
+            <a:contourClr>
+              <a:srgbClr val="FFFFFF"/>
+            </a:contourClr>
+          </a:sp3d>
         </p:spPr>
       </p:pic>
     </p:spTree>
@@ -12930,53 +13011,6 @@
           </a:p>
         </p:txBody>
       </p:sp>
-      <p:pic>
-        <p:nvPicPr>
-          <p:cNvPr id="3" name="Picture 2">
-            <a:extLst>
-              <a:ext uri="{FF2B5EF4-FFF2-40B4-BE49-F238E27FC236}">
-                <a16:creationId xmlns:a16="http://schemas.microsoft.com/office/drawing/2014/main" id="{80DB5883-EFFA-0A20-746F-24E5E29D5F38}"/>
-              </a:ext>
-            </a:extLst>
-          </p:cNvPr>
-          <p:cNvPicPr>
-            <a:picLocks noChangeAspect="1" noChangeArrowheads="1"/>
-          </p:cNvPicPr>
-          <p:nvPr/>
-        </p:nvPicPr>
-        <p:blipFill>
-          <a:blip r:embed="rId3">
-            <a:extLst>
-              <a:ext uri="{28A0092B-C50C-407E-A947-70E740481C1C}">
-                <a14:useLocalDpi xmlns:a14="http://schemas.microsoft.com/office/drawing/2010/main" val="0"/>
-              </a:ext>
-            </a:extLst>
-          </a:blip>
-          <a:srcRect/>
-          <a:stretch>
-            <a:fillRect/>
-          </a:stretch>
-        </p:blipFill>
-        <p:spPr bwMode="auto">
-          <a:xfrm>
-            <a:off x="1674485" y="1332228"/>
-            <a:ext cx="8843030" cy="4790780"/>
-          </a:xfrm>
-          <a:prstGeom prst="rect">
-            <a:avLst/>
-          </a:prstGeom>
-          <a:noFill/>
-          <a:extLst>
-            <a:ext uri="{909E8E84-426E-40DD-AFC4-6F175D3DCCD1}">
-              <a14:hiddenFill xmlns:a14="http://schemas.microsoft.com/office/drawing/2010/main">
-                <a:solidFill>
-                  <a:srgbClr val="FFFFFF"/>
-                </a:solidFill>
-              </a14:hiddenFill>
-            </a:ext>
-          </a:extLst>
-        </p:spPr>
-      </p:pic>
       <p:sp>
         <p:nvSpPr>
           <p:cNvPr id="5" name="PlaceHolder 1">
@@ -13061,6 +13095,73 @@
           </a:p>
         </p:txBody>
       </p:sp>
+      <p:pic>
+        <p:nvPicPr>
+          <p:cNvPr id="4098" name="Picture 2">
+            <a:extLst>
+              <a:ext uri="{FF2B5EF4-FFF2-40B4-BE49-F238E27FC236}">
+                <a16:creationId xmlns:a16="http://schemas.microsoft.com/office/drawing/2014/main" id="{0F87D6C1-19D9-3E66-0AF5-D25C484ACB71}"/>
+              </a:ext>
+            </a:extLst>
+          </p:cNvPr>
+          <p:cNvPicPr>
+            <a:picLocks noChangeAspect="1" noChangeArrowheads="1"/>
+          </p:cNvPicPr>
+          <p:nvPr/>
+        </p:nvPicPr>
+        <p:blipFill>
+          <a:blip r:embed="rId3">
+            <a:extLst>
+              <a:ext uri="{28A0092B-C50C-407E-A947-70E740481C1C}">
+                <a14:useLocalDpi xmlns:a14="http://schemas.microsoft.com/office/drawing/2010/main" val="0"/>
+              </a:ext>
+            </a:extLst>
+          </a:blip>
+          <a:srcRect/>
+          <a:stretch>
+            <a:fillRect/>
+          </a:stretch>
+        </p:blipFill>
+        <p:spPr bwMode="auto">
+          <a:xfrm>
+            <a:off x="1600200" y="1468920"/>
+            <a:ext cx="8991600" cy="4819650"/>
+          </a:xfrm>
+          <a:prstGeom prst="rect">
+            <a:avLst/>
+          </a:prstGeom>
+          <a:solidFill>
+            <a:srgbClr val="FFFFFF">
+              <a:shade val="85000"/>
+            </a:srgbClr>
+          </a:solidFill>
+          <a:ln w="88900" cap="sq">
+            <a:solidFill>
+              <a:srgbClr val="FFFFFF"/>
+            </a:solidFill>
+            <a:miter lim="800000"/>
+          </a:ln>
+          <a:effectLst>
+            <a:outerShdw blurRad="55000" dist="18000" dir="5400000" algn="tl" rotWithShape="0">
+              <a:srgbClr val="000000">
+                <a:alpha val="40000"/>
+              </a:srgbClr>
+            </a:outerShdw>
+          </a:effectLst>
+          <a:scene3d>
+            <a:camera prst="orthographicFront"/>
+            <a:lightRig rig="twoPt" dir="t">
+              <a:rot lat="0" lon="0" rev="7200000"/>
+            </a:lightRig>
+          </a:scene3d>
+          <a:sp3d>
+            <a:bevelT w="25400" h="19050"/>
+            <a:contourClr>
+              <a:srgbClr val="FFFFFF"/>
+            </a:contourClr>
+          </a:sp3d>
+        </p:spPr>
+      </p:pic>
     </p:spTree>
     <p:extLst>
       <p:ext uri="{BB962C8B-B14F-4D97-AF65-F5344CB8AC3E}">
@@ -13510,14 +13611,15 @@
         </p:nvPicPr>
         <p:blipFill>
           <a:blip r:embed="rId3"/>
+          <a:srcRect b="23850"/>
           <a:stretch>
             <a:fillRect/>
           </a:stretch>
         </p:blipFill>
         <p:spPr>
           <a:xfrm>
-            <a:off x="1154412" y="1930540"/>
-            <a:ext cx="9883175" cy="1587533"/>
+            <a:off x="1154412" y="1930541"/>
+            <a:ext cx="9883175" cy="1208900"/>
           </a:xfrm>
           <a:prstGeom prst="rect">
             <a:avLst/>
@@ -13576,7 +13678,7 @@
         </p:blipFill>
         <p:spPr>
           <a:xfrm>
-            <a:off x="1914058" y="4290042"/>
+            <a:off x="1914057" y="3910398"/>
             <a:ext cx="8363883" cy="1412287"/>
           </a:xfrm>
           <a:prstGeom prst="rect">
@@ -13609,6 +13711,67 @@
             <a:bevelT w="50800" h="16510"/>
             <a:contourClr>
               <a:srgbClr val="C0C0C0"/>
+            </a:contourClr>
+          </a:sp3d>
+        </p:spPr>
+      </p:pic>
+      <p:pic>
+        <p:nvPicPr>
+          <p:cNvPr id="3" name="Picture 2">
+            <a:extLst>
+              <a:ext uri="{FF2B5EF4-FFF2-40B4-BE49-F238E27FC236}">
+                <a16:creationId xmlns:a16="http://schemas.microsoft.com/office/drawing/2014/main" id="{3F7E64C2-508F-1C5B-654C-F229EB824B6B}"/>
+              </a:ext>
+            </a:extLst>
+          </p:cNvPr>
+          <p:cNvPicPr>
+            <a:picLocks noChangeAspect="1"/>
+          </p:cNvPicPr>
+          <p:nvPr/>
+        </p:nvPicPr>
+        <p:blipFill>
+          <a:blip r:embed="rId3"/>
+          <a:srcRect t="78710" r="34785"/>
+          <a:stretch>
+            <a:fillRect/>
+          </a:stretch>
+        </p:blipFill>
+        <p:spPr>
+          <a:xfrm>
+            <a:off x="1154412" y="5883358"/>
+            <a:ext cx="5947429" cy="311886"/>
+          </a:xfrm>
+          <a:prstGeom prst="rect">
+            <a:avLst/>
+          </a:prstGeom>
+          <a:solidFill>
+            <a:srgbClr val="FFFFFF">
+              <a:shade val="85000"/>
+            </a:srgbClr>
+          </a:solidFill>
+          <a:ln w="88900" cap="sq">
+            <a:solidFill>
+              <a:srgbClr val="FFFFFF"/>
+            </a:solidFill>
+            <a:miter lim="800000"/>
+          </a:ln>
+          <a:effectLst>
+            <a:outerShdw blurRad="55000" dist="18000" dir="5400000" algn="tl" rotWithShape="0">
+              <a:srgbClr val="000000">
+                <a:alpha val="40000"/>
+              </a:srgbClr>
+            </a:outerShdw>
+          </a:effectLst>
+          <a:scene3d>
+            <a:camera prst="orthographicFront"/>
+            <a:lightRig rig="twoPt" dir="t">
+              <a:rot lat="0" lon="0" rev="7200000"/>
+            </a:lightRig>
+          </a:scene3d>
+          <a:sp3d>
+            <a:bevelT w="25400" h="19050"/>
+            <a:contourClr>
+              <a:srgbClr val="FFFFFF"/>
             </a:contourClr>
           </a:sp3d>
         </p:spPr>
@@ -14203,6 +14366,12 @@
 </file>
 
 <file path=customXml/item1.xml><?xml version="1.0" encoding="utf-8"?>
+<p:properties xmlns:p="http://schemas.microsoft.com/office/2006/metadata/properties" xmlns:xsi="http://www.w3.org/2001/XMLSchema-instance" xmlns:pc="http://schemas.microsoft.com/office/infopath/2007/PartnerControls">
+  <documentManagement/>
+</p:properties>
+</file>
+
+<file path=customXml/item2.xml><?xml version="1.0" encoding="utf-8"?>
 <?mso-contentType ?>
 <FormTemplates xmlns="http://schemas.microsoft.com/sharepoint/v3/contenttype/forms">
   <Display>DocumentLibraryForm</Display>
@@ -14211,7 +14380,7 @@
 </FormTemplates>
 </file>
 
-<file path=customXml/item2.xml><?xml version="1.0" encoding="utf-8"?>
+<file path=customXml/item3.xml><?xml version="1.0" encoding="utf-8"?>
 <ct:contentTypeSchema xmlns:ct="http://schemas.microsoft.com/office/2006/metadata/contentType" xmlns:ma="http://schemas.microsoft.com/office/2006/metadata/properties/metaAttributes" ct:_="" ma:_="" ma:contentTypeName="מסמך" ma:contentTypeID="0x0101009B09D47D9E93A4429F0CD6A06BF73F25" ma:contentTypeVersion="2" ma:contentTypeDescription="צור מסמך חדש." ma:contentTypeScope="" ma:versionID="73466d0f0cccf3377f8877b2c3dc97be">
   <xsd:schema xmlns:xsd="http://www.w3.org/2001/XMLSchema" xmlns:xs="http://www.w3.org/2001/XMLSchema" xmlns:p="http://schemas.microsoft.com/office/2006/metadata/properties" xmlns:ns3="ce6966b5-b9a2-4047-8ad7-6349593315f9" targetNamespace="http://schemas.microsoft.com/office/2006/metadata/properties" ma:root="true" ma:fieldsID="094fd2ba8f4c59d7ca49435bf2013b23" ns3:_="">
     <xsd:import namespace="ce6966b5-b9a2-4047-8ad7-6349593315f9"/>
@@ -14343,13 +14512,23 @@
 </ct:contentTypeSchema>
 </file>
 
-<file path=customXml/item3.xml><?xml version="1.0" encoding="utf-8"?>
-<p:properties xmlns:p="http://schemas.microsoft.com/office/2006/metadata/properties" xmlns:xsi="http://www.w3.org/2001/XMLSchema-instance" xmlns:pc="http://schemas.microsoft.com/office/infopath/2007/PartnerControls">
-  <documentManagement/>
-</p:properties>
+<file path=customXml/itemProps1.xml><?xml version="1.0" encoding="utf-8"?>
+<ds:datastoreItem xmlns:ds="http://schemas.openxmlformats.org/officeDocument/2006/customXml" ds:itemID="{54C27645-43BB-4483-8570-823D8715A1A2}">
+  <ds:schemaRefs>
+    <ds:schemaRef ds:uri="http://purl.org/dc/dcmitype/"/>
+    <ds:schemaRef ds:uri="http://purl.org/dc/terms/"/>
+    <ds:schemaRef ds:uri="http://schemas.openxmlformats.org/package/2006/metadata/core-properties"/>
+    <ds:schemaRef ds:uri="http://schemas.microsoft.com/office/infopath/2007/PartnerControls"/>
+    <ds:schemaRef ds:uri="http://www.w3.org/XML/1998/namespace"/>
+    <ds:schemaRef ds:uri="http://purl.org/dc/elements/1.1/"/>
+    <ds:schemaRef ds:uri="http://schemas.microsoft.com/office/2006/documentManagement/types"/>
+    <ds:schemaRef ds:uri="ce6966b5-b9a2-4047-8ad7-6349593315f9"/>
+    <ds:schemaRef ds:uri="http://schemas.microsoft.com/office/2006/metadata/properties"/>
+  </ds:schemaRefs>
+</ds:datastoreItem>
 </file>
 
-<file path=customXml/itemProps1.xml><?xml version="1.0" encoding="utf-8"?>
+<file path=customXml/itemProps2.xml><?xml version="1.0" encoding="utf-8"?>
 <ds:datastoreItem xmlns:ds="http://schemas.openxmlformats.org/officeDocument/2006/customXml" ds:itemID="{ADC03A01-1150-476B-9960-38F69024617B}">
   <ds:schemaRefs>
     <ds:schemaRef ds:uri="http://schemas.microsoft.com/sharepoint/v3/contenttype/forms"/>
@@ -14357,7 +14536,7 @@
 </ds:datastoreItem>
 </file>
 
-<file path=customXml/itemProps2.xml><?xml version="1.0" encoding="utf-8"?>
+<file path=customXml/itemProps3.xml><?xml version="1.0" encoding="utf-8"?>
 <ds:datastoreItem xmlns:ds="http://schemas.openxmlformats.org/officeDocument/2006/customXml" ds:itemID="{0240CFFD-E930-4E06-8CC7-91623280D144}">
   <ds:schemaRefs>
     <ds:schemaRef ds:uri="http://schemas.microsoft.com/office/2006/metadata/contentType"/>
@@ -14373,20 +14552,4 @@
     <ds:schemaRef ds:uri="http://schemas.microsoft.com/internal/obd"/>
   </ds:schemaRefs>
 </ds:datastoreItem>
-</file>
-
-<file path=customXml/itemProps3.xml><?xml version="1.0" encoding="utf-8"?>
-<ds:datastoreItem xmlns:ds="http://schemas.openxmlformats.org/officeDocument/2006/customXml" ds:itemID="{54C27645-43BB-4483-8570-823D8715A1A2}">
-  <ds:schemaRefs>
-    <ds:schemaRef ds:uri="http://purl.org/dc/dcmitype/"/>
-    <ds:schemaRef ds:uri="http://purl.org/dc/terms/"/>
-    <ds:schemaRef ds:uri="http://schemas.openxmlformats.org/package/2006/metadata/core-properties"/>
-    <ds:schemaRef ds:uri="http://schemas.microsoft.com/office/infopath/2007/PartnerControls"/>
-    <ds:schemaRef ds:uri="http://www.w3.org/XML/1998/namespace"/>
-    <ds:schemaRef ds:uri="http://purl.org/dc/elements/1.1/"/>
-    <ds:schemaRef ds:uri="http://schemas.microsoft.com/office/2006/documentManagement/types"/>
-    <ds:schemaRef ds:uri="ce6966b5-b9a2-4047-8ad7-6349593315f9"/>
-    <ds:schemaRef ds:uri="http://schemas.microsoft.com/office/2006/metadata/properties"/>
-  </ds:schemaRefs>
-</ds:datastoreItem>
 </file>
--- a/docs/meeting_with_Sayiqan/20250721.pptx
+++ b/docs/meeting_with_Sayiqan/20250721.pptx
@@ -13,13 +13,13 @@
     <p:sldId id="294" r:id="rId7"/>
     <p:sldId id="291" r:id="rId8"/>
     <p:sldId id="292" r:id="rId9"/>
-    <p:sldId id="297" r:id="rId10"/>
-    <p:sldId id="295" r:id="rId11"/>
-    <p:sldId id="296" r:id="rId12"/>
-    <p:sldId id="298" r:id="rId13"/>
-    <p:sldId id="301" r:id="rId14"/>
-    <p:sldId id="299" r:id="rId15"/>
-    <p:sldId id="300" r:id="rId16"/>
+    <p:sldId id="298" r:id="rId10"/>
+    <p:sldId id="297" r:id="rId11"/>
+    <p:sldId id="302" r:id="rId12"/>
+    <p:sldId id="303" r:id="rId13"/>
+    <p:sldId id="304" r:id="rId14"/>
+    <p:sldId id="295" r:id="rId15"/>
+    <p:sldId id="296" r:id="rId16"/>
   </p:sldIdLst>
   <p:sldSz cx="12192000" cy="6858000"/>
   <p:notesSz cx="7104063" cy="10234613"/>
@@ -273,7 +273,7 @@
       </p15:sldGuideLst>
     </p:ext>
     <p:ext uri="GoogleSlidesCustomDataVersion2">
-      <go:slidesCustomData xmlns="" xmlns:mc="http://schemas.openxmlformats.org/markup-compatibility/2006" xmlns:mv="urn:schemas-microsoft-com:mac:vml" xmlns:c="http://schemas.openxmlformats.org/drawingml/2006/chart" xmlns:dgm="http://schemas.openxmlformats.org/drawingml/2006/diagram" xmlns:o="urn:schemas-microsoft-com:office:office" xmlns:v="urn:schemas-microsoft-com:vml" xmlns:pvml="urn:schemas-microsoft-com:office:powerpoint" xmlns:com="http://schemas.openxmlformats.org/drawingml/2006/compatibility" xmlns:p14="http://schemas.microsoft.com/office/powerpoint/2010/main" xmlns:p15="http://schemas.microsoft.com/office/powerpoint/2012/main" xmlns:ahyp="http://schemas.microsoft.com/office/drawing/2018/hyperlinkcolor" xmlns:go="http://customooxmlschemas.google.com/" r:id="rId123" roundtripDataSignature="AMtx7mgOMDNlDYUaLeApPIR7XzNL3h6Jyw=="/>
+      <go:slidesCustomData xmlns:go="http://customooxmlschemas.google.com/" xmlns:ahyp="http://schemas.microsoft.com/office/drawing/2018/hyperlinkcolor" xmlns:p15="http://schemas.microsoft.com/office/powerpoint/2012/main" xmlns:p14="http://schemas.microsoft.com/office/powerpoint/2010/main" xmlns:com="http://schemas.openxmlformats.org/drawingml/2006/compatibility" xmlns:pvml="urn:schemas-microsoft-com:office:powerpoint" xmlns:v="urn:schemas-microsoft-com:vml" xmlns:o="urn:schemas-microsoft-com:office:office" xmlns:dgm="http://schemas.openxmlformats.org/drawingml/2006/diagram" xmlns:c="http://schemas.openxmlformats.org/drawingml/2006/chart" xmlns:mv="urn:schemas-microsoft-com:mac:vml" xmlns:mc="http://schemas.openxmlformats.org/markup-compatibility/2006" xmlns="" r:id="rId123" roundtripDataSignature="AMtx7mgOMDNlDYUaLeApPIR7XzNL3h6Jyw=="/>
     </p:ext>
   </p:extLst>
 </p:presentation>
@@ -1622,7 +1622,7 @@
         <p:cNvPr id="1" name="">
           <a:extLst>
             <a:ext uri="{FF2B5EF4-FFF2-40B4-BE49-F238E27FC236}">
-              <a16:creationId xmlns:a16="http://schemas.microsoft.com/office/drawing/2014/main" id="{7FF2EEDD-F820-41D9-56F0-827D5D69A94C}"/>
+              <a16:creationId xmlns:a16="http://schemas.microsoft.com/office/drawing/2014/main" id="{931F2655-35CC-15AF-8D76-6BC73337C823}"/>
             </a:ext>
           </a:extLst>
         </p:cNvPr>
@@ -1642,7 +1642,7 @@
           <p:cNvPr id="161" name="PlaceHolder 1">
             <a:extLst>
               <a:ext uri="{FF2B5EF4-FFF2-40B4-BE49-F238E27FC236}">
-                <a16:creationId xmlns:a16="http://schemas.microsoft.com/office/drawing/2014/main" id="{3401569C-028B-DC4C-0626-82BB46F4777B}"/>
+                <a16:creationId xmlns:a16="http://schemas.microsoft.com/office/drawing/2014/main" id="{25BC4BC4-57FB-F724-2C31-E2607EAEF036}"/>
               </a:ext>
             </a:extLst>
           </p:cNvPr>
@@ -1671,7 +1671,7 @@
           <p:cNvPr id="162" name="PlaceHolder 2">
             <a:extLst>
               <a:ext uri="{FF2B5EF4-FFF2-40B4-BE49-F238E27FC236}">
-                <a16:creationId xmlns:a16="http://schemas.microsoft.com/office/drawing/2014/main" id="{442948DD-DA49-2A74-6ADF-1ABC4BD773C4}"/>
+                <a16:creationId xmlns:a16="http://schemas.microsoft.com/office/drawing/2014/main" id="{36478E5D-4E40-71EF-5CA6-97E4C2C2AA51}"/>
               </a:ext>
             </a:extLst>
           </p:cNvPr>
@@ -1718,7 +1718,7 @@
           <p:cNvPr id="163" name="PlaceHolder 3">
             <a:extLst>
               <a:ext uri="{FF2B5EF4-FFF2-40B4-BE49-F238E27FC236}">
-                <a16:creationId xmlns:a16="http://schemas.microsoft.com/office/drawing/2014/main" id="{2C913212-18E7-FD71-0BB1-D50586329765}"/>
+                <a16:creationId xmlns:a16="http://schemas.microsoft.com/office/drawing/2014/main" id="{C6297486-5C74-A369-FB83-52DE3668B721}"/>
               </a:ext>
             </a:extLst>
           </p:cNvPr>
@@ -1837,7 +1837,7 @@
     </p:spTree>
     <p:extLst>
       <p:ext uri="{BB962C8B-B14F-4D97-AF65-F5344CB8AC3E}">
-        <p14:creationId xmlns:p14="http://schemas.microsoft.com/office/powerpoint/2010/main" val="2038915649"/>
+        <p14:creationId xmlns:p14="http://schemas.microsoft.com/office/powerpoint/2010/main" val="329003847"/>
       </p:ext>
     </p:extLst>
   </p:cSld>
@@ -1855,7 +1855,7 @@
         <p:cNvPr id="1" name="">
           <a:extLst>
             <a:ext uri="{FF2B5EF4-FFF2-40B4-BE49-F238E27FC236}">
-              <a16:creationId xmlns:a16="http://schemas.microsoft.com/office/drawing/2014/main" id="{125AF59C-5A9B-9170-5347-1503372F32D8}"/>
+              <a16:creationId xmlns:a16="http://schemas.microsoft.com/office/drawing/2014/main" id="{47989BCF-5FF2-EBE3-3F0F-92078BD7155F}"/>
             </a:ext>
           </a:extLst>
         </p:cNvPr>
@@ -1875,7 +1875,7 @@
           <p:cNvPr id="161" name="PlaceHolder 1">
             <a:extLst>
               <a:ext uri="{FF2B5EF4-FFF2-40B4-BE49-F238E27FC236}">
-                <a16:creationId xmlns:a16="http://schemas.microsoft.com/office/drawing/2014/main" id="{1198011C-6830-696F-3A8D-A71AA3579E8B}"/>
+                <a16:creationId xmlns:a16="http://schemas.microsoft.com/office/drawing/2014/main" id="{055E53C3-F713-4875-918C-28D256A76F82}"/>
               </a:ext>
             </a:extLst>
           </p:cNvPr>
@@ -1904,7 +1904,7 @@
           <p:cNvPr id="162" name="PlaceHolder 2">
             <a:extLst>
               <a:ext uri="{FF2B5EF4-FFF2-40B4-BE49-F238E27FC236}">
-                <a16:creationId xmlns:a16="http://schemas.microsoft.com/office/drawing/2014/main" id="{87011F86-2EF8-7B16-4349-201BA7671564}"/>
+                <a16:creationId xmlns:a16="http://schemas.microsoft.com/office/drawing/2014/main" id="{C16A285A-4BD5-8739-57A5-B35428571137}"/>
               </a:ext>
             </a:extLst>
           </p:cNvPr>
@@ -1951,7 +1951,7 @@
           <p:cNvPr id="163" name="PlaceHolder 3">
             <a:extLst>
               <a:ext uri="{FF2B5EF4-FFF2-40B4-BE49-F238E27FC236}">
-                <a16:creationId xmlns:a16="http://schemas.microsoft.com/office/drawing/2014/main" id="{B83620BB-7E98-D52E-68EE-B27B62C2905C}"/>
+                <a16:creationId xmlns:a16="http://schemas.microsoft.com/office/drawing/2014/main" id="{7A7E2B2F-5FEF-2C58-6252-7AAB0EECED44}"/>
               </a:ext>
             </a:extLst>
           </p:cNvPr>
@@ -2070,7 +2070,7 @@
     </p:spTree>
     <p:extLst>
       <p:ext uri="{BB962C8B-B14F-4D97-AF65-F5344CB8AC3E}">
-        <p14:creationId xmlns:p14="http://schemas.microsoft.com/office/powerpoint/2010/main" val="2267047601"/>
+        <p14:creationId xmlns:p14="http://schemas.microsoft.com/office/powerpoint/2010/main" val="2113252681"/>
       </p:ext>
     </p:extLst>
   </p:cSld>
@@ -2088,7 +2088,7 @@
         <p:cNvPr id="1" name="">
           <a:extLst>
             <a:ext uri="{FF2B5EF4-FFF2-40B4-BE49-F238E27FC236}">
-              <a16:creationId xmlns:a16="http://schemas.microsoft.com/office/drawing/2014/main" id="{4D161547-BD96-2DE4-3800-A2F8EA15C99B}"/>
+              <a16:creationId xmlns:a16="http://schemas.microsoft.com/office/drawing/2014/main" id="{0C4F160F-90EF-3B9A-67DD-96E654A406F5}"/>
             </a:ext>
           </a:extLst>
         </p:cNvPr>
@@ -2108,7 +2108,7 @@
           <p:cNvPr id="161" name="PlaceHolder 1">
             <a:extLst>
               <a:ext uri="{FF2B5EF4-FFF2-40B4-BE49-F238E27FC236}">
-                <a16:creationId xmlns:a16="http://schemas.microsoft.com/office/drawing/2014/main" id="{FE7F99CD-B582-E350-07A1-A46D0A2FF837}"/>
+                <a16:creationId xmlns:a16="http://schemas.microsoft.com/office/drawing/2014/main" id="{04F109A5-C0E8-A4E2-515B-171DC3BBA5B4}"/>
               </a:ext>
             </a:extLst>
           </p:cNvPr>
@@ -2137,7 +2137,7 @@
           <p:cNvPr id="162" name="PlaceHolder 2">
             <a:extLst>
               <a:ext uri="{FF2B5EF4-FFF2-40B4-BE49-F238E27FC236}">
-                <a16:creationId xmlns:a16="http://schemas.microsoft.com/office/drawing/2014/main" id="{428FCE43-A85B-A14D-F57D-25B649190D56}"/>
+                <a16:creationId xmlns:a16="http://schemas.microsoft.com/office/drawing/2014/main" id="{6C6CC6C6-0B2D-01F5-9BD1-9C356406F517}"/>
               </a:ext>
             </a:extLst>
           </p:cNvPr>
@@ -2184,7 +2184,7 @@
           <p:cNvPr id="163" name="PlaceHolder 3">
             <a:extLst>
               <a:ext uri="{FF2B5EF4-FFF2-40B4-BE49-F238E27FC236}">
-                <a16:creationId xmlns:a16="http://schemas.microsoft.com/office/drawing/2014/main" id="{2DC79043-3D31-B263-B80B-AD7E29071728}"/>
+                <a16:creationId xmlns:a16="http://schemas.microsoft.com/office/drawing/2014/main" id="{A935961B-FA60-1360-61B9-A127B2DFBD49}"/>
               </a:ext>
             </a:extLst>
           </p:cNvPr>
@@ -2303,7 +2303,7 @@
     </p:spTree>
     <p:extLst>
       <p:ext uri="{BB962C8B-B14F-4D97-AF65-F5344CB8AC3E}">
-        <p14:creationId xmlns:p14="http://schemas.microsoft.com/office/powerpoint/2010/main" val="1508525642"/>
+        <p14:creationId xmlns:p14="http://schemas.microsoft.com/office/powerpoint/2010/main" val="793931640"/>
       </p:ext>
     </p:extLst>
   </p:cSld>
@@ -3229,6 +3229,239 @@
         <p:cNvPr id="1" name="">
           <a:extLst>
             <a:ext uri="{FF2B5EF4-FFF2-40B4-BE49-F238E27FC236}">
+              <a16:creationId xmlns:a16="http://schemas.microsoft.com/office/drawing/2014/main" id="{52738C24-D073-7E1A-21DC-B906E8FE8A17}"/>
+            </a:ext>
+          </a:extLst>
+        </p:cNvPr>
+        <p:cNvGrpSpPr/>
+        <p:nvPr/>
+      </p:nvGrpSpPr>
+      <p:grpSpPr>
+        <a:xfrm>
+          <a:off x="0" y="0"/>
+          <a:ext cx="0" cy="0"/>
+          <a:chOff x="0" y="0"/>
+          <a:chExt cx="0" cy="0"/>
+        </a:xfrm>
+      </p:grpSpPr>
+      <p:sp>
+        <p:nvSpPr>
+          <p:cNvPr id="161" name="PlaceHolder 1">
+            <a:extLst>
+              <a:ext uri="{FF2B5EF4-FFF2-40B4-BE49-F238E27FC236}">
+                <a16:creationId xmlns:a16="http://schemas.microsoft.com/office/drawing/2014/main" id="{5E974F09-402C-3795-E079-DF01CD43066B}"/>
+              </a:ext>
+            </a:extLst>
+          </p:cNvPr>
+          <p:cNvSpPr>
+            <a:spLocks noGrp="1" noRot="1" noChangeAspect="1"/>
+          </p:cNvSpPr>
+          <p:nvPr>
+            <p:ph type="sldImg"/>
+          </p:nvPr>
+        </p:nvSpPr>
+        <p:spPr>
+          <a:xfrm>
+            <a:off x="685800" y="1143000"/>
+            <a:ext cx="5486400" cy="3086100"/>
+          </a:xfrm>
+          <a:prstGeom prst="rect">
+            <a:avLst/>
+          </a:prstGeom>
+          <a:ln w="0">
+            <a:noFill/>
+          </a:ln>
+        </p:spPr>
+      </p:sp>
+      <p:sp>
+        <p:nvSpPr>
+          <p:cNvPr id="162" name="PlaceHolder 2">
+            <a:extLst>
+              <a:ext uri="{FF2B5EF4-FFF2-40B4-BE49-F238E27FC236}">
+                <a16:creationId xmlns:a16="http://schemas.microsoft.com/office/drawing/2014/main" id="{216C7862-7804-E914-637E-A00F875D1E77}"/>
+              </a:ext>
+            </a:extLst>
+          </p:cNvPr>
+          <p:cNvSpPr>
+            <a:spLocks noGrp="1"/>
+          </p:cNvSpPr>
+          <p:nvPr>
+            <p:ph type="body"/>
+          </p:nvPr>
+        </p:nvSpPr>
+        <p:spPr>
+          <a:xfrm>
+            <a:off x="685800" y="4400640"/>
+            <a:ext cx="5485680" cy="3599640"/>
+          </a:xfrm>
+          <a:prstGeom prst="rect">
+            <a:avLst/>
+          </a:prstGeom>
+          <a:noFill/>
+          <a:ln w="0">
+            <a:noFill/>
+          </a:ln>
+        </p:spPr>
+        <p:txBody>
+          <a:bodyPr lIns="91440" tIns="45720" rIns="91440" bIns="45720" anchor="t">
+            <a:noAutofit/>
+          </a:bodyPr>
+          <a:lstStyle/>
+          <a:p>
+            <a:pPr marL="216000" indent="-216000">
+              <a:buNone/>
+            </a:pPr>
+            <a:endParaRPr lang="en-US" sz="1800" b="0" strike="noStrike" spc="-1" dirty="0">
+              <a:solidFill>
+                <a:srgbClr val="000000"/>
+              </a:solidFill>
+              <a:latin typeface="Arial"/>
+            </a:endParaRPr>
+          </a:p>
+        </p:txBody>
+      </p:sp>
+      <p:sp>
+        <p:nvSpPr>
+          <p:cNvPr id="163" name="PlaceHolder 3">
+            <a:extLst>
+              <a:ext uri="{FF2B5EF4-FFF2-40B4-BE49-F238E27FC236}">
+                <a16:creationId xmlns:a16="http://schemas.microsoft.com/office/drawing/2014/main" id="{9FC2715A-C4E3-B63B-2D67-FF9DC7F56A04}"/>
+              </a:ext>
+            </a:extLst>
+          </p:cNvPr>
+          <p:cNvSpPr>
+            <a:spLocks noGrp="1"/>
+          </p:cNvSpPr>
+          <p:nvPr>
+            <p:ph type="sldNum" idx="49"/>
+          </p:nvPr>
+        </p:nvSpPr>
+        <p:spPr>
+          <a:xfrm>
+            <a:off x="3884760" y="8685360"/>
+            <a:ext cx="2971080" cy="457920"/>
+          </a:xfrm>
+          <a:prstGeom prst="rect">
+            <a:avLst/>
+          </a:prstGeom>
+          <a:noFill/>
+          <a:ln w="0">
+            <a:noFill/>
+          </a:ln>
+        </p:spPr>
+        <p:txBody>
+          <a:bodyPr lIns="91440" tIns="45720" rIns="91440" bIns="45720" anchor="b">
+            <a:noAutofit/>
+          </a:bodyPr>
+          <a:lstStyle>
+            <a:lvl1pPr indent="0" algn="r" defTabSz="914400">
+              <a:lnSpc>
+                <a:spcPct val="100000"/>
+              </a:lnSpc>
+              <a:buNone/>
+              <a:tabLst>
+                <a:tab pos="0" algn="l"/>
+              </a:tabLst>
+              <a:defRPr lang="en-US" sz="1200" b="0" strike="noStrike" spc="-1">
+                <a:solidFill>
+                  <a:srgbClr val="000000"/>
+                </a:solidFill>
+                <a:latin typeface="Calibri"/>
+                <a:ea typeface="+mn-ea"/>
+              </a:defRPr>
+            </a:lvl1pPr>
+          </a:lstStyle>
+          <a:p>
+            <a:pPr marL="0" marR="0" lvl="0" indent="0" algn="r" defTabSz="914400" rtl="0" eaLnBrk="1" fontAlgn="auto" latinLnBrk="0" hangingPunct="1">
+              <a:lnSpc>
+                <a:spcPct val="100000"/>
+              </a:lnSpc>
+              <a:spcBef>
+                <a:spcPts val="0"/>
+              </a:spcBef>
+              <a:spcAft>
+                <a:spcPts val="0"/>
+              </a:spcAft>
+              <a:buClrTx/>
+              <a:buSzTx/>
+              <a:buFontTx/>
+              <a:buNone/>
+              <a:tabLst>
+                <a:tab pos="0" algn="l"/>
+              </a:tabLst>
+              <a:defRPr/>
+            </a:pPr>
+            <a:fld id="{CA945975-2448-4E18-A2C2-A72B917D14C7}" type="slidenum">
+              <a:rPr kumimoji="0" lang="en-US" sz="1200" b="0" i="0" u="none" strike="noStrike" kern="1200" cap="none" spc="-1" normalizeH="0" baseline="0" noProof="0">
+                <a:ln>
+                  <a:noFill/>
+                </a:ln>
+                <a:solidFill>
+                  <a:srgbClr val="000000"/>
+                </a:solidFill>
+                <a:effectLst/>
+                <a:uLnTx/>
+                <a:uFillTx/>
+                <a:latin typeface="Calibri"/>
+                <a:ea typeface="+mn-ea"/>
+              </a:rPr>
+              <a:pPr marL="0" marR="0" lvl="0" indent="0" algn="r" defTabSz="914400" rtl="0" eaLnBrk="1" fontAlgn="auto" latinLnBrk="0" hangingPunct="1">
+                <a:lnSpc>
+                  <a:spcPct val="100000"/>
+                </a:lnSpc>
+                <a:spcBef>
+                  <a:spcPts val="0"/>
+                </a:spcBef>
+                <a:spcAft>
+                  <a:spcPts val="0"/>
+                </a:spcAft>
+                <a:buClrTx/>
+                <a:buSzTx/>
+                <a:buFontTx/>
+                <a:buNone/>
+                <a:tabLst>
+                  <a:tab pos="0" algn="l"/>
+                </a:tabLst>
+                <a:defRPr/>
+              </a:pPr>
+              <a:t>6</a:t>
+            </a:fld>
+            <a:endParaRPr kumimoji="0" lang="en-US" sz="1200" b="0" i="0" u="none" strike="noStrike" kern="1200" cap="none" spc="-1" normalizeH="0" baseline="0" noProof="0">
+              <a:ln>
+                <a:noFill/>
+              </a:ln>
+              <a:solidFill>
+                <a:srgbClr val="000000"/>
+              </a:solidFill>
+              <a:effectLst/>
+              <a:uLnTx/>
+              <a:uFillTx/>
+              <a:latin typeface="Times New Roman"/>
+            </a:endParaRPr>
+          </a:p>
+        </p:txBody>
+      </p:sp>
+    </p:spTree>
+    <p:extLst>
+      <p:ext uri="{BB962C8B-B14F-4D97-AF65-F5344CB8AC3E}">
+        <p14:creationId xmlns:p14="http://schemas.microsoft.com/office/powerpoint/2010/main" val="2303262926"/>
+      </p:ext>
+    </p:extLst>
+  </p:cSld>
+  <p:clrMapOvr>
+    <a:masterClrMapping/>
+  </p:clrMapOvr>
+</p:notes>
+</file>
+
+<file path=ppt/notesSlides/notesSlide7.xml><?xml version="1.0" encoding="utf-8"?>
+<p:notes xmlns:a="http://schemas.openxmlformats.org/drawingml/2006/main" xmlns:r="http://schemas.openxmlformats.org/officeDocument/2006/relationships" xmlns:p="http://schemas.openxmlformats.org/presentationml/2006/main">
+  <p:cSld>
+    <p:spTree>
+      <p:nvGrpSpPr>
+        <p:cNvPr id="1" name="">
+          <a:extLst>
+            <a:ext uri="{FF2B5EF4-FFF2-40B4-BE49-F238E27FC236}">
               <a16:creationId xmlns:a16="http://schemas.microsoft.com/office/drawing/2014/main" id="{1049DA49-D903-25FE-497E-270A8030077C}"/>
             </a:ext>
           </a:extLst>
@@ -3424,7 +3657,7 @@
                 </a:tabLst>
                 <a:defRPr/>
               </a:pPr>
-              <a:t>6</a:t>
+              <a:t>7</a:t>
             </a:fld>
             <a:endParaRPr kumimoji="0" lang="en-US" sz="1200" b="0" i="0" u="none" strike="noStrike" kern="1200" cap="none" spc="-1" normalizeH="0" baseline="0" noProof="0">
               <a:ln>
@@ -3454,7 +3687,7 @@
 </p:notes>
 </file>
 
-<file path=ppt/notesSlides/notesSlide7.xml><?xml version="1.0" encoding="utf-8"?>
+<file path=ppt/notesSlides/notesSlide8.xml><?xml version="1.0" encoding="utf-8"?>
 <p:notes xmlns:a="http://schemas.openxmlformats.org/drawingml/2006/main" xmlns:r="http://schemas.openxmlformats.org/officeDocument/2006/relationships" xmlns:p="http://schemas.openxmlformats.org/presentationml/2006/main">
   <p:cSld>
     <p:spTree>
@@ -3462,7 +3695,7 @@
         <p:cNvPr id="1" name="">
           <a:extLst>
             <a:ext uri="{FF2B5EF4-FFF2-40B4-BE49-F238E27FC236}">
-              <a16:creationId xmlns:a16="http://schemas.microsoft.com/office/drawing/2014/main" id="{47989BCF-5FF2-EBE3-3F0F-92078BD7155F}"/>
+              <a16:creationId xmlns:a16="http://schemas.microsoft.com/office/drawing/2014/main" id="{3D997907-904C-E255-3AAA-6E9F0C5209D1}"/>
             </a:ext>
           </a:extLst>
         </p:cNvPr>
@@ -3482,7 +3715,7 @@
           <p:cNvPr id="161" name="PlaceHolder 1">
             <a:extLst>
               <a:ext uri="{FF2B5EF4-FFF2-40B4-BE49-F238E27FC236}">
-                <a16:creationId xmlns:a16="http://schemas.microsoft.com/office/drawing/2014/main" id="{055E53C3-F713-4875-918C-28D256A76F82}"/>
+                <a16:creationId xmlns:a16="http://schemas.microsoft.com/office/drawing/2014/main" id="{1D68BEA9-0A23-BACC-8E18-15A34D49D2C7}"/>
               </a:ext>
             </a:extLst>
           </p:cNvPr>
@@ -3511,7 +3744,7 @@
           <p:cNvPr id="162" name="PlaceHolder 2">
             <a:extLst>
               <a:ext uri="{FF2B5EF4-FFF2-40B4-BE49-F238E27FC236}">
-                <a16:creationId xmlns:a16="http://schemas.microsoft.com/office/drawing/2014/main" id="{C16A285A-4BD5-8739-57A5-B35428571137}"/>
+                <a16:creationId xmlns:a16="http://schemas.microsoft.com/office/drawing/2014/main" id="{D57E64C5-4A53-195F-5A91-99C350CA53C3}"/>
               </a:ext>
             </a:extLst>
           </p:cNvPr>
@@ -3558,7 +3791,7 @@
           <p:cNvPr id="163" name="PlaceHolder 3">
             <a:extLst>
               <a:ext uri="{FF2B5EF4-FFF2-40B4-BE49-F238E27FC236}">
-                <a16:creationId xmlns:a16="http://schemas.microsoft.com/office/drawing/2014/main" id="{7A7E2B2F-5FEF-2C58-6252-7AAB0EECED44}"/>
+                <a16:creationId xmlns:a16="http://schemas.microsoft.com/office/drawing/2014/main" id="{8296DF0D-F886-64A8-0847-CD264F923B76}"/>
               </a:ext>
             </a:extLst>
           </p:cNvPr>
@@ -3657,7 +3890,7 @@
                 </a:tabLst>
                 <a:defRPr/>
               </a:pPr>
-              <a:t>7</a:t>
+              <a:t>8</a:t>
             </a:fld>
             <a:endParaRPr kumimoji="0" lang="en-US" sz="1200" b="0" i="0" u="none" strike="noStrike" kern="1200" cap="none" spc="-1" normalizeH="0" baseline="0" noProof="0">
               <a:ln>
@@ -3677,7 +3910,7 @@
     </p:spTree>
     <p:extLst>
       <p:ext uri="{BB962C8B-B14F-4D97-AF65-F5344CB8AC3E}">
-        <p14:creationId xmlns:p14="http://schemas.microsoft.com/office/powerpoint/2010/main" val="2113252681"/>
+        <p14:creationId xmlns:p14="http://schemas.microsoft.com/office/powerpoint/2010/main" val="3421531096"/>
       </p:ext>
     </p:extLst>
   </p:cSld>
@@ -3687,7 +3920,7 @@
 </p:notes>
 </file>
 
-<file path=ppt/notesSlides/notesSlide8.xml><?xml version="1.0" encoding="utf-8"?>
+<file path=ppt/notesSlides/notesSlide9.xml><?xml version="1.0" encoding="utf-8"?>
 <p:notes xmlns:a="http://schemas.openxmlformats.org/drawingml/2006/main" xmlns:r="http://schemas.openxmlformats.org/officeDocument/2006/relationships" xmlns:p="http://schemas.openxmlformats.org/presentationml/2006/main">
   <p:cSld>
     <p:spTree>
@@ -3695,7 +3928,7 @@
         <p:cNvPr id="1" name="">
           <a:extLst>
             <a:ext uri="{FF2B5EF4-FFF2-40B4-BE49-F238E27FC236}">
-              <a16:creationId xmlns:a16="http://schemas.microsoft.com/office/drawing/2014/main" id="{0C4F160F-90EF-3B9A-67DD-96E654A406F5}"/>
+              <a16:creationId xmlns:a16="http://schemas.microsoft.com/office/drawing/2014/main" id="{2EB9E575-F5E6-5CF5-3685-30A40352B44C}"/>
             </a:ext>
           </a:extLst>
         </p:cNvPr>
@@ -3715,7 +3948,7 @@
           <p:cNvPr id="161" name="PlaceHolder 1">
             <a:extLst>
               <a:ext uri="{FF2B5EF4-FFF2-40B4-BE49-F238E27FC236}">
-                <a16:creationId xmlns:a16="http://schemas.microsoft.com/office/drawing/2014/main" id="{04F109A5-C0E8-A4E2-515B-171DC3BBA5B4}"/>
+                <a16:creationId xmlns:a16="http://schemas.microsoft.com/office/drawing/2014/main" id="{B09E3135-4F8F-B1B6-8357-73B95056B7EA}"/>
               </a:ext>
             </a:extLst>
           </p:cNvPr>
@@ -3744,7 +3977,7 @@
           <p:cNvPr id="162" name="PlaceHolder 2">
             <a:extLst>
               <a:ext uri="{FF2B5EF4-FFF2-40B4-BE49-F238E27FC236}">
-                <a16:creationId xmlns:a16="http://schemas.microsoft.com/office/drawing/2014/main" id="{6C6CC6C6-0B2D-01F5-9BD1-9C356406F517}"/>
+                <a16:creationId xmlns:a16="http://schemas.microsoft.com/office/drawing/2014/main" id="{E26784B3-FAC9-FDFD-059D-A6A9521B2DDE}"/>
               </a:ext>
             </a:extLst>
           </p:cNvPr>
@@ -3791,240 +4024,7 @@
           <p:cNvPr id="163" name="PlaceHolder 3">
             <a:extLst>
               <a:ext uri="{FF2B5EF4-FFF2-40B4-BE49-F238E27FC236}">
-                <a16:creationId xmlns:a16="http://schemas.microsoft.com/office/drawing/2014/main" id="{A935961B-FA60-1360-61B9-A127B2DFBD49}"/>
-              </a:ext>
-            </a:extLst>
-          </p:cNvPr>
-          <p:cNvSpPr>
-            <a:spLocks noGrp="1"/>
-          </p:cNvSpPr>
-          <p:nvPr>
-            <p:ph type="sldNum" idx="49"/>
-          </p:nvPr>
-        </p:nvSpPr>
-        <p:spPr>
-          <a:xfrm>
-            <a:off x="3884760" y="8685360"/>
-            <a:ext cx="2971080" cy="457920"/>
-          </a:xfrm>
-          <a:prstGeom prst="rect">
-            <a:avLst/>
-          </a:prstGeom>
-          <a:noFill/>
-          <a:ln w="0">
-            <a:noFill/>
-          </a:ln>
-        </p:spPr>
-        <p:txBody>
-          <a:bodyPr lIns="91440" tIns="45720" rIns="91440" bIns="45720" anchor="b">
-            <a:noAutofit/>
-          </a:bodyPr>
-          <a:lstStyle>
-            <a:lvl1pPr indent="0" algn="r" defTabSz="914400">
-              <a:lnSpc>
-                <a:spcPct val="100000"/>
-              </a:lnSpc>
-              <a:buNone/>
-              <a:tabLst>
-                <a:tab pos="0" algn="l"/>
-              </a:tabLst>
-              <a:defRPr lang="en-US" sz="1200" b="0" strike="noStrike" spc="-1">
-                <a:solidFill>
-                  <a:srgbClr val="000000"/>
-                </a:solidFill>
-                <a:latin typeface="Calibri"/>
-                <a:ea typeface="+mn-ea"/>
-              </a:defRPr>
-            </a:lvl1pPr>
-          </a:lstStyle>
-          <a:p>
-            <a:pPr marL="0" marR="0" lvl="0" indent="0" algn="r" defTabSz="914400" rtl="0" eaLnBrk="1" fontAlgn="auto" latinLnBrk="0" hangingPunct="1">
-              <a:lnSpc>
-                <a:spcPct val="100000"/>
-              </a:lnSpc>
-              <a:spcBef>
-                <a:spcPts val="0"/>
-              </a:spcBef>
-              <a:spcAft>
-                <a:spcPts val="0"/>
-              </a:spcAft>
-              <a:buClrTx/>
-              <a:buSzTx/>
-              <a:buFontTx/>
-              <a:buNone/>
-              <a:tabLst>
-                <a:tab pos="0" algn="l"/>
-              </a:tabLst>
-              <a:defRPr/>
-            </a:pPr>
-            <a:fld id="{CA945975-2448-4E18-A2C2-A72B917D14C7}" type="slidenum">
-              <a:rPr kumimoji="0" lang="en-US" sz="1200" b="0" i="0" u="none" strike="noStrike" kern="1200" cap="none" spc="-1" normalizeH="0" baseline="0" noProof="0">
-                <a:ln>
-                  <a:noFill/>
-                </a:ln>
-                <a:solidFill>
-                  <a:srgbClr val="000000"/>
-                </a:solidFill>
-                <a:effectLst/>
-                <a:uLnTx/>
-                <a:uFillTx/>
-                <a:latin typeface="Calibri"/>
-                <a:ea typeface="+mn-ea"/>
-              </a:rPr>
-              <a:pPr marL="0" marR="0" lvl="0" indent="0" algn="r" defTabSz="914400" rtl="0" eaLnBrk="1" fontAlgn="auto" latinLnBrk="0" hangingPunct="1">
-                <a:lnSpc>
-                  <a:spcPct val="100000"/>
-                </a:lnSpc>
-                <a:spcBef>
-                  <a:spcPts val="0"/>
-                </a:spcBef>
-                <a:spcAft>
-                  <a:spcPts val="0"/>
-                </a:spcAft>
-                <a:buClrTx/>
-                <a:buSzTx/>
-                <a:buFontTx/>
-                <a:buNone/>
-                <a:tabLst>
-                  <a:tab pos="0" algn="l"/>
-                </a:tabLst>
-                <a:defRPr/>
-              </a:pPr>
-              <a:t>8</a:t>
-            </a:fld>
-            <a:endParaRPr kumimoji="0" lang="en-US" sz="1200" b="0" i="0" u="none" strike="noStrike" kern="1200" cap="none" spc="-1" normalizeH="0" baseline="0" noProof="0">
-              <a:ln>
-                <a:noFill/>
-              </a:ln>
-              <a:solidFill>
-                <a:srgbClr val="000000"/>
-              </a:solidFill>
-              <a:effectLst/>
-              <a:uLnTx/>
-              <a:uFillTx/>
-              <a:latin typeface="Times New Roman"/>
-            </a:endParaRPr>
-          </a:p>
-        </p:txBody>
-      </p:sp>
-    </p:spTree>
-    <p:extLst>
-      <p:ext uri="{BB962C8B-B14F-4D97-AF65-F5344CB8AC3E}">
-        <p14:creationId xmlns:p14="http://schemas.microsoft.com/office/powerpoint/2010/main" val="793931640"/>
-      </p:ext>
-    </p:extLst>
-  </p:cSld>
-  <p:clrMapOvr>
-    <a:masterClrMapping/>
-  </p:clrMapOvr>
-</p:notes>
-</file>
-
-<file path=ppt/notesSlides/notesSlide9.xml><?xml version="1.0" encoding="utf-8"?>
-<p:notes xmlns:a="http://schemas.openxmlformats.org/drawingml/2006/main" xmlns:r="http://schemas.openxmlformats.org/officeDocument/2006/relationships" xmlns:p="http://schemas.openxmlformats.org/presentationml/2006/main">
-  <p:cSld>
-    <p:spTree>
-      <p:nvGrpSpPr>
-        <p:cNvPr id="1" name="">
-          <a:extLst>
-            <a:ext uri="{FF2B5EF4-FFF2-40B4-BE49-F238E27FC236}">
-              <a16:creationId xmlns:a16="http://schemas.microsoft.com/office/drawing/2014/main" id="{52738C24-D073-7E1A-21DC-B906E8FE8A17}"/>
-            </a:ext>
-          </a:extLst>
-        </p:cNvPr>
-        <p:cNvGrpSpPr/>
-        <p:nvPr/>
-      </p:nvGrpSpPr>
-      <p:grpSpPr>
-        <a:xfrm>
-          <a:off x="0" y="0"/>
-          <a:ext cx="0" cy="0"/>
-          <a:chOff x="0" y="0"/>
-          <a:chExt cx="0" cy="0"/>
-        </a:xfrm>
-      </p:grpSpPr>
-      <p:sp>
-        <p:nvSpPr>
-          <p:cNvPr id="161" name="PlaceHolder 1">
-            <a:extLst>
-              <a:ext uri="{FF2B5EF4-FFF2-40B4-BE49-F238E27FC236}">
-                <a16:creationId xmlns:a16="http://schemas.microsoft.com/office/drawing/2014/main" id="{5E974F09-402C-3795-E079-DF01CD43066B}"/>
-              </a:ext>
-            </a:extLst>
-          </p:cNvPr>
-          <p:cNvSpPr>
-            <a:spLocks noGrp="1" noRot="1" noChangeAspect="1"/>
-          </p:cNvSpPr>
-          <p:nvPr>
-            <p:ph type="sldImg"/>
-          </p:nvPr>
-        </p:nvSpPr>
-        <p:spPr>
-          <a:xfrm>
-            <a:off x="685800" y="1143000"/>
-            <a:ext cx="5486400" cy="3086100"/>
-          </a:xfrm>
-          <a:prstGeom prst="rect">
-            <a:avLst/>
-          </a:prstGeom>
-          <a:ln w="0">
-            <a:noFill/>
-          </a:ln>
-        </p:spPr>
-      </p:sp>
-      <p:sp>
-        <p:nvSpPr>
-          <p:cNvPr id="162" name="PlaceHolder 2">
-            <a:extLst>
-              <a:ext uri="{FF2B5EF4-FFF2-40B4-BE49-F238E27FC236}">
-                <a16:creationId xmlns:a16="http://schemas.microsoft.com/office/drawing/2014/main" id="{216C7862-7804-E914-637E-A00F875D1E77}"/>
-              </a:ext>
-            </a:extLst>
-          </p:cNvPr>
-          <p:cNvSpPr>
-            <a:spLocks noGrp="1"/>
-          </p:cNvSpPr>
-          <p:nvPr>
-            <p:ph type="body"/>
-          </p:nvPr>
-        </p:nvSpPr>
-        <p:spPr>
-          <a:xfrm>
-            <a:off x="685800" y="4400640"/>
-            <a:ext cx="5485680" cy="3599640"/>
-          </a:xfrm>
-          <a:prstGeom prst="rect">
-            <a:avLst/>
-          </a:prstGeom>
-          <a:noFill/>
-          <a:ln w="0">
-            <a:noFill/>
-          </a:ln>
-        </p:spPr>
-        <p:txBody>
-          <a:bodyPr lIns="91440" tIns="45720" rIns="91440" bIns="45720" anchor="t">
-            <a:noAutofit/>
-          </a:bodyPr>
-          <a:lstStyle/>
-          <a:p>
-            <a:pPr marL="216000" indent="-216000">
-              <a:buNone/>
-            </a:pPr>
-            <a:endParaRPr lang="en-US" sz="1800" b="0" strike="noStrike" spc="-1" dirty="0">
-              <a:solidFill>
-                <a:srgbClr val="000000"/>
-              </a:solidFill>
-              <a:latin typeface="Arial"/>
-            </a:endParaRPr>
-          </a:p>
-        </p:txBody>
-      </p:sp>
-      <p:sp>
-        <p:nvSpPr>
-          <p:cNvPr id="163" name="PlaceHolder 3">
-            <a:extLst>
-              <a:ext uri="{FF2B5EF4-FFF2-40B4-BE49-F238E27FC236}">
-                <a16:creationId xmlns:a16="http://schemas.microsoft.com/office/drawing/2014/main" id="{9FC2715A-C4E3-B63B-2D67-FF9DC7F56A04}"/>
+                <a16:creationId xmlns:a16="http://schemas.microsoft.com/office/drawing/2014/main" id="{A12775E3-A79B-F65C-32E7-4B22538205B4}"/>
               </a:ext>
             </a:extLst>
           </p:cNvPr>
@@ -4143,7 +4143,7 @@
     </p:spTree>
     <p:extLst>
       <p:ext uri="{BB962C8B-B14F-4D97-AF65-F5344CB8AC3E}">
-        <p14:creationId xmlns:p14="http://schemas.microsoft.com/office/powerpoint/2010/main" val="2303262926"/>
+        <p14:creationId xmlns:p14="http://schemas.microsoft.com/office/powerpoint/2010/main" val="3764375260"/>
       </p:ext>
     </p:extLst>
   </p:cSld>
@@ -4193,7 +4193,7 @@
           <a:p>
             <a:fld id="{C29F3CA8-2E63-412C-AA06-0D760EBE5965}" type="datetime8">
               <a:rPr lang="he-IL" smtClean="0"/>
-              <a:t>21 יולי 25</a:t>
+              <a:t>23 יולי 25</a:t>
             </a:fld>
             <a:endParaRPr lang="he-IL"/>
           </a:p>
@@ -4559,7 +4559,7 @@
                 <a:ea typeface="+mn-ea"/>
                 <a:cs typeface="+mn-cs"/>
               </a:rPr>
-              <a:t>21 יולי 25</a:t>
+              <a:t>23 יולי 25</a:t>
             </a:fld>
             <a:endParaRPr kumimoji="0" lang="en-US" sz="1400" b="0" i="0" u="none" strike="noStrike" kern="1200" cap="none" spc="-1" normalizeH="0" baseline="0" noProof="0">
               <a:ln>
@@ -4660,7 +4660,7 @@
           <a:p>
             <a:fld id="{8E065D1C-C98B-44F5-AB2A-FEE3E85D0A94}" type="datetime8">
               <a:rPr lang="he-IL" smtClean="0"/>
-              <a:t>21 יולי 25</a:t>
+              <a:t>23 יולי 25</a:t>
             </a:fld>
             <a:endParaRPr lang="he-IL"/>
           </a:p>
@@ -6851,7 +6851,7 @@
           <a:p>
             <a:fld id="{8E065D1C-C98B-44F5-AB2A-FEE3E85D0A94}" type="datetime8">
               <a:rPr lang="he-IL" smtClean="0"/>
-              <a:t>21 יולי 25</a:t>
+              <a:t>23 יולי 25</a:t>
             </a:fld>
             <a:endParaRPr lang="he-IL"/>
           </a:p>
@@ -7856,7 +7856,7 @@
                 </a:solidFill>
                 <a:latin typeface="Calibri" panose="020F0502020204030204"/>
               </a:rPr>
-              <a:t>21</a:t>
+              <a:t>23</a:t>
             </a:r>
             <a:r>
               <a:rPr lang="en-US" sz="2400" kern="1200" dirty="0">
@@ -7905,7 +7905,7 @@
         <p:cNvPr id="1" name="">
           <a:extLst>
             <a:ext uri="{FF2B5EF4-FFF2-40B4-BE49-F238E27FC236}">
-              <a16:creationId xmlns:a16="http://schemas.microsoft.com/office/drawing/2014/main" id="{BDDC0871-F7A5-CFF7-0FE4-BE520637405E}"/>
+              <a16:creationId xmlns:a16="http://schemas.microsoft.com/office/drawing/2014/main" id="{32A93833-B263-7167-BDAF-DF97E8788ECC}"/>
             </a:ext>
           </a:extLst>
         </p:cNvPr>
@@ -7922,106 +7922,10 @@
       </p:grpSpPr>
       <p:sp>
         <p:nvSpPr>
-          <p:cNvPr id="8" name="PlaceHolder 1">
-            <a:extLst>
-              <a:ext uri="{FF2B5EF4-FFF2-40B4-BE49-F238E27FC236}">
-                <a16:creationId xmlns:a16="http://schemas.microsoft.com/office/drawing/2014/main" id="{FE9F604E-83C6-B1E8-B5BF-B34B4FD2DE88}"/>
-              </a:ext>
-            </a:extLst>
-          </p:cNvPr>
-          <p:cNvSpPr txBox="1">
-            <a:spLocks/>
-          </p:cNvSpPr>
-          <p:nvPr/>
-        </p:nvSpPr>
-        <p:spPr>
-          <a:xfrm>
-            <a:off x="3250497" y="433610"/>
-            <a:ext cx="7793423" cy="766000"/>
-          </a:xfrm>
-          <a:prstGeom prst="rect">
-            <a:avLst/>
-          </a:prstGeom>
-          <a:noFill/>
-          <a:ln w="0">
-            <a:noFill/>
-          </a:ln>
-        </p:spPr>
-        <p:txBody>
-          <a:bodyPr lIns="91440" tIns="45720" rIns="91440" bIns="45720" anchor="b">
-            <a:noAutofit/>
-          </a:bodyPr>
-          <a:lstStyle>
-            <a:lvl1pPr algn="l" defTabSz="914400" rtl="0" eaLnBrk="1" latinLnBrk="0" hangingPunct="1">
-              <a:lnSpc>
-                <a:spcPct val="90000"/>
-              </a:lnSpc>
-              <a:spcBef>
-                <a:spcPct val="0"/>
-              </a:spcBef>
-              <a:buNone/>
-              <a:defRPr sz="4400" kern="1200">
-                <a:solidFill>
-                  <a:schemeClr val="tx1"/>
-                </a:solidFill>
-                <a:latin typeface="+mj-lt"/>
-                <a:ea typeface="+mj-ea"/>
-                <a:cs typeface="+mj-cs"/>
-              </a:defRPr>
-            </a:lvl1pPr>
-          </a:lstStyle>
-          <a:p>
-            <a:pPr marL="0" marR="0" lvl="0" indent="0" algn="l" defTabSz="914400" rtl="0" eaLnBrk="1" fontAlgn="auto" latinLnBrk="0" hangingPunct="1">
-              <a:lnSpc>
-                <a:spcPct val="90000"/>
-              </a:lnSpc>
-              <a:spcBef>
-                <a:spcPct val="0"/>
-              </a:spcBef>
-              <a:spcAft>
-                <a:spcPts val="0"/>
-              </a:spcAft>
-              <a:buClrTx/>
-              <a:buSzTx/>
-              <a:buFontTx/>
-              <a:buNone/>
-              <a:tabLst>
-                <a:tab pos="0" algn="l"/>
-              </a:tabLst>
-              <a:defRPr/>
-            </a:pPr>
-            <a:r>
-              <a:rPr lang="en-US" sz="3600" spc="-1" dirty="0">
-                <a:solidFill>
-                  <a:srgbClr val="009DBB"/>
-                </a:solidFill>
-                <a:latin typeface="Arial"/>
-              </a:rPr>
-              <a:t>Author’s Activity – One Topic Table</a:t>
-            </a:r>
-            <a:endParaRPr kumimoji="0" lang="en-US" sz="3600" b="0" i="0" u="none" strike="noStrike" kern="1200" cap="none" spc="-1" normalizeH="0" baseline="0" noProof="0" dirty="0">
-              <a:ln>
-                <a:noFill/>
-              </a:ln>
-              <a:solidFill>
-                <a:srgbClr val="000000"/>
-              </a:solidFill>
-              <a:effectLst/>
-              <a:uLnTx/>
-              <a:uFillTx/>
-              <a:latin typeface="Arial"/>
-              <a:ea typeface="+mj-ea"/>
-              <a:cs typeface="+mj-cs"/>
-            </a:endParaRPr>
-          </a:p>
-        </p:txBody>
-      </p:sp>
-      <p:sp>
-        <p:nvSpPr>
           <p:cNvPr id="2" name="Slide Number Placeholder 3">
             <a:extLst>
               <a:ext uri="{FF2B5EF4-FFF2-40B4-BE49-F238E27FC236}">
-                <a16:creationId xmlns:a16="http://schemas.microsoft.com/office/drawing/2014/main" id="{DBD4435A-21A3-55F4-9A13-059601776BB0}"/>
+                <a16:creationId xmlns:a16="http://schemas.microsoft.com/office/drawing/2014/main" id="{41AB789B-B325-3A86-EA97-1C7F1504B33F}"/>
               </a:ext>
             </a:extLst>
           </p:cNvPr>
@@ -8317,254 +8221,139 @@
           </a:p>
         </p:txBody>
       </p:sp>
-      <p:pic>
-        <p:nvPicPr>
-          <p:cNvPr id="4" name="Picture 3">
+      <p:sp>
+        <p:nvSpPr>
+          <p:cNvPr id="5" name="PlaceHolder 1">
             <a:extLst>
               <a:ext uri="{FF2B5EF4-FFF2-40B4-BE49-F238E27FC236}">
-                <a16:creationId xmlns:a16="http://schemas.microsoft.com/office/drawing/2014/main" id="{F160BC20-D7B1-8268-A6B6-43E86A699CDD}"/>
+                <a16:creationId xmlns:a16="http://schemas.microsoft.com/office/drawing/2014/main" id="{1EA8C017-76A9-48CD-771D-85AEB78809F0}"/>
               </a:ext>
             </a:extLst>
           </p:cNvPr>
-          <p:cNvPicPr>
-            <a:picLocks noChangeAspect="1"/>
-          </p:cNvPicPr>
+          <p:cNvSpPr txBox="1">
+            <a:spLocks/>
+          </p:cNvSpPr>
           <p:nvPr/>
-        </p:nvPicPr>
-        <p:blipFill>
-          <a:blip r:embed="rId3"/>
-          <a:srcRect b="17558"/>
-          <a:stretch>
-            <a:fillRect/>
-          </a:stretch>
-        </p:blipFill>
+        </p:nvSpPr>
         <p:spPr>
           <a:xfrm>
-            <a:off x="445588" y="1779623"/>
-            <a:ext cx="11300823" cy="969007"/>
+            <a:off x="3556000" y="514491"/>
+            <a:ext cx="8229768" cy="766000"/>
           </a:xfrm>
           <a:prstGeom prst="rect">
             <a:avLst/>
           </a:prstGeom>
-          <a:solidFill>
-            <a:srgbClr val="FFFFFF">
-              <a:shade val="85000"/>
-            </a:srgbClr>
-          </a:solidFill>
-          <a:ln w="88900" cap="sq">
-            <a:solidFill>
-              <a:srgbClr val="FFFFFF"/>
-            </a:solidFill>
-            <a:miter lim="800000"/>
+          <a:noFill/>
+          <a:ln w="0">
+            <a:noFill/>
           </a:ln>
-          <a:effectLst>
-            <a:outerShdw blurRad="55000" dist="18000" dir="5400000" algn="tl" rotWithShape="0">
-              <a:srgbClr val="000000">
-                <a:alpha val="40000"/>
-              </a:srgbClr>
-            </a:outerShdw>
-          </a:effectLst>
-          <a:scene3d>
-            <a:camera prst="orthographicFront"/>
-            <a:lightRig rig="twoPt" dir="t">
-              <a:rot lat="0" lon="0" rev="7200000"/>
-            </a:lightRig>
-          </a:scene3d>
-          <a:sp3d>
-            <a:bevelT w="25400" h="19050"/>
-            <a:contourClr>
-              <a:srgbClr val="FFFFFF"/>
-            </a:contourClr>
-          </a:sp3d>
         </p:spPr>
-      </p:pic>
-      <p:pic>
-        <p:nvPicPr>
-          <p:cNvPr id="9" name="Picture 8">
+        <p:txBody>
+          <a:bodyPr lIns="91440" tIns="45720" rIns="91440" bIns="45720" anchor="b">
+            <a:noAutofit/>
+          </a:bodyPr>
+          <a:lstStyle>
+            <a:lvl1pPr algn="l" defTabSz="914400" rtl="0" eaLnBrk="1" latinLnBrk="0" hangingPunct="1">
+              <a:lnSpc>
+                <a:spcPct val="90000"/>
+              </a:lnSpc>
+              <a:spcBef>
+                <a:spcPct val="0"/>
+              </a:spcBef>
+              <a:buNone/>
+              <a:defRPr sz="4400" kern="1200">
+                <a:solidFill>
+                  <a:schemeClr val="tx1"/>
+                </a:solidFill>
+                <a:latin typeface="+mj-lt"/>
+                <a:ea typeface="+mj-ea"/>
+                <a:cs typeface="+mj-cs"/>
+              </a:defRPr>
+            </a:lvl1pPr>
+          </a:lstStyle>
+          <a:p>
+            <a:pPr>
+              <a:buClrTx/>
+              <a:tabLst>
+                <a:tab pos="0" algn="l"/>
+              </a:tabLst>
+              <a:defRPr/>
+            </a:pPr>
+            <a:r>
+              <a:rPr lang="en-US" sz="3600" spc="-1" dirty="0">
+                <a:solidFill>
+                  <a:srgbClr val="009DBB"/>
+                </a:solidFill>
+                <a:latin typeface="Arial"/>
+              </a:rPr>
+              <a:t>Author’s Summery</a:t>
+            </a:r>
+            <a:endParaRPr kumimoji="0" lang="en-US" sz="3600" b="0" i="0" u="none" strike="noStrike" kern="1200" cap="none" spc="-1" normalizeH="0" baseline="0" noProof="0" dirty="0">
+              <a:ln>
+                <a:noFill/>
+              </a:ln>
+              <a:solidFill>
+                <a:srgbClr val="000000"/>
+              </a:solidFill>
+              <a:effectLst/>
+              <a:uLnTx/>
+              <a:uFillTx/>
+              <a:latin typeface="Arial"/>
+              <a:ea typeface="+mj-ea"/>
+              <a:cs typeface="+mj-cs"/>
+            </a:endParaRPr>
+          </a:p>
+        </p:txBody>
+      </p:sp>
+      <p:sp>
+        <p:nvSpPr>
+          <p:cNvPr id="6" name="TextBox 5">
             <a:extLst>
               <a:ext uri="{FF2B5EF4-FFF2-40B4-BE49-F238E27FC236}">
-                <a16:creationId xmlns:a16="http://schemas.microsoft.com/office/drawing/2014/main" id="{44AB4CB5-B92B-AFD8-537B-26BC225DEF2B}"/>
+                <a16:creationId xmlns:a16="http://schemas.microsoft.com/office/drawing/2014/main" id="{B58FF0C5-3B02-0340-EDEC-3361D84456F7}"/>
               </a:ext>
             </a:extLst>
           </p:cNvPr>
-          <p:cNvPicPr>
-            <a:picLocks noChangeAspect="1"/>
-          </p:cNvPicPr>
+          <p:cNvSpPr txBox="1"/>
           <p:nvPr/>
-        </p:nvPicPr>
-        <p:blipFill>
-          <a:blip r:embed="rId4"/>
-          <a:srcRect l="28726" r="21838"/>
-          <a:stretch>
-            <a:fillRect/>
-          </a:stretch>
-        </p:blipFill>
+        </p:nvSpPr>
         <p:spPr>
           <a:xfrm>
-            <a:off x="3404009" y="3267155"/>
-            <a:ext cx="5383980" cy="1118119"/>
+            <a:off x="1577382" y="2131900"/>
+            <a:ext cx="9037236" cy="1938992"/>
           </a:xfrm>
           <a:prstGeom prst="rect">
             <a:avLst/>
           </a:prstGeom>
-          <a:solidFill>
-            <a:srgbClr val="FFFFFF">
-              <a:shade val="85000"/>
-            </a:srgbClr>
-          </a:solidFill>
-          <a:ln w="88900" cap="sq">
-            <a:solidFill>
-              <a:srgbClr val="FFFFFF"/>
-            </a:solidFill>
-            <a:miter lim="800000"/>
-          </a:ln>
-          <a:effectLst>
-            <a:outerShdw blurRad="55000" dist="18000" dir="5400000" algn="tl" rotWithShape="0">
-              <a:srgbClr val="000000">
-                <a:alpha val="40000"/>
-              </a:srgbClr>
-            </a:outerShdw>
-          </a:effectLst>
-          <a:scene3d>
-            <a:camera prst="orthographicFront"/>
-            <a:lightRig rig="twoPt" dir="t">
-              <a:rot lat="0" lon="0" rev="7200000"/>
-            </a:lightRig>
-          </a:scene3d>
-          <a:sp3d>
-            <a:bevelT w="25400" h="19050"/>
-            <a:contourClr>
-              <a:srgbClr val="FFFFFF"/>
-            </a:contourClr>
-          </a:sp3d>
+          <a:noFill/>
         </p:spPr>
-      </p:pic>
-      <p:pic>
-        <p:nvPicPr>
-          <p:cNvPr id="11" name="Picture 10">
-            <a:extLst>
-              <a:ext uri="{FF2B5EF4-FFF2-40B4-BE49-F238E27FC236}">
-                <a16:creationId xmlns:a16="http://schemas.microsoft.com/office/drawing/2014/main" id="{37B9CC69-4A21-6894-26F9-D4B7E8CA5E71}"/>
-              </a:ext>
-            </a:extLst>
-          </p:cNvPr>
-          <p:cNvPicPr>
-            <a:picLocks noChangeAspect="1"/>
-          </p:cNvPicPr>
-          <p:nvPr/>
-        </p:nvPicPr>
-        <p:blipFill>
-          <a:blip r:embed="rId5"/>
-          <a:srcRect t="24615" r="861"/>
-          <a:stretch>
-            <a:fillRect/>
-          </a:stretch>
-        </p:blipFill>
-        <p:spPr>
-          <a:xfrm>
-            <a:off x="1320097" y="5143483"/>
-            <a:ext cx="5212783" cy="289328"/>
-          </a:xfrm>
-          <a:prstGeom prst="rect">
-            <a:avLst/>
-          </a:prstGeom>
-          <a:solidFill>
-            <a:srgbClr val="FFFFFF">
-              <a:shade val="85000"/>
-            </a:srgbClr>
-          </a:solidFill>
-          <a:ln w="88900" cap="sq">
-            <a:solidFill>
-              <a:srgbClr val="FFFFFF"/>
-            </a:solidFill>
-            <a:miter lim="800000"/>
-          </a:ln>
-          <a:effectLst>
-            <a:outerShdw blurRad="55000" dist="18000" dir="5400000" algn="tl" rotWithShape="0">
-              <a:srgbClr val="000000">
-                <a:alpha val="40000"/>
-              </a:srgbClr>
-            </a:outerShdw>
-          </a:effectLst>
-          <a:scene3d>
-            <a:camera prst="orthographicFront"/>
-            <a:lightRig rig="twoPt" dir="t">
-              <a:rot lat="0" lon="0" rev="7200000"/>
-            </a:lightRig>
-          </a:scene3d>
-          <a:sp3d>
-            <a:bevelT w="25400" h="19050"/>
-            <a:contourClr>
-              <a:srgbClr val="FFFFFF"/>
-            </a:contourClr>
-          </a:sp3d>
-        </p:spPr>
-      </p:pic>
-      <p:pic>
-        <p:nvPicPr>
-          <p:cNvPr id="3" name="Picture 2">
-            <a:extLst>
-              <a:ext uri="{FF2B5EF4-FFF2-40B4-BE49-F238E27FC236}">
-                <a16:creationId xmlns:a16="http://schemas.microsoft.com/office/drawing/2014/main" id="{E432A034-89A8-3314-840A-C9522DB8B581}"/>
-              </a:ext>
-            </a:extLst>
-          </p:cNvPr>
-          <p:cNvPicPr>
-            <a:picLocks noChangeAspect="1"/>
-          </p:cNvPicPr>
-          <p:nvPr/>
-        </p:nvPicPr>
-        <p:blipFill>
-          <a:blip r:embed="rId4"/>
-          <a:srcRect l="77275" t="8827" r="862"/>
-          <a:stretch>
-            <a:fillRect/>
-          </a:stretch>
-        </p:blipFill>
-        <p:spPr>
-          <a:xfrm>
-            <a:off x="8685163" y="4903799"/>
-            <a:ext cx="2186740" cy="936226"/>
-          </a:xfrm>
-          <a:prstGeom prst="rect">
-            <a:avLst/>
-          </a:prstGeom>
-          <a:solidFill>
-            <a:srgbClr val="FFFFFF">
-              <a:shade val="85000"/>
-            </a:srgbClr>
-          </a:solidFill>
-          <a:ln w="88900" cap="sq">
-            <a:solidFill>
-              <a:srgbClr val="FFFFFF"/>
-            </a:solidFill>
-            <a:miter lim="800000"/>
-          </a:ln>
-          <a:effectLst>
-            <a:outerShdw blurRad="55000" dist="18000" dir="5400000" algn="tl" rotWithShape="0">
-              <a:srgbClr val="000000">
-                <a:alpha val="40000"/>
-              </a:srgbClr>
-            </a:outerShdw>
-          </a:effectLst>
-          <a:scene3d>
-            <a:camera prst="orthographicFront"/>
-            <a:lightRig rig="twoPt" dir="t">
-              <a:rot lat="0" lon="0" rev="7200000"/>
-            </a:lightRig>
-          </a:scene3d>
-          <a:sp3d>
-            <a:bevelT w="25400" h="19050"/>
-            <a:contourClr>
-              <a:srgbClr val="FFFFFF"/>
-            </a:contourClr>
-          </a:sp3d>
-        </p:spPr>
-      </p:pic>
+        <p:txBody>
+          <a:bodyPr wrap="square">
+            <a:spAutoFit/>
+          </a:bodyPr>
+          <a:lstStyle/>
+          <a:p>
+            <a:r>
+              <a:rPr lang="en-GB" sz="2400" b="1" dirty="0" err="1"/>
+              <a:t>KeepDotCa</a:t>
+            </a:r>
+            <a:r>
+              <a:rPr lang="en-GB" sz="2400" dirty="0"/>
+              <a:t> is Canadian-focused account that shares headlines and updates on major national and international events involving Canada. </a:t>
+            </a:r>
+          </a:p>
+          <a:p>
+            <a:r>
+              <a:rPr lang="en-GB" sz="2400" dirty="0"/>
+              <a:t>Most of the posts are about political developments, government actions, and incidents abroad that affect Canadians.</a:t>
+            </a:r>
+          </a:p>
+        </p:txBody>
+      </p:sp>
     </p:spTree>
     <p:extLst>
       <p:ext uri="{BB962C8B-B14F-4D97-AF65-F5344CB8AC3E}">
-        <p14:creationId xmlns:p14="http://schemas.microsoft.com/office/powerpoint/2010/main" val="661497286"/>
+        <p14:creationId xmlns:p14="http://schemas.microsoft.com/office/powerpoint/2010/main" val="638763815"/>
       </p:ext>
     </p:extLst>
   </p:cSld>
@@ -8582,7 +8371,7 @@
         <p:cNvPr id="1" name="">
           <a:extLst>
             <a:ext uri="{FF2B5EF4-FFF2-40B4-BE49-F238E27FC236}">
-              <a16:creationId xmlns:a16="http://schemas.microsoft.com/office/drawing/2014/main" id="{5E0F84AE-1643-F5A2-D2D2-C12C0906D642}"/>
+              <a16:creationId xmlns:a16="http://schemas.microsoft.com/office/drawing/2014/main" id="{C2CDB116-F927-B998-75BE-1DADC0E0FCB4}"/>
             </a:ext>
           </a:extLst>
         </p:cNvPr>
@@ -8602,7 +8391,7 @@
           <p:cNvPr id="8" name="PlaceHolder 1">
             <a:extLst>
               <a:ext uri="{FF2B5EF4-FFF2-40B4-BE49-F238E27FC236}">
-                <a16:creationId xmlns:a16="http://schemas.microsoft.com/office/drawing/2014/main" id="{B45279EC-B9F9-C530-4D8A-CEF55AB03E9B}"/>
+                <a16:creationId xmlns:a16="http://schemas.microsoft.com/office/drawing/2014/main" id="{E4417EAB-A864-C013-2BD6-8ADED0C07047}"/>
               </a:ext>
             </a:extLst>
           </p:cNvPr>
@@ -8686,7 +8475,7 @@
           <p:cNvPr id="2" name="Slide Number Placeholder 3">
             <a:extLst>
               <a:ext uri="{FF2B5EF4-FFF2-40B4-BE49-F238E27FC236}">
-                <a16:creationId xmlns:a16="http://schemas.microsoft.com/office/drawing/2014/main" id="{22BB9467-D76A-F0CC-7795-7497FD045C12}"/>
+                <a16:creationId xmlns:a16="http://schemas.microsoft.com/office/drawing/2014/main" id="{14E62347-3318-7866-4BE3-0BE3BBB3754B}"/>
               </a:ext>
             </a:extLst>
           </p:cNvPr>
@@ -8984,10 +8773,10 @@
       </p:sp>
       <p:pic>
         <p:nvPicPr>
-          <p:cNvPr id="1026" name="Picture 2">
+          <p:cNvPr id="4098" name="Picture 2">
             <a:extLst>
               <a:ext uri="{FF2B5EF4-FFF2-40B4-BE49-F238E27FC236}">
-                <a16:creationId xmlns:a16="http://schemas.microsoft.com/office/drawing/2014/main" id="{B725F976-8442-80F6-5289-B69EBA8DC76C}"/>
+                <a16:creationId xmlns:a16="http://schemas.microsoft.com/office/drawing/2014/main" id="{517F1CBE-53FD-D830-FDE4-325957F695E6}"/>
               </a:ext>
             </a:extLst>
           </p:cNvPr>
@@ -9011,7 +8800,7 @@
         </p:blipFill>
         <p:spPr bwMode="auto">
           <a:xfrm>
-            <a:off x="1600200" y="1334135"/>
+            <a:off x="1600200" y="1255413"/>
             <a:ext cx="8991600" cy="4819650"/>
           </a:xfrm>
           <a:prstGeom prst="rect">
@@ -9047,12 +8836,21 @@
               <a:srgbClr val="FFFFFF"/>
             </a:contourClr>
           </a:sp3d>
+          <a:extLst>
+            <a:ext uri="{909E8E84-426E-40DD-AFC4-6F175D3DCCD1}">
+              <a14:hiddenFill xmlns:a14="http://schemas.microsoft.com/office/drawing/2010/main">
+                <a:solidFill>
+                  <a:srgbClr val="FFFFFF"/>
+                </a:solidFill>
+              </a14:hiddenFill>
+            </a:ext>
+          </a:extLst>
         </p:spPr>
       </p:pic>
     </p:spTree>
     <p:extLst>
       <p:ext uri="{BB962C8B-B14F-4D97-AF65-F5344CB8AC3E}">
-        <p14:creationId xmlns:p14="http://schemas.microsoft.com/office/powerpoint/2010/main" val="723525309"/>
+        <p14:creationId xmlns:p14="http://schemas.microsoft.com/office/powerpoint/2010/main" val="1040801497"/>
       </p:ext>
     </p:extLst>
   </p:cSld>
@@ -9070,7 +8868,7 @@
         <p:cNvPr id="1" name="">
           <a:extLst>
             <a:ext uri="{FF2B5EF4-FFF2-40B4-BE49-F238E27FC236}">
-              <a16:creationId xmlns:a16="http://schemas.microsoft.com/office/drawing/2014/main" id="{F7CCA2BA-360B-790C-53EF-49A97F593385}"/>
+              <a16:creationId xmlns:a16="http://schemas.microsoft.com/office/drawing/2014/main" id="{8B2004F0-F5DE-5C35-8D76-1A7A78F632EC}"/>
             </a:ext>
           </a:extLst>
         </p:cNvPr>
@@ -9090,7 +8888,7 @@
           <p:cNvPr id="2" name="Slide Number Placeholder 3">
             <a:extLst>
               <a:ext uri="{FF2B5EF4-FFF2-40B4-BE49-F238E27FC236}">
-                <a16:creationId xmlns:a16="http://schemas.microsoft.com/office/drawing/2014/main" id="{97A577EA-70FE-EC1A-876E-FCAECD6A8D29}"/>
+                <a16:creationId xmlns:a16="http://schemas.microsoft.com/office/drawing/2014/main" id="{FD8EDC79-8E31-9BE8-4EDC-FA7A1D40083F}"/>
               </a:ext>
             </a:extLst>
           </p:cNvPr>
@@ -9391,7 +9189,7 @@
           <p:cNvPr id="5" name="PlaceHolder 1">
             <a:extLst>
               <a:ext uri="{FF2B5EF4-FFF2-40B4-BE49-F238E27FC236}">
-                <a16:creationId xmlns:a16="http://schemas.microsoft.com/office/drawing/2014/main" id="{ADA1C513-1032-014E-AF9B-6244032BC4A4}"/>
+                <a16:creationId xmlns:a16="http://schemas.microsoft.com/office/drawing/2014/main" id="{66CD0833-AFC3-2C60-F7BE-D6F4207CAA23}"/>
               </a:ext>
             </a:extLst>
           </p:cNvPr>
@@ -9472,10 +9270,10 @@
       </p:sp>
       <p:pic>
         <p:nvPicPr>
-          <p:cNvPr id="3" name="Picture 2">
+          <p:cNvPr id="5122" name="Picture 2">
             <a:extLst>
               <a:ext uri="{FF2B5EF4-FFF2-40B4-BE49-F238E27FC236}">
-                <a16:creationId xmlns:a16="http://schemas.microsoft.com/office/drawing/2014/main" id="{9559DD9A-569A-9109-72F1-5DAADA7F1629}"/>
+                <a16:creationId xmlns:a16="http://schemas.microsoft.com/office/drawing/2014/main" id="{55498540-4BF0-C80F-5922-B9F9546C8A11}"/>
               </a:ext>
             </a:extLst>
           </p:cNvPr>
@@ -9499,7 +9297,7 @@
         </p:blipFill>
         <p:spPr bwMode="auto">
           <a:xfrm>
-            <a:off x="1600200" y="1361771"/>
+            <a:off x="1600200" y="1341258"/>
             <a:ext cx="8991600" cy="4819650"/>
           </a:xfrm>
           <a:prstGeom prst="rect">
@@ -9535,12 +9333,21 @@
               <a:srgbClr val="FFFFFF"/>
             </a:contourClr>
           </a:sp3d>
+          <a:extLst>
+            <a:ext uri="{909E8E84-426E-40DD-AFC4-6F175D3DCCD1}">
+              <a14:hiddenFill xmlns:a14="http://schemas.microsoft.com/office/drawing/2010/main">
+                <a:solidFill>
+                  <a:srgbClr val="FFFFFF"/>
+                </a:solidFill>
+              </a14:hiddenFill>
+            </a:ext>
+          </a:extLst>
         </p:spPr>
       </p:pic>
     </p:spTree>
     <p:extLst>
       <p:ext uri="{BB962C8B-B14F-4D97-AF65-F5344CB8AC3E}">
-        <p14:creationId xmlns:p14="http://schemas.microsoft.com/office/powerpoint/2010/main" val="3850570957"/>
+        <p14:creationId xmlns:p14="http://schemas.microsoft.com/office/powerpoint/2010/main" val="3885009783"/>
       </p:ext>
     </p:extLst>
   </p:cSld>
@@ -9950,66 +9757,436 @@
           </a:p>
         </p:txBody>
       </p:sp>
-      <p:pic>
-        <p:nvPicPr>
-          <p:cNvPr id="4" name="Picture 3">
+      <p:graphicFrame>
+        <p:nvGraphicFramePr>
+          <p:cNvPr id="5" name="Table 4">
             <a:extLst>
               <a:ext uri="{FF2B5EF4-FFF2-40B4-BE49-F238E27FC236}">
-                <a16:creationId xmlns:a16="http://schemas.microsoft.com/office/drawing/2014/main" id="{8CD8D6EC-849C-F23B-2B7A-C50D4986E0E7}"/>
+                <a16:creationId xmlns:a16="http://schemas.microsoft.com/office/drawing/2014/main" id="{69A46226-87A7-22A7-3C36-816935B31B98}"/>
               </a:ext>
             </a:extLst>
           </p:cNvPr>
-          <p:cNvPicPr>
-            <a:picLocks noChangeAspect="1"/>
-          </p:cNvPicPr>
-          <p:nvPr/>
-        </p:nvPicPr>
-        <p:blipFill>
-          <a:blip r:embed="rId3"/>
-          <a:stretch>
-            <a:fillRect/>
-          </a:stretch>
-        </p:blipFill>
-        <p:spPr>
-          <a:xfrm>
-            <a:off x="1157572" y="2181665"/>
-            <a:ext cx="9876856" cy="2494669"/>
-          </a:xfrm>
-          <a:prstGeom prst="rect">
-            <a:avLst/>
-          </a:prstGeom>
-          <a:solidFill>
-            <a:srgbClr val="FFFFFF">
-              <a:shade val="85000"/>
-            </a:srgbClr>
-          </a:solidFill>
-          <a:ln w="88900" cap="sq">
-            <a:solidFill>
-              <a:srgbClr val="FFFFFF"/>
-            </a:solidFill>
-            <a:miter lim="800000"/>
-          </a:ln>
-          <a:effectLst>
-            <a:outerShdw blurRad="55000" dist="18000" dir="5400000" algn="tl" rotWithShape="0">
-              <a:srgbClr val="000000">
-                <a:alpha val="40000"/>
-              </a:srgbClr>
-            </a:outerShdw>
-          </a:effectLst>
-          <a:scene3d>
-            <a:camera prst="orthographicFront"/>
-            <a:lightRig rig="twoPt" dir="t">
-              <a:rot lat="0" lon="0" rev="7200000"/>
-            </a:lightRig>
-          </a:scene3d>
-          <a:sp3d>
-            <a:bevelT w="25400" h="19050"/>
-            <a:contourClr>
-              <a:srgbClr val="FFFFFF"/>
-            </a:contourClr>
-          </a:sp3d>
-        </p:spPr>
-      </p:pic>
+          <p:cNvGraphicFramePr>
+            <a:graphicFrameLocks noGrp="1"/>
+          </p:cNvGraphicFramePr>
+          <p:nvPr>
+            <p:extLst>
+              <p:ext uri="{D42A27DB-BD31-4B8C-83A1-F6EECF244321}">
+                <p14:modId xmlns:p14="http://schemas.microsoft.com/office/powerpoint/2010/main" val="1610801736"/>
+              </p:ext>
+            </p:extLst>
+          </p:nvPr>
+        </p:nvGraphicFramePr>
+        <p:xfrm>
+          <a:off x="1555540" y="2067766"/>
+          <a:ext cx="9845358" cy="3022394"/>
+        </p:xfrm>
+        <a:graphic>
+          <a:graphicData uri="http://schemas.openxmlformats.org/drawingml/2006/table">
+            <a:tbl>
+              <a:tblPr>
+                <a:effectLst>
+                  <a:outerShdw blurRad="63500" sx="102000" sy="102000" algn="ctr" rotWithShape="0">
+                    <a:prstClr val="black">
+                      <a:alpha val="40000"/>
+                    </a:prstClr>
+                  </a:outerShdw>
+                </a:effectLst>
+                <a:tableStyleId>{3C2FFA5D-87B4-456A-9821-1D502468CF0F}</a:tableStyleId>
+              </a:tblPr>
+              <a:tblGrid>
+                <a:gridCol w="1454960">
+                  <a:extLst>
+                    <a:ext uri="{9D8B030D-6E8A-4147-A177-3AD203B41FA5}">
+                      <a16:colId xmlns:a16="http://schemas.microsoft.com/office/drawing/2014/main" val="83390882"/>
+                    </a:ext>
+                  </a:extLst>
+                </a:gridCol>
+                <a:gridCol w="2233876">
+                  <a:extLst>
+                    <a:ext uri="{9D8B030D-6E8A-4147-A177-3AD203B41FA5}">
+                      <a16:colId xmlns:a16="http://schemas.microsoft.com/office/drawing/2014/main" val="2930028173"/>
+                    </a:ext>
+                  </a:extLst>
+                </a:gridCol>
+                <a:gridCol w="6156522">
+                  <a:extLst>
+                    <a:ext uri="{9D8B030D-6E8A-4147-A177-3AD203B41FA5}">
+                      <a16:colId xmlns:a16="http://schemas.microsoft.com/office/drawing/2014/main" val="3553412163"/>
+                    </a:ext>
+                  </a:extLst>
+                </a:gridCol>
+              </a:tblGrid>
+              <a:tr h="338160">
+                <a:tc>
+                  <a:txBody>
+                    <a:bodyPr/>
+                    <a:lstStyle/>
+                    <a:p>
+                      <a:pPr>
+                        <a:buNone/>
+                      </a:pPr>
+                      <a:r>
+                        <a:rPr lang="en-GB" sz="1700" b="1" dirty="0">
+                          <a:effectLst/>
+                        </a:rPr>
+                        <a:t>topic</a:t>
+                      </a:r>
+                    </a:p>
+                  </a:txBody>
+                  <a:tcPr marL="84406" marR="84406" marT="14068" marB="14068" anchor="ctr"/>
+                </a:tc>
+                <a:tc>
+                  <a:txBody>
+                    <a:bodyPr/>
+                    <a:lstStyle/>
+                    <a:p>
+                      <a:pPr>
+                        <a:buNone/>
+                      </a:pPr>
+                      <a:r>
+                        <a:rPr lang="en-GB" sz="1700" b="1">
+                          <a:effectLst/>
+                        </a:rPr>
+                        <a:t>post count</a:t>
+                      </a:r>
+                    </a:p>
+                  </a:txBody>
+                  <a:tcPr marL="84406" marR="84406" marT="14068" marB="14068" anchor="ctr"/>
+                </a:tc>
+                <a:tc>
+                  <a:txBody>
+                    <a:bodyPr/>
+                    <a:lstStyle/>
+                    <a:p>
+                      <a:pPr>
+                        <a:buNone/>
+                      </a:pPr>
+                      <a:r>
+                        <a:rPr lang="en-GB" sz="1700" b="1" dirty="0">
+                          <a:effectLst/>
+                        </a:rPr>
+                        <a:t>title</a:t>
+                      </a:r>
+                    </a:p>
+                  </a:txBody>
+                  <a:tcPr marL="84406" marR="84406" marT="14068" marB="14068" anchor="ctr"/>
+                </a:tc>
+                <a:extLst>
+                  <a:ext uri="{0D108BD9-81ED-4DB2-BD59-A6C34878D82A}">
+                    <a16:rowId xmlns:a16="http://schemas.microsoft.com/office/drawing/2014/main" val="2547393648"/>
+                  </a:ext>
+                </a:extLst>
+              </a:tr>
+              <a:tr h="561123">
+                <a:tc>
+                  <a:txBody>
+                    <a:bodyPr/>
+                    <a:lstStyle/>
+                    <a:p>
+                      <a:pPr algn="r" fontAlgn="t">
+                        <a:buNone/>
+                      </a:pPr>
+                      <a:r>
+                        <a:rPr lang="en-IL" sz="1700" dirty="0">
+                          <a:effectLst/>
+                        </a:rPr>
+                        <a:t>123</a:t>
+                      </a:r>
+                    </a:p>
+                  </a:txBody>
+                  <a:tcPr marL="84406" marR="84406" marT="14068" marB="14068"/>
+                </a:tc>
+                <a:tc>
+                  <a:txBody>
+                    <a:bodyPr/>
+                    <a:lstStyle/>
+                    <a:p>
+                      <a:pPr algn="r" fontAlgn="t">
+                        <a:buNone/>
+                      </a:pPr>
+                      <a:r>
+                        <a:rPr lang="en-IL" sz="1700" dirty="0">
+                          <a:effectLst/>
+                        </a:rPr>
+                        <a:t>2640</a:t>
+                      </a:r>
+                    </a:p>
+                  </a:txBody>
+                  <a:tcPr marL="84406" marR="84406" marT="14068" marB="14068"/>
+                </a:tc>
+                <a:tc>
+                  <a:txBody>
+                    <a:bodyPr/>
+                    <a:lstStyle/>
+                    <a:p>
+                      <a:pPr fontAlgn="t">
+                        <a:buNone/>
+                      </a:pPr>
+                      <a:r>
+                        <a:rPr lang="en-GB" sz="1700" dirty="0">
+                          <a:effectLst/>
+                        </a:rPr>
+                        <a:t>Canadians held without charge in Egypt headed home</a:t>
+                      </a:r>
+                    </a:p>
+                  </a:txBody>
+                  <a:tcPr marL="84406" marR="84406" marT="14068" marB="14068"/>
+                </a:tc>
+                <a:extLst>
+                  <a:ext uri="{0D108BD9-81ED-4DB2-BD59-A6C34878D82A}">
+                    <a16:rowId xmlns:a16="http://schemas.microsoft.com/office/drawing/2014/main" val="4011552135"/>
+                  </a:ext>
+                </a:extLst>
+              </a:tr>
+              <a:tr h="629389">
+                <a:tc>
+                  <a:txBody>
+                    <a:bodyPr/>
+                    <a:lstStyle/>
+                    <a:p>
+                      <a:pPr algn="r" fontAlgn="t">
+                        <a:buNone/>
+                      </a:pPr>
+                      <a:r>
+                        <a:rPr lang="en-IL" sz="1700">
+                          <a:effectLst/>
+                        </a:rPr>
+                        <a:t>924</a:t>
+                      </a:r>
+                    </a:p>
+                  </a:txBody>
+                  <a:tcPr marL="84406" marR="84406" marT="14068" marB="14068"/>
+                </a:tc>
+                <a:tc>
+                  <a:txBody>
+                    <a:bodyPr/>
+                    <a:lstStyle/>
+                    <a:p>
+                      <a:pPr algn="r" fontAlgn="t">
+                        <a:buNone/>
+                      </a:pPr>
+                      <a:r>
+                        <a:rPr lang="en-IL" sz="1700" dirty="0">
+                          <a:effectLst/>
+                        </a:rPr>
+                        <a:t>2522</a:t>
+                      </a:r>
+                    </a:p>
+                  </a:txBody>
+                  <a:tcPr marL="84406" marR="84406" marT="14068" marB="14068"/>
+                </a:tc>
+                <a:tc>
+                  <a:txBody>
+                    <a:bodyPr/>
+                    <a:lstStyle/>
+                    <a:p>
+                      <a:pPr fontAlgn="t">
+                        <a:buNone/>
+                      </a:pPr>
+                      <a:r>
+                        <a:rPr lang="en-GB" sz="1700" dirty="0">
+                          <a:effectLst/>
+                        </a:rPr>
+                        <a:t>US ambassador denounces Gaza terrorist tunnels</a:t>
+                      </a:r>
+                    </a:p>
+                  </a:txBody>
+                  <a:tcPr marL="84406" marR="84406" marT="14068" marB="14068"/>
+                </a:tc>
+                <a:extLst>
+                  <a:ext uri="{0D108BD9-81ED-4DB2-BD59-A6C34878D82A}">
+                    <a16:rowId xmlns:a16="http://schemas.microsoft.com/office/drawing/2014/main" val="2189516238"/>
+                  </a:ext>
+                </a:extLst>
+              </a:tr>
+              <a:tr h="629389">
+                <a:tc>
+                  <a:txBody>
+                    <a:bodyPr/>
+                    <a:lstStyle/>
+                    <a:p>
+                      <a:pPr algn="r" fontAlgn="t">
+                        <a:buNone/>
+                      </a:pPr>
+                      <a:r>
+                        <a:rPr lang="en-IL" sz="1700">
+                          <a:effectLst/>
+                        </a:rPr>
+                        <a:t>142</a:t>
+                      </a:r>
+                    </a:p>
+                  </a:txBody>
+                  <a:tcPr marL="84406" marR="84406" marT="14068" marB="14068"/>
+                </a:tc>
+                <a:tc>
+                  <a:txBody>
+                    <a:bodyPr/>
+                    <a:lstStyle/>
+                    <a:p>
+                      <a:pPr algn="r" fontAlgn="t">
+                        <a:buNone/>
+                      </a:pPr>
+                      <a:r>
+                        <a:rPr lang="en-IL" sz="1700" dirty="0">
+                          <a:effectLst/>
+                        </a:rPr>
+                        <a:t>2514</a:t>
+                      </a:r>
+                    </a:p>
+                  </a:txBody>
+                  <a:tcPr marL="84406" marR="84406" marT="14068" marB="14068"/>
+                </a:tc>
+                <a:tc>
+                  <a:txBody>
+                    <a:bodyPr/>
+                    <a:lstStyle/>
+                    <a:p>
+                      <a:pPr fontAlgn="t">
+                        <a:buNone/>
+                      </a:pPr>
+                      <a:r>
+                        <a:rPr lang="en-GB" sz="1700" dirty="0">
+                          <a:effectLst/>
+                        </a:rPr>
+                        <a:t>Congress lumbers while threatened default looms</a:t>
+                      </a:r>
+                    </a:p>
+                  </a:txBody>
+                  <a:tcPr marL="84406" marR="84406" marT="14068" marB="14068"/>
+                </a:tc>
+                <a:extLst>
+                  <a:ext uri="{0D108BD9-81ED-4DB2-BD59-A6C34878D82A}">
+                    <a16:rowId xmlns:a16="http://schemas.microsoft.com/office/drawing/2014/main" val="1482989065"/>
+                  </a:ext>
+                </a:extLst>
+              </a:tr>
+              <a:tr h="475373">
+                <a:tc>
+                  <a:txBody>
+                    <a:bodyPr/>
+                    <a:lstStyle/>
+                    <a:p>
+                      <a:pPr algn="r" fontAlgn="t">
+                        <a:buNone/>
+                      </a:pPr>
+                      <a:r>
+                        <a:rPr lang="en-IL" sz="1700">
+                          <a:effectLst/>
+                        </a:rPr>
+                        <a:t>297</a:t>
+                      </a:r>
+                    </a:p>
+                  </a:txBody>
+                  <a:tcPr marL="84406" marR="84406" marT="14068" marB="14068"/>
+                </a:tc>
+                <a:tc>
+                  <a:txBody>
+                    <a:bodyPr/>
+                    <a:lstStyle/>
+                    <a:p>
+                      <a:pPr algn="r" fontAlgn="t">
+                        <a:buNone/>
+                      </a:pPr>
+                      <a:r>
+                        <a:rPr lang="en-IL" sz="1700">
+                          <a:effectLst/>
+                        </a:rPr>
+                        <a:t>2504</a:t>
+                      </a:r>
+                    </a:p>
+                  </a:txBody>
+                  <a:tcPr marL="84406" marR="84406" marT="14068" marB="14068"/>
+                </a:tc>
+                <a:tc>
+                  <a:txBody>
+                    <a:bodyPr/>
+                    <a:lstStyle/>
+                    <a:p>
+                      <a:pPr fontAlgn="t">
+                        <a:buNone/>
+                      </a:pPr>
+                      <a:r>
+                        <a:rPr lang="en-GB" sz="1700" dirty="0">
+                          <a:effectLst/>
+                        </a:rPr>
+                        <a:t>Hawkish MKs call to rethink peace talks after Psagot attack</a:t>
+                      </a:r>
+                    </a:p>
+                  </a:txBody>
+                  <a:tcPr marL="84406" marR="84406" marT="14068" marB="14068"/>
+                </a:tc>
+                <a:extLst>
+                  <a:ext uri="{0D108BD9-81ED-4DB2-BD59-A6C34878D82A}">
+                    <a16:rowId xmlns:a16="http://schemas.microsoft.com/office/drawing/2014/main" val="3074428980"/>
+                  </a:ext>
+                </a:extLst>
+              </a:tr>
+              <a:tr h="388960">
+                <a:tc>
+                  <a:txBody>
+                    <a:bodyPr/>
+                    <a:lstStyle/>
+                    <a:p>
+                      <a:pPr algn="r" fontAlgn="t">
+                        <a:buNone/>
+                      </a:pPr>
+                      <a:r>
+                        <a:rPr lang="en-IL" sz="1700" dirty="0">
+                          <a:effectLst/>
+                        </a:rPr>
+                        <a:t>107</a:t>
+                      </a:r>
+                    </a:p>
+                  </a:txBody>
+                  <a:tcPr marL="84406" marR="84406" marT="14068" marB="14068"/>
+                </a:tc>
+                <a:tc>
+                  <a:txBody>
+                    <a:bodyPr/>
+                    <a:lstStyle/>
+                    <a:p>
+                      <a:pPr algn="r" fontAlgn="t">
+                        <a:buNone/>
+                      </a:pPr>
+                      <a:r>
+                        <a:rPr lang="en-IL" sz="1700">
+                          <a:effectLst/>
+                        </a:rPr>
+                        <a:t>2498</a:t>
+                      </a:r>
+                    </a:p>
+                  </a:txBody>
+                  <a:tcPr marL="84406" marR="84406" marT="14068" marB="14068"/>
+                </a:tc>
+                <a:tc>
+                  <a:txBody>
+                    <a:bodyPr/>
+                    <a:lstStyle/>
+                    <a:p>
+                      <a:pPr fontAlgn="t">
+                        <a:buNone/>
+                      </a:pPr>
+                      <a:r>
+                        <a:rPr lang="en-GB" sz="1700" dirty="0">
+                          <a:effectLst/>
+                        </a:rPr>
+                        <a:t>Betrayals banks and Bibi</a:t>
+                      </a:r>
+                    </a:p>
+                  </a:txBody>
+                  <a:tcPr marL="84406" marR="84406" marT="14068" marB="14068"/>
+                </a:tc>
+                <a:extLst>
+                  <a:ext uri="{0D108BD9-81ED-4DB2-BD59-A6C34878D82A}">
+                    <a16:rowId xmlns:a16="http://schemas.microsoft.com/office/drawing/2014/main" val="1023183328"/>
+                  </a:ext>
+                </a:extLst>
+              </a:tr>
+            </a:tbl>
+          </a:graphicData>
+        </a:graphic>
+      </p:graphicFrame>
     </p:spTree>
     <p:extLst>
       <p:ext uri="{BB962C8B-B14F-4D97-AF65-F5344CB8AC3E}">
@@ -10443,66 +10620,1062 @@
           </a:p>
         </p:txBody>
       </p:sp>
-      <p:pic>
-        <p:nvPicPr>
-          <p:cNvPr id="7" name="Picture 6">
+      <p:graphicFrame>
+        <p:nvGraphicFramePr>
+          <p:cNvPr id="3" name="Table 2">
             <a:extLst>
               <a:ext uri="{FF2B5EF4-FFF2-40B4-BE49-F238E27FC236}">
-                <a16:creationId xmlns:a16="http://schemas.microsoft.com/office/drawing/2014/main" id="{29822B9D-8C0A-4337-E845-1B80F61694EC}"/>
+                <a16:creationId xmlns:a16="http://schemas.microsoft.com/office/drawing/2014/main" id="{ECA1EAB3-B7B7-E188-47BB-47C90D0481C8}"/>
               </a:ext>
             </a:extLst>
           </p:cNvPr>
-          <p:cNvPicPr>
-            <a:picLocks noChangeAspect="1"/>
-          </p:cNvPicPr>
-          <p:nvPr/>
-        </p:nvPicPr>
-        <p:blipFill>
-          <a:blip r:embed="rId3"/>
-          <a:stretch>
-            <a:fillRect/>
-          </a:stretch>
-        </p:blipFill>
-        <p:spPr>
-          <a:xfrm>
-            <a:off x="1337950" y="1396928"/>
-            <a:ext cx="9516100" cy="4617791"/>
-          </a:xfrm>
-          <a:prstGeom prst="rect">
-            <a:avLst/>
-          </a:prstGeom>
-          <a:solidFill>
-            <a:srgbClr val="FFFFFF">
-              <a:shade val="85000"/>
-            </a:srgbClr>
-          </a:solidFill>
-          <a:ln w="88900" cap="sq">
-            <a:solidFill>
-              <a:srgbClr val="FFFFFF"/>
-            </a:solidFill>
-            <a:miter lim="800000"/>
-          </a:ln>
-          <a:effectLst>
-            <a:outerShdw blurRad="55000" dist="18000" dir="5400000" algn="tl" rotWithShape="0">
-              <a:srgbClr val="000000">
-                <a:alpha val="40000"/>
-              </a:srgbClr>
-            </a:outerShdw>
-          </a:effectLst>
-          <a:scene3d>
-            <a:camera prst="orthographicFront"/>
-            <a:lightRig rig="twoPt" dir="t">
-              <a:rot lat="0" lon="0" rev="7200000"/>
-            </a:lightRig>
-          </a:scene3d>
-          <a:sp3d>
-            <a:bevelT w="25400" h="19050"/>
-            <a:contourClr>
-              <a:srgbClr val="FFFFFF"/>
-            </a:contourClr>
-          </a:sp3d>
-        </p:spPr>
-      </p:pic>
+          <p:cNvGraphicFramePr>
+            <a:graphicFrameLocks noGrp="1"/>
+          </p:cNvGraphicFramePr>
+          <p:nvPr>
+            <p:extLst>
+              <p:ext uri="{D42A27DB-BD31-4B8C-83A1-F6EECF244321}">
+                <p14:modId xmlns:p14="http://schemas.microsoft.com/office/powerpoint/2010/main" val="4280469505"/>
+              </p:ext>
+            </p:extLst>
+          </p:nvPr>
+        </p:nvGraphicFramePr>
+        <p:xfrm>
+          <a:off x="1566694" y="1158571"/>
+          <a:ext cx="9058612" cy="5157236"/>
+        </p:xfrm>
+        <a:graphic>
+          <a:graphicData uri="http://schemas.openxmlformats.org/drawingml/2006/table">
+            <a:tbl>
+              <a:tblPr>
+                <a:effectLst>
+                  <a:outerShdw blurRad="63500" sx="102000" sy="102000" algn="ctr" rotWithShape="0">
+                    <a:prstClr val="black">
+                      <a:alpha val="40000"/>
+                    </a:prstClr>
+                  </a:outerShdw>
+                </a:effectLst>
+                <a:tableStyleId>{3C2FFA5D-87B4-456A-9821-1D502468CF0F}</a:tableStyleId>
+              </a:tblPr>
+              <a:tblGrid>
+                <a:gridCol w="540787">
+                  <a:extLst>
+                    <a:ext uri="{9D8B030D-6E8A-4147-A177-3AD203B41FA5}">
+                      <a16:colId xmlns:a16="http://schemas.microsoft.com/office/drawing/2014/main" val="2586243789"/>
+                    </a:ext>
+                  </a:extLst>
+                </a:gridCol>
+                <a:gridCol w="1502204">
+                  <a:extLst>
+                    <a:ext uri="{9D8B030D-6E8A-4147-A177-3AD203B41FA5}">
+                      <a16:colId xmlns:a16="http://schemas.microsoft.com/office/drawing/2014/main" val="2879621840"/>
+                    </a:ext>
+                  </a:extLst>
+                </a:gridCol>
+                <a:gridCol w="4935102">
+                  <a:extLst>
+                    <a:ext uri="{9D8B030D-6E8A-4147-A177-3AD203B41FA5}">
+                      <a16:colId xmlns:a16="http://schemas.microsoft.com/office/drawing/2014/main" val="751046862"/>
+                    </a:ext>
+                  </a:extLst>
+                </a:gridCol>
+                <a:gridCol w="925975">
+                  <a:extLst>
+                    <a:ext uri="{9D8B030D-6E8A-4147-A177-3AD203B41FA5}">
+                      <a16:colId xmlns:a16="http://schemas.microsoft.com/office/drawing/2014/main" val="1221399111"/>
+                    </a:ext>
+                  </a:extLst>
+                </a:gridCol>
+                <a:gridCol w="1154544">
+                  <a:extLst>
+                    <a:ext uri="{9D8B030D-6E8A-4147-A177-3AD203B41FA5}">
+                      <a16:colId xmlns:a16="http://schemas.microsoft.com/office/drawing/2014/main" val="2657626084"/>
+                    </a:ext>
+                  </a:extLst>
+                </a:gridCol>
+              </a:tblGrid>
+              <a:tr h="485143">
+                <a:tc>
+                  <a:txBody>
+                    <a:bodyPr/>
+                    <a:lstStyle/>
+                    <a:p>
+                      <a:pPr>
+                        <a:buNone/>
+                      </a:pPr>
+                      <a:r>
+                        <a:rPr lang="en-GB" sz="1700" b="1" kern="1200" dirty="0">
+                          <a:solidFill>
+                            <a:schemeClr val="dk1"/>
+                          </a:solidFill>
+                          <a:effectLst/>
+                        </a:rPr>
+                        <a:t>topic</a:t>
+                      </a:r>
+                      <a:endParaRPr lang="en-GB" sz="1700" b="1" kern="1200" dirty="0">
+                        <a:solidFill>
+                          <a:schemeClr val="dk1"/>
+                        </a:solidFill>
+                        <a:effectLst/>
+                        <a:latin typeface="+mn-lt"/>
+                        <a:ea typeface="+mn-ea"/>
+                        <a:cs typeface="+mn-cs"/>
+                      </a:endParaRPr>
+                    </a:p>
+                  </a:txBody>
+                  <a:tcPr marL="17131" marR="17131" marT="2855" marB="2855" anchor="ctr"/>
+                </a:tc>
+                <a:tc>
+                  <a:txBody>
+                    <a:bodyPr/>
+                    <a:lstStyle/>
+                    <a:p>
+                      <a:pPr>
+                        <a:buNone/>
+                      </a:pPr>
+                      <a:r>
+                        <a:rPr lang="en-GB" sz="1700" b="1" kern="1200" dirty="0">
+                          <a:solidFill>
+                            <a:schemeClr val="dk1"/>
+                          </a:solidFill>
+                          <a:effectLst/>
+                        </a:rPr>
+                        <a:t>author</a:t>
+                      </a:r>
+                      <a:endParaRPr lang="en-GB" sz="1700" b="1" kern="1200" dirty="0">
+                        <a:solidFill>
+                          <a:schemeClr val="dk1"/>
+                        </a:solidFill>
+                        <a:effectLst/>
+                        <a:latin typeface="+mn-lt"/>
+                        <a:ea typeface="+mn-ea"/>
+                        <a:cs typeface="+mn-cs"/>
+                      </a:endParaRPr>
+                    </a:p>
+                  </a:txBody>
+                  <a:tcPr marL="17131" marR="17131" marT="2855" marB="2855" anchor="ctr"/>
+                </a:tc>
+                <a:tc>
+                  <a:txBody>
+                    <a:bodyPr/>
+                    <a:lstStyle/>
+                    <a:p>
+                      <a:pPr>
+                        <a:buNone/>
+                      </a:pPr>
+                      <a:r>
+                        <a:rPr lang="en-GB" sz="1700" b="1" kern="1200" dirty="0">
+                          <a:solidFill>
+                            <a:schemeClr val="dk1"/>
+                          </a:solidFill>
+                          <a:effectLst/>
+                        </a:rPr>
+                        <a:t>content</a:t>
+                      </a:r>
+                      <a:endParaRPr lang="en-GB" sz="1700" b="1" kern="1200" dirty="0">
+                        <a:solidFill>
+                          <a:schemeClr val="dk1"/>
+                        </a:solidFill>
+                        <a:effectLst/>
+                        <a:latin typeface="+mn-lt"/>
+                        <a:ea typeface="+mn-ea"/>
+                        <a:cs typeface="+mn-cs"/>
+                      </a:endParaRPr>
+                    </a:p>
+                  </a:txBody>
+                  <a:tcPr marL="17131" marR="17131" marT="2855" marB="2855" anchor="ctr"/>
+                </a:tc>
+                <a:tc>
+                  <a:txBody>
+                    <a:bodyPr/>
+                    <a:lstStyle/>
+                    <a:p>
+                      <a:pPr>
+                        <a:buNone/>
+                      </a:pPr>
+                      <a:r>
+                        <a:rPr lang="en-GB" sz="1700" b="1" kern="1200" dirty="0">
+                          <a:solidFill>
+                            <a:schemeClr val="dk1"/>
+                          </a:solidFill>
+                          <a:effectLst/>
+                        </a:rPr>
+                        <a:t>Post topic </a:t>
+                      </a:r>
+                      <a:r>
+                        <a:rPr lang="en-GB" sz="1700" b="1" kern="1200" dirty="0" err="1">
+                          <a:solidFill>
+                            <a:schemeClr val="dk1"/>
+                          </a:solidFill>
+                          <a:effectLst/>
+                        </a:rPr>
+                        <a:t>tf-idf</a:t>
+                      </a:r>
+                      <a:endParaRPr lang="en-GB" sz="1700" b="1" kern="1200" dirty="0">
+                        <a:solidFill>
+                          <a:schemeClr val="dk1"/>
+                        </a:solidFill>
+                        <a:effectLst/>
+                        <a:latin typeface="+mn-lt"/>
+                        <a:ea typeface="+mn-ea"/>
+                        <a:cs typeface="+mn-cs"/>
+                      </a:endParaRPr>
+                    </a:p>
+                  </a:txBody>
+                  <a:tcPr marL="17131" marR="17131" marT="2855" marB="2855" anchor="ctr"/>
+                </a:tc>
+                <a:tc>
+                  <a:txBody>
+                    <a:bodyPr/>
+                    <a:lstStyle/>
+                    <a:p>
+                      <a:pPr>
+                        <a:buNone/>
+                      </a:pPr>
+                      <a:r>
+                        <a:rPr lang="en-GB" sz="1700" b="1" kern="1200" dirty="0">
+                          <a:solidFill>
+                            <a:schemeClr val="dk1"/>
+                          </a:solidFill>
+                          <a:effectLst/>
+                        </a:rPr>
+                        <a:t>date</a:t>
+                      </a:r>
+                      <a:endParaRPr lang="en-GB" sz="1700" b="1" kern="1200" dirty="0">
+                        <a:solidFill>
+                          <a:schemeClr val="dk1"/>
+                        </a:solidFill>
+                        <a:effectLst/>
+                        <a:latin typeface="+mn-lt"/>
+                        <a:ea typeface="+mn-ea"/>
+                        <a:cs typeface="+mn-cs"/>
+                      </a:endParaRPr>
+                    </a:p>
+                  </a:txBody>
+                  <a:tcPr marL="17131" marR="17131" marT="2855" marB="2855" anchor="ctr"/>
+                </a:tc>
+                <a:extLst>
+                  <a:ext uri="{0D108BD9-81ED-4DB2-BD59-A6C34878D82A}">
+                    <a16:rowId xmlns:a16="http://schemas.microsoft.com/office/drawing/2014/main" val="1279076122"/>
+                  </a:ext>
+                </a:extLst>
+              </a:tr>
+              <a:tr h="725070">
+                <a:tc>
+                  <a:txBody>
+                    <a:bodyPr/>
+                    <a:lstStyle/>
+                    <a:p>
+                      <a:pPr algn="r" fontAlgn="t">
+                        <a:buNone/>
+                      </a:pPr>
+                      <a:r>
+                        <a:rPr lang="en-IL" sz="1700" kern="1200" dirty="0">
+                          <a:solidFill>
+                            <a:schemeClr val="dk1"/>
+                          </a:solidFill>
+                          <a:effectLst/>
+                        </a:rPr>
+                        <a:t>123</a:t>
+                      </a:r>
+                      <a:endParaRPr lang="en-IL" sz="1700" kern="1200" dirty="0">
+                        <a:solidFill>
+                          <a:schemeClr val="dk1"/>
+                        </a:solidFill>
+                        <a:effectLst/>
+                        <a:latin typeface="+mn-lt"/>
+                        <a:ea typeface="+mn-ea"/>
+                        <a:cs typeface="+mn-cs"/>
+                      </a:endParaRPr>
+                    </a:p>
+                  </a:txBody>
+                  <a:tcPr marL="17131" marR="17131" marT="2855" marB="2855"/>
+                </a:tc>
+                <a:tc>
+                  <a:txBody>
+                    <a:bodyPr/>
+                    <a:lstStyle/>
+                    <a:p>
+                      <a:pPr fontAlgn="t">
+                        <a:buNone/>
+                      </a:pPr>
+                      <a:r>
+                        <a:rPr lang="en-GB" sz="1700" kern="1200" dirty="0" err="1">
+                          <a:solidFill>
+                            <a:schemeClr val="dk1"/>
+                          </a:solidFill>
+                          <a:effectLst/>
+                        </a:rPr>
+                        <a:t>MichaelSerapio</a:t>
+                      </a:r>
+                      <a:endParaRPr lang="en-GB" sz="1700" kern="1200" dirty="0">
+                        <a:solidFill>
+                          <a:schemeClr val="dk1"/>
+                        </a:solidFill>
+                        <a:effectLst/>
+                        <a:latin typeface="+mn-lt"/>
+                        <a:ea typeface="+mn-ea"/>
+                        <a:cs typeface="+mn-cs"/>
+                      </a:endParaRPr>
+                    </a:p>
+                  </a:txBody>
+                  <a:tcPr marL="17131" marR="17131" marT="2855" marB="2855"/>
+                </a:tc>
+                <a:tc>
+                  <a:txBody>
+                    <a:bodyPr/>
+                    <a:lstStyle/>
+                    <a:p>
+                      <a:pPr fontAlgn="t">
+                        <a:buNone/>
+                      </a:pPr>
+                      <a:r>
+                        <a:rPr lang="en-GB" sz="1700" kern="1200">
+                          <a:solidFill>
+                            <a:schemeClr val="dk1"/>
+                          </a:solidFill>
+                          <a:effectLst/>
+                        </a:rPr>
+                        <a:t># Canadians John # Greyson and Dr Tarek # Loubani still unable to leave # Egypt Details on # CBCNews Network # CBCNN</a:t>
+                      </a:r>
+                      <a:endParaRPr lang="en-GB" sz="1700" kern="1200">
+                        <a:solidFill>
+                          <a:schemeClr val="dk1"/>
+                        </a:solidFill>
+                        <a:effectLst/>
+                        <a:latin typeface="+mn-lt"/>
+                        <a:ea typeface="+mn-ea"/>
+                        <a:cs typeface="+mn-cs"/>
+                      </a:endParaRPr>
+                    </a:p>
+                  </a:txBody>
+                  <a:tcPr marL="17131" marR="17131" marT="2855" marB="2855"/>
+                </a:tc>
+                <a:tc>
+                  <a:txBody>
+                    <a:bodyPr/>
+                    <a:lstStyle/>
+                    <a:p>
+                      <a:pPr algn="r" fontAlgn="t">
+                        <a:buNone/>
+                      </a:pPr>
+                      <a:r>
+                        <a:rPr lang="en-IL" sz="1700" kern="1200" dirty="0">
+                          <a:solidFill>
+                            <a:schemeClr val="dk1"/>
+                          </a:solidFill>
+                          <a:effectLst/>
+                        </a:rPr>
+                        <a:t>0.5503</a:t>
+                      </a:r>
+                      <a:endParaRPr lang="en-IL" sz="1700" kern="1200" dirty="0">
+                        <a:solidFill>
+                          <a:schemeClr val="dk1"/>
+                        </a:solidFill>
+                        <a:effectLst/>
+                        <a:latin typeface="+mn-lt"/>
+                        <a:ea typeface="+mn-ea"/>
+                        <a:cs typeface="+mn-cs"/>
+                      </a:endParaRPr>
+                    </a:p>
+                  </a:txBody>
+                  <a:tcPr marL="17131" marR="17131" marT="2855" marB="2855"/>
+                </a:tc>
+                <a:tc>
+                  <a:txBody>
+                    <a:bodyPr/>
+                    <a:lstStyle/>
+                    <a:p>
+                      <a:pPr fontAlgn="t">
+                        <a:buNone/>
+                      </a:pPr>
+                      <a:r>
+                        <a:rPr lang="en-IL" sz="1700" kern="1200" dirty="0">
+                          <a:solidFill>
+                            <a:schemeClr val="dk1"/>
+                          </a:solidFill>
+                          <a:effectLst/>
+                        </a:rPr>
+                        <a:t>2013-10-07 15:52:52</a:t>
+                      </a:r>
+                      <a:endParaRPr lang="en-IL" sz="1700" kern="1200" dirty="0">
+                        <a:solidFill>
+                          <a:schemeClr val="dk1"/>
+                        </a:solidFill>
+                        <a:effectLst/>
+                        <a:latin typeface="+mn-lt"/>
+                        <a:ea typeface="+mn-ea"/>
+                        <a:cs typeface="+mn-cs"/>
+                      </a:endParaRPr>
+                    </a:p>
+                  </a:txBody>
+                  <a:tcPr marL="17131" marR="17131" marT="2855" marB="2855"/>
+                </a:tc>
+                <a:extLst>
+                  <a:ext uri="{0D108BD9-81ED-4DB2-BD59-A6C34878D82A}">
+                    <a16:rowId xmlns:a16="http://schemas.microsoft.com/office/drawing/2014/main" val="3060550933"/>
+                  </a:ext>
+                </a:extLst>
+              </a:tr>
+              <a:tr h="725070">
+                <a:tc>
+                  <a:txBody>
+                    <a:bodyPr/>
+                    <a:lstStyle/>
+                    <a:p>
+                      <a:pPr algn="r" fontAlgn="t">
+                        <a:buNone/>
+                      </a:pPr>
+                      <a:r>
+                        <a:rPr lang="en-IL" sz="1700" kern="1200">
+                          <a:solidFill>
+                            <a:schemeClr val="dk1"/>
+                          </a:solidFill>
+                          <a:effectLst/>
+                        </a:rPr>
+                        <a:t>123</a:t>
+                      </a:r>
+                      <a:endParaRPr lang="en-IL" sz="1700" kern="1200">
+                        <a:solidFill>
+                          <a:schemeClr val="dk1"/>
+                        </a:solidFill>
+                        <a:effectLst/>
+                        <a:latin typeface="+mn-lt"/>
+                        <a:ea typeface="+mn-ea"/>
+                        <a:cs typeface="+mn-cs"/>
+                      </a:endParaRPr>
+                    </a:p>
+                  </a:txBody>
+                  <a:tcPr marL="17131" marR="17131" marT="2855" marB="2855"/>
+                </a:tc>
+                <a:tc>
+                  <a:txBody>
+                    <a:bodyPr/>
+                    <a:lstStyle/>
+                    <a:p>
+                      <a:pPr fontAlgn="t">
+                        <a:buNone/>
+                      </a:pPr>
+                      <a:r>
+                        <a:rPr lang="en-GB" sz="1700" kern="1200">
+                          <a:solidFill>
+                            <a:schemeClr val="dk1"/>
+                          </a:solidFill>
+                          <a:effectLst/>
+                        </a:rPr>
+                        <a:t>MichaelSerapio</a:t>
+                      </a:r>
+                      <a:endParaRPr lang="en-GB" sz="1700" kern="1200">
+                        <a:solidFill>
+                          <a:schemeClr val="dk1"/>
+                        </a:solidFill>
+                        <a:effectLst/>
+                        <a:latin typeface="+mn-lt"/>
+                        <a:ea typeface="+mn-ea"/>
+                        <a:cs typeface="+mn-cs"/>
+                      </a:endParaRPr>
+                    </a:p>
+                  </a:txBody>
+                  <a:tcPr marL="17131" marR="17131" marT="2855" marB="2855"/>
+                </a:tc>
+                <a:tc>
+                  <a:txBody>
+                    <a:bodyPr/>
+                    <a:lstStyle/>
+                    <a:p>
+                      <a:pPr fontAlgn="t">
+                        <a:buNone/>
+                      </a:pPr>
+                      <a:r>
+                        <a:rPr lang="en-GB" sz="1700" kern="1200">
+                          <a:solidFill>
+                            <a:schemeClr val="dk1"/>
+                          </a:solidFill>
+                          <a:effectLst/>
+                        </a:rPr>
+                        <a:t># Canadians John # Greyson and Dr Tarek # Loubani still unable to leave # Egypt Details on # CBCNews Network # CBCNN</a:t>
+                      </a:r>
+                      <a:endParaRPr lang="en-GB" sz="1700" kern="1200">
+                        <a:solidFill>
+                          <a:schemeClr val="dk1"/>
+                        </a:solidFill>
+                        <a:effectLst/>
+                        <a:latin typeface="+mn-lt"/>
+                        <a:ea typeface="+mn-ea"/>
+                        <a:cs typeface="+mn-cs"/>
+                      </a:endParaRPr>
+                    </a:p>
+                  </a:txBody>
+                  <a:tcPr marL="17131" marR="17131" marT="2855" marB="2855"/>
+                </a:tc>
+                <a:tc>
+                  <a:txBody>
+                    <a:bodyPr/>
+                    <a:lstStyle/>
+                    <a:p>
+                      <a:pPr algn="r" fontAlgn="t">
+                        <a:buNone/>
+                      </a:pPr>
+                      <a:r>
+                        <a:rPr lang="en-IL" sz="1700" kern="1200" dirty="0">
+                          <a:solidFill>
+                            <a:schemeClr val="dk1"/>
+                          </a:solidFill>
+                          <a:effectLst/>
+                        </a:rPr>
+                        <a:t>0.5503</a:t>
+                      </a:r>
+                      <a:endParaRPr lang="en-IL" sz="1700" kern="1200" dirty="0">
+                        <a:solidFill>
+                          <a:schemeClr val="dk1"/>
+                        </a:solidFill>
+                        <a:effectLst/>
+                        <a:latin typeface="+mn-lt"/>
+                        <a:ea typeface="+mn-ea"/>
+                        <a:cs typeface="+mn-cs"/>
+                      </a:endParaRPr>
+                    </a:p>
+                  </a:txBody>
+                  <a:tcPr marL="17131" marR="17131" marT="2855" marB="2855"/>
+                </a:tc>
+                <a:tc>
+                  <a:txBody>
+                    <a:bodyPr/>
+                    <a:lstStyle/>
+                    <a:p>
+                      <a:pPr fontAlgn="t">
+                        <a:buNone/>
+                      </a:pPr>
+                      <a:r>
+                        <a:rPr lang="en-IL" sz="1700" kern="1200">
+                          <a:solidFill>
+                            <a:schemeClr val="dk1"/>
+                          </a:solidFill>
+                          <a:effectLst/>
+                        </a:rPr>
+                        <a:t>2013-10-07 15:52:52</a:t>
+                      </a:r>
+                      <a:endParaRPr lang="en-IL" sz="1700" kern="1200">
+                        <a:solidFill>
+                          <a:schemeClr val="dk1"/>
+                        </a:solidFill>
+                        <a:effectLst/>
+                        <a:latin typeface="+mn-lt"/>
+                        <a:ea typeface="+mn-ea"/>
+                        <a:cs typeface="+mn-cs"/>
+                      </a:endParaRPr>
+                    </a:p>
+                  </a:txBody>
+                  <a:tcPr marL="17131" marR="17131" marT="2855" marB="2855"/>
+                </a:tc>
+                <a:extLst>
+                  <a:ext uri="{0D108BD9-81ED-4DB2-BD59-A6C34878D82A}">
+                    <a16:rowId xmlns:a16="http://schemas.microsoft.com/office/drawing/2014/main" val="4189141570"/>
+                  </a:ext>
+                </a:extLst>
+              </a:tr>
+              <a:tr h="883178">
+                <a:tc>
+                  <a:txBody>
+                    <a:bodyPr/>
+                    <a:lstStyle/>
+                    <a:p>
+                      <a:pPr algn="r" fontAlgn="t">
+                        <a:buNone/>
+                      </a:pPr>
+                      <a:r>
+                        <a:rPr lang="en-IL" sz="1700" kern="1200">
+                          <a:solidFill>
+                            <a:schemeClr val="dk1"/>
+                          </a:solidFill>
+                          <a:effectLst/>
+                        </a:rPr>
+                        <a:t>123</a:t>
+                      </a:r>
+                      <a:endParaRPr lang="en-IL" sz="1700" kern="1200">
+                        <a:solidFill>
+                          <a:schemeClr val="dk1"/>
+                        </a:solidFill>
+                        <a:effectLst/>
+                        <a:latin typeface="+mn-lt"/>
+                        <a:ea typeface="+mn-ea"/>
+                        <a:cs typeface="+mn-cs"/>
+                      </a:endParaRPr>
+                    </a:p>
+                  </a:txBody>
+                  <a:tcPr marL="17131" marR="17131" marT="2855" marB="2855"/>
+                </a:tc>
+                <a:tc>
+                  <a:txBody>
+                    <a:bodyPr/>
+                    <a:lstStyle/>
+                    <a:p>
+                      <a:pPr fontAlgn="t">
+                        <a:buNone/>
+                      </a:pPr>
+                      <a:r>
+                        <a:rPr lang="en-GB" sz="1700" kern="1200">
+                          <a:solidFill>
+                            <a:schemeClr val="dk1"/>
+                          </a:solidFill>
+                          <a:effectLst/>
+                        </a:rPr>
+                        <a:t>ayateldewary</a:t>
+                      </a:r>
+                      <a:endParaRPr lang="en-GB" sz="1700" kern="1200">
+                        <a:solidFill>
+                          <a:schemeClr val="dk1"/>
+                        </a:solidFill>
+                        <a:effectLst/>
+                        <a:latin typeface="+mn-lt"/>
+                        <a:ea typeface="+mn-ea"/>
+                        <a:cs typeface="+mn-cs"/>
+                      </a:endParaRPr>
+                    </a:p>
+                  </a:txBody>
+                  <a:tcPr marL="17131" marR="17131" marT="2855" marB="2855"/>
+                </a:tc>
+                <a:tc>
+                  <a:txBody>
+                    <a:bodyPr/>
+                    <a:lstStyle/>
+                    <a:p>
+                      <a:pPr fontAlgn="t">
+                        <a:buNone/>
+                      </a:pPr>
+                      <a:r>
+                        <a:rPr lang="en-GB" sz="1700" kern="1200" dirty="0">
+                          <a:solidFill>
+                            <a:schemeClr val="dk1"/>
+                          </a:solidFill>
+                          <a:effectLst/>
+                        </a:rPr>
+                        <a:t>Two # Canadians released from prison in # Egypt http://bit.ly/1htsJDh  - Wishing them a safe return back home. # </a:t>
+                      </a:r>
+                      <a:r>
+                        <a:rPr lang="en-GB" sz="1700" kern="1200" dirty="0" err="1">
+                          <a:solidFill>
+                            <a:schemeClr val="dk1"/>
+                          </a:solidFill>
+                          <a:effectLst/>
+                        </a:rPr>
+                        <a:t>cdnpoli</a:t>
+                      </a:r>
+                      <a:r>
+                        <a:rPr lang="en-GB" sz="1700" kern="1200" dirty="0">
+                          <a:solidFill>
+                            <a:schemeClr val="dk1"/>
+                          </a:solidFill>
+                          <a:effectLst/>
+                        </a:rPr>
+                        <a:t> # </a:t>
+                      </a:r>
+                      <a:r>
+                        <a:rPr lang="en-GB" sz="1700" kern="1200" dirty="0" err="1">
+                          <a:solidFill>
+                            <a:schemeClr val="dk1"/>
+                          </a:solidFill>
+                          <a:effectLst/>
+                        </a:rPr>
+                        <a:t>FreeTarekandJohn</a:t>
+                      </a:r>
+                      <a:endParaRPr lang="en-GB" sz="1700" kern="1200" dirty="0">
+                        <a:solidFill>
+                          <a:schemeClr val="dk1"/>
+                        </a:solidFill>
+                        <a:effectLst/>
+                        <a:latin typeface="+mn-lt"/>
+                        <a:ea typeface="+mn-ea"/>
+                        <a:cs typeface="+mn-cs"/>
+                      </a:endParaRPr>
+                    </a:p>
+                  </a:txBody>
+                  <a:tcPr marL="17131" marR="17131" marT="2855" marB="2855"/>
+                </a:tc>
+                <a:tc>
+                  <a:txBody>
+                    <a:bodyPr/>
+                    <a:lstStyle/>
+                    <a:p>
+                      <a:pPr algn="r" fontAlgn="t">
+                        <a:buNone/>
+                      </a:pPr>
+                      <a:r>
+                        <a:rPr lang="en-IL" sz="1700" kern="1200" dirty="0">
+                          <a:solidFill>
+                            <a:schemeClr val="dk1"/>
+                          </a:solidFill>
+                          <a:effectLst/>
+                        </a:rPr>
+                        <a:t>0.4308</a:t>
+                      </a:r>
+                      <a:endParaRPr lang="en-IL" sz="1700" kern="1200" dirty="0">
+                        <a:solidFill>
+                          <a:schemeClr val="dk1"/>
+                        </a:solidFill>
+                        <a:effectLst/>
+                        <a:latin typeface="+mn-lt"/>
+                        <a:ea typeface="+mn-ea"/>
+                        <a:cs typeface="+mn-cs"/>
+                      </a:endParaRPr>
+                    </a:p>
+                  </a:txBody>
+                  <a:tcPr marL="17131" marR="17131" marT="2855" marB="2855"/>
+                </a:tc>
+                <a:tc>
+                  <a:txBody>
+                    <a:bodyPr/>
+                    <a:lstStyle/>
+                    <a:p>
+                      <a:pPr fontAlgn="t">
+                        <a:buNone/>
+                      </a:pPr>
+                      <a:r>
+                        <a:rPr lang="en-IL" sz="1700" kern="1200" dirty="0">
+                          <a:solidFill>
+                            <a:schemeClr val="dk1"/>
+                          </a:solidFill>
+                          <a:effectLst/>
+                        </a:rPr>
+                        <a:t>2013-10-06 07:48:21</a:t>
+                      </a:r>
+                      <a:endParaRPr lang="en-IL" sz="1700" kern="1200" dirty="0">
+                        <a:solidFill>
+                          <a:schemeClr val="dk1"/>
+                        </a:solidFill>
+                        <a:effectLst/>
+                        <a:latin typeface="+mn-lt"/>
+                        <a:ea typeface="+mn-ea"/>
+                        <a:cs typeface="+mn-cs"/>
+                      </a:endParaRPr>
+                    </a:p>
+                  </a:txBody>
+                  <a:tcPr marL="17131" marR="17131" marT="2855" marB="2855"/>
+                </a:tc>
+                <a:extLst>
+                  <a:ext uri="{0D108BD9-81ED-4DB2-BD59-A6C34878D82A}">
+                    <a16:rowId xmlns:a16="http://schemas.microsoft.com/office/drawing/2014/main" val="4196896635"/>
+                  </a:ext>
+                </a:extLst>
+              </a:tr>
+              <a:tr h="883178">
+                <a:tc>
+                  <a:txBody>
+                    <a:bodyPr/>
+                    <a:lstStyle/>
+                    <a:p>
+                      <a:pPr algn="r" fontAlgn="t">
+                        <a:buNone/>
+                      </a:pPr>
+                      <a:r>
+                        <a:rPr lang="en-IL" sz="1700" kern="1200">
+                          <a:solidFill>
+                            <a:schemeClr val="dk1"/>
+                          </a:solidFill>
+                          <a:effectLst/>
+                        </a:rPr>
+                        <a:t>123</a:t>
+                      </a:r>
+                      <a:endParaRPr lang="en-IL" sz="1700" kern="1200">
+                        <a:solidFill>
+                          <a:schemeClr val="dk1"/>
+                        </a:solidFill>
+                        <a:effectLst/>
+                        <a:latin typeface="+mn-lt"/>
+                        <a:ea typeface="+mn-ea"/>
+                        <a:cs typeface="+mn-cs"/>
+                      </a:endParaRPr>
+                    </a:p>
+                  </a:txBody>
+                  <a:tcPr marL="17131" marR="17131" marT="2855" marB="2855"/>
+                </a:tc>
+                <a:tc>
+                  <a:txBody>
+                    <a:bodyPr/>
+                    <a:lstStyle/>
+                    <a:p>
+                      <a:pPr fontAlgn="t">
+                        <a:buNone/>
+                      </a:pPr>
+                      <a:r>
+                        <a:rPr lang="en-GB" sz="1700" kern="1200">
+                          <a:solidFill>
+                            <a:schemeClr val="dk1"/>
+                          </a:solidFill>
+                          <a:effectLst/>
+                        </a:rPr>
+                        <a:t>SarahVirro</a:t>
+                      </a:r>
+                      <a:endParaRPr lang="en-GB" sz="1700" kern="1200">
+                        <a:solidFill>
+                          <a:schemeClr val="dk1"/>
+                        </a:solidFill>
+                        <a:effectLst/>
+                        <a:latin typeface="+mn-lt"/>
+                        <a:ea typeface="+mn-ea"/>
+                        <a:cs typeface="+mn-cs"/>
+                      </a:endParaRPr>
+                    </a:p>
+                  </a:txBody>
+                  <a:tcPr marL="17131" marR="17131" marT="2855" marB="2855"/>
+                </a:tc>
+                <a:tc>
+                  <a:txBody>
+                    <a:bodyPr/>
+                    <a:lstStyle/>
+                    <a:p>
+                      <a:pPr fontAlgn="t">
+                        <a:buNone/>
+                      </a:pPr>
+                      <a:r>
+                        <a:rPr lang="en-GB" sz="1700" kern="1200">
+                          <a:solidFill>
+                            <a:schemeClr val="dk1"/>
+                          </a:solidFill>
+                          <a:effectLst/>
+                        </a:rPr>
+                        <a:t>Greyson and Loubani have finally arrived home! # Canadians # Egypt # Toronto # WelcomeBack # Thanksgivingpic.twitter.com/N53Qc2UAbZ</a:t>
+                      </a:r>
+                      <a:endParaRPr lang="en-GB" sz="1700" kern="1200">
+                        <a:solidFill>
+                          <a:schemeClr val="dk1"/>
+                        </a:solidFill>
+                        <a:effectLst/>
+                        <a:latin typeface="+mn-lt"/>
+                        <a:ea typeface="+mn-ea"/>
+                        <a:cs typeface="+mn-cs"/>
+                      </a:endParaRPr>
+                    </a:p>
+                  </a:txBody>
+                  <a:tcPr marL="17131" marR="17131" marT="2855" marB="2855"/>
+                </a:tc>
+                <a:tc>
+                  <a:txBody>
+                    <a:bodyPr/>
+                    <a:lstStyle/>
+                    <a:p>
+                      <a:pPr algn="r" fontAlgn="t">
+                        <a:buNone/>
+                      </a:pPr>
+                      <a:r>
+                        <a:rPr lang="en-IL" sz="1700" kern="1200" dirty="0">
+                          <a:solidFill>
+                            <a:schemeClr val="dk1"/>
+                          </a:solidFill>
+                          <a:effectLst/>
+                        </a:rPr>
+                        <a:t>0.4280</a:t>
+                      </a:r>
+                      <a:endParaRPr lang="en-IL" sz="1700" kern="1200" dirty="0">
+                        <a:solidFill>
+                          <a:schemeClr val="dk1"/>
+                        </a:solidFill>
+                        <a:effectLst/>
+                        <a:latin typeface="+mn-lt"/>
+                        <a:ea typeface="+mn-ea"/>
+                        <a:cs typeface="+mn-cs"/>
+                      </a:endParaRPr>
+                    </a:p>
+                  </a:txBody>
+                  <a:tcPr marL="17131" marR="17131" marT="2855" marB="2855"/>
+                </a:tc>
+                <a:tc>
+                  <a:txBody>
+                    <a:bodyPr/>
+                    <a:lstStyle/>
+                    <a:p>
+                      <a:pPr fontAlgn="t">
+                        <a:buNone/>
+                      </a:pPr>
+                      <a:r>
+                        <a:rPr lang="en-IL" sz="1700" kern="1200" dirty="0">
+                          <a:solidFill>
+                            <a:schemeClr val="dk1"/>
+                          </a:solidFill>
+                          <a:effectLst/>
+                        </a:rPr>
+                        <a:t>2013-10-12 02:24:56</a:t>
+                      </a:r>
+                      <a:endParaRPr lang="en-IL" sz="1700" kern="1200" dirty="0">
+                        <a:solidFill>
+                          <a:schemeClr val="dk1"/>
+                        </a:solidFill>
+                        <a:effectLst/>
+                        <a:latin typeface="+mn-lt"/>
+                        <a:ea typeface="+mn-ea"/>
+                        <a:cs typeface="+mn-cs"/>
+                      </a:endParaRPr>
+                    </a:p>
+                  </a:txBody>
+                  <a:tcPr marL="17131" marR="17131" marT="2855" marB="2855"/>
+                </a:tc>
+                <a:extLst>
+                  <a:ext uri="{0D108BD9-81ED-4DB2-BD59-A6C34878D82A}">
+                    <a16:rowId xmlns:a16="http://schemas.microsoft.com/office/drawing/2014/main" val="347466173"/>
+                  </a:ext>
+                </a:extLst>
+              </a:tr>
+              <a:tr h="1204925">
+                <a:tc>
+                  <a:txBody>
+                    <a:bodyPr/>
+                    <a:lstStyle/>
+                    <a:p>
+                      <a:pPr algn="r" fontAlgn="t">
+                        <a:buNone/>
+                      </a:pPr>
+                      <a:r>
+                        <a:rPr lang="en-IL" sz="1700" kern="1200" dirty="0">
+                          <a:solidFill>
+                            <a:schemeClr val="dk1"/>
+                          </a:solidFill>
+                          <a:effectLst/>
+                        </a:rPr>
+                        <a:t>123</a:t>
+                      </a:r>
+                      <a:endParaRPr lang="en-IL" sz="1700" kern="1200" dirty="0">
+                        <a:solidFill>
+                          <a:schemeClr val="dk1"/>
+                        </a:solidFill>
+                        <a:effectLst/>
+                        <a:latin typeface="+mn-lt"/>
+                        <a:ea typeface="+mn-ea"/>
+                        <a:cs typeface="+mn-cs"/>
+                      </a:endParaRPr>
+                    </a:p>
+                  </a:txBody>
+                  <a:tcPr marL="17131" marR="17131" marT="2855" marB="2855"/>
+                </a:tc>
+                <a:tc>
+                  <a:txBody>
+                    <a:bodyPr/>
+                    <a:lstStyle/>
+                    <a:p>
+                      <a:pPr fontAlgn="t">
+                        <a:buNone/>
+                      </a:pPr>
+                      <a:r>
+                        <a:rPr lang="en-GB" sz="1700" kern="1200" dirty="0" err="1">
+                          <a:solidFill>
+                            <a:schemeClr val="dk1"/>
+                          </a:solidFill>
+                          <a:effectLst/>
+                        </a:rPr>
+                        <a:t>Leftpalm</a:t>
+                      </a:r>
+                      <a:endParaRPr lang="en-GB" sz="1700" kern="1200" dirty="0">
+                        <a:solidFill>
+                          <a:schemeClr val="dk1"/>
+                        </a:solidFill>
+                        <a:effectLst/>
+                        <a:latin typeface="+mn-lt"/>
+                        <a:ea typeface="+mn-ea"/>
+                        <a:cs typeface="+mn-cs"/>
+                      </a:endParaRPr>
+                    </a:p>
+                  </a:txBody>
+                  <a:tcPr marL="17131" marR="17131" marT="2855" marB="2855"/>
+                </a:tc>
+                <a:tc>
+                  <a:txBody>
+                    <a:bodyPr/>
+                    <a:lstStyle/>
+                    <a:p>
+                      <a:pPr fontAlgn="t">
+                        <a:buNone/>
+                      </a:pPr>
+                      <a:r>
+                        <a:rPr lang="en-GB" sz="1700" kern="1200">
+                          <a:solidFill>
+                            <a:schemeClr val="dk1"/>
+                          </a:solidFill>
+                          <a:effectLst/>
+                        </a:rPr>
+                        <a:t># Canadians John Greyson &amp; Tarek Loubani held in # Egypt 4more than 50dys without charge on a plane bound for # Toronto http://www.madamasr.com/content/egypt-releases- canadians-held-without-charge …</a:t>
+                      </a:r>
+                      <a:endParaRPr lang="en-GB" sz="1700" kern="1200">
+                        <a:solidFill>
+                          <a:schemeClr val="dk1"/>
+                        </a:solidFill>
+                        <a:effectLst/>
+                        <a:latin typeface="+mn-lt"/>
+                        <a:ea typeface="+mn-ea"/>
+                        <a:cs typeface="+mn-cs"/>
+                      </a:endParaRPr>
+                    </a:p>
+                  </a:txBody>
+                  <a:tcPr marL="17131" marR="17131" marT="2855" marB="2855"/>
+                </a:tc>
+                <a:tc>
+                  <a:txBody>
+                    <a:bodyPr/>
+                    <a:lstStyle/>
+                    <a:p>
+                      <a:pPr algn="r" fontAlgn="t">
+                        <a:buNone/>
+                      </a:pPr>
+                      <a:r>
+                        <a:rPr lang="en-IL" sz="1700" kern="1200" dirty="0">
+                          <a:solidFill>
+                            <a:schemeClr val="dk1"/>
+                          </a:solidFill>
+                          <a:effectLst/>
+                        </a:rPr>
+                        <a:t>0.4150</a:t>
+                      </a:r>
+                      <a:endParaRPr lang="en-IL" sz="1700" kern="1200" dirty="0">
+                        <a:solidFill>
+                          <a:schemeClr val="dk1"/>
+                        </a:solidFill>
+                        <a:effectLst/>
+                        <a:latin typeface="+mn-lt"/>
+                        <a:ea typeface="+mn-ea"/>
+                        <a:cs typeface="+mn-cs"/>
+                      </a:endParaRPr>
+                    </a:p>
+                  </a:txBody>
+                  <a:tcPr marL="17131" marR="17131" marT="2855" marB="2855"/>
+                </a:tc>
+                <a:tc>
+                  <a:txBody>
+                    <a:bodyPr/>
+                    <a:lstStyle/>
+                    <a:p>
+                      <a:pPr fontAlgn="t">
+                        <a:buNone/>
+                      </a:pPr>
+                      <a:r>
+                        <a:rPr lang="en-IL" sz="1700" kern="1200" dirty="0">
+                          <a:solidFill>
+                            <a:schemeClr val="dk1"/>
+                          </a:solidFill>
+                          <a:effectLst/>
+                        </a:rPr>
+                        <a:t>2013-10-06 20:29:38</a:t>
+                      </a:r>
+                      <a:endParaRPr lang="en-IL" sz="1700" kern="1200" dirty="0">
+                        <a:solidFill>
+                          <a:schemeClr val="dk1"/>
+                        </a:solidFill>
+                        <a:effectLst/>
+                        <a:latin typeface="+mn-lt"/>
+                        <a:ea typeface="+mn-ea"/>
+                        <a:cs typeface="+mn-cs"/>
+                      </a:endParaRPr>
+                    </a:p>
+                  </a:txBody>
+                  <a:tcPr marL="17131" marR="17131" marT="2855" marB="2855"/>
+                </a:tc>
+                <a:extLst>
+                  <a:ext uri="{0D108BD9-81ED-4DB2-BD59-A6C34878D82A}">
+                    <a16:rowId xmlns:a16="http://schemas.microsoft.com/office/drawing/2014/main" val="1146028420"/>
+                  </a:ext>
+                </a:extLst>
+              </a:tr>
+            </a:tbl>
+          </a:graphicData>
+        </a:graphic>
+      </p:graphicFrame>
     </p:spTree>
     <p:extLst>
       <p:ext uri="{BB962C8B-B14F-4D97-AF65-F5344CB8AC3E}">
@@ -10932,10 +12105,10 @@
       </p:sp>
       <p:pic>
         <p:nvPicPr>
-          <p:cNvPr id="13" name="Picture 12">
+          <p:cNvPr id="6" name="Picture 5">
             <a:extLst>
               <a:ext uri="{FF2B5EF4-FFF2-40B4-BE49-F238E27FC236}">
-                <a16:creationId xmlns:a16="http://schemas.microsoft.com/office/drawing/2014/main" id="{18E07815-4142-22BA-6EB7-11D339A3DAE2}"/>
+                <a16:creationId xmlns:a16="http://schemas.microsoft.com/office/drawing/2014/main" id="{B4A184C5-B690-515D-EDE8-57BA03C2D6D7}"/>
               </a:ext>
             </a:extLst>
           </p:cNvPr>
@@ -10952,8 +12125,8 @@
         </p:blipFill>
         <p:spPr>
           <a:xfrm>
-            <a:off x="822960" y="1743845"/>
-            <a:ext cx="4852871" cy="3370305"/>
+            <a:off x="1064871" y="2106594"/>
+            <a:ext cx="4785354" cy="3368232"/>
           </a:xfrm>
           <a:prstGeom prst="rect">
             <a:avLst/>
@@ -10992,10 +12165,10 @@
       </p:pic>
       <p:pic>
         <p:nvPicPr>
-          <p:cNvPr id="15" name="Picture 14">
+          <p:cNvPr id="9" name="Picture 8">
             <a:extLst>
               <a:ext uri="{FF2B5EF4-FFF2-40B4-BE49-F238E27FC236}">
-                <a16:creationId xmlns:a16="http://schemas.microsoft.com/office/drawing/2014/main" id="{819878E1-5FA7-2CAE-A13F-BB97C872A67D}"/>
+                <a16:creationId xmlns:a16="http://schemas.microsoft.com/office/drawing/2014/main" id="{D0AB8DD2-5443-2558-5F7F-248BBBA1FC8E}"/>
               </a:ext>
             </a:extLst>
           </p:cNvPr>
@@ -11012,8 +12185,8 @@
         </p:blipFill>
         <p:spPr>
           <a:xfrm>
-            <a:off x="6683492" y="1743844"/>
-            <a:ext cx="4852871" cy="3370305"/>
+            <a:off x="6478219" y="2106594"/>
+            <a:ext cx="4785354" cy="3368231"/>
           </a:xfrm>
           <a:prstGeom prst="rect">
             <a:avLst/>
@@ -11485,10 +12658,10 @@
       </p:sp>
       <p:pic>
         <p:nvPicPr>
-          <p:cNvPr id="16" name="Picture 15">
+          <p:cNvPr id="4" name="Picture 3">
             <a:extLst>
               <a:ext uri="{FF2B5EF4-FFF2-40B4-BE49-F238E27FC236}">
-                <a16:creationId xmlns:a16="http://schemas.microsoft.com/office/drawing/2014/main" id="{3C0C5BAA-43B4-1E68-6782-3600DDB7AE44}"/>
+                <a16:creationId xmlns:a16="http://schemas.microsoft.com/office/drawing/2014/main" id="{13AF3C77-4FE7-18B1-0391-82D4CE3F0E3E}"/>
               </a:ext>
             </a:extLst>
           </p:cNvPr>
@@ -11505,8 +12678,8 @@
         </p:blipFill>
         <p:spPr>
           <a:xfrm>
-            <a:off x="3669564" y="1743847"/>
-            <a:ext cx="4852871" cy="3370305"/>
+            <a:off x="3507772" y="1851949"/>
+            <a:ext cx="5176455" cy="3727047"/>
           </a:xfrm>
           <a:prstGeom prst="rect">
             <a:avLst/>
@@ -11557,1625 +12730,6 @@
 </file>
 
 <file path=ppt/slides/slide6.xml><?xml version="1.0" encoding="utf-8"?>
-<p:sld xmlns:a="http://schemas.openxmlformats.org/drawingml/2006/main" xmlns:r="http://schemas.openxmlformats.org/officeDocument/2006/relationships" xmlns:p="http://schemas.openxmlformats.org/presentationml/2006/main">
-  <p:cSld>
-    <p:spTree>
-      <p:nvGrpSpPr>
-        <p:cNvPr id="1" name="">
-          <a:extLst>
-            <a:ext uri="{FF2B5EF4-FFF2-40B4-BE49-F238E27FC236}">
-              <a16:creationId xmlns:a16="http://schemas.microsoft.com/office/drawing/2014/main" id="{7CC1A562-0273-3A18-434C-8CF275B94447}"/>
-            </a:ext>
-          </a:extLst>
-        </p:cNvPr>
-        <p:cNvGrpSpPr/>
-        <p:nvPr/>
-      </p:nvGrpSpPr>
-      <p:grpSpPr>
-        <a:xfrm>
-          <a:off x="0" y="0"/>
-          <a:ext cx="0" cy="0"/>
-          <a:chOff x="0" y="0"/>
-          <a:chExt cx="0" cy="0"/>
-        </a:xfrm>
-      </p:grpSpPr>
-      <p:sp>
-        <p:nvSpPr>
-          <p:cNvPr id="8" name="PlaceHolder 1">
-            <a:extLst>
-              <a:ext uri="{FF2B5EF4-FFF2-40B4-BE49-F238E27FC236}">
-                <a16:creationId xmlns:a16="http://schemas.microsoft.com/office/drawing/2014/main" id="{842125B2-836C-0877-09A8-256635CA121F}"/>
-              </a:ext>
-            </a:extLst>
-          </p:cNvPr>
-          <p:cNvSpPr txBox="1">
-            <a:spLocks/>
-          </p:cNvSpPr>
-          <p:nvPr/>
-        </p:nvSpPr>
-        <p:spPr>
-          <a:xfrm>
-            <a:off x="3060430" y="392571"/>
-            <a:ext cx="6835578" cy="766000"/>
-          </a:xfrm>
-          <a:prstGeom prst="rect">
-            <a:avLst/>
-          </a:prstGeom>
-          <a:noFill/>
-          <a:ln w="0">
-            <a:noFill/>
-          </a:ln>
-        </p:spPr>
-        <p:txBody>
-          <a:bodyPr lIns="91440" tIns="45720" rIns="91440" bIns="45720" anchor="b">
-            <a:noAutofit/>
-          </a:bodyPr>
-          <a:lstStyle>
-            <a:lvl1pPr algn="l" defTabSz="914400" rtl="0" eaLnBrk="1" latinLnBrk="0" hangingPunct="1">
-              <a:lnSpc>
-                <a:spcPct val="90000"/>
-              </a:lnSpc>
-              <a:spcBef>
-                <a:spcPct val="0"/>
-              </a:spcBef>
-              <a:buNone/>
-              <a:defRPr sz="4400" kern="1200">
-                <a:solidFill>
-                  <a:schemeClr val="tx1"/>
-                </a:solidFill>
-                <a:latin typeface="+mj-lt"/>
-                <a:ea typeface="+mj-ea"/>
-                <a:cs typeface="+mj-cs"/>
-              </a:defRPr>
-            </a:lvl1pPr>
-          </a:lstStyle>
-          <a:p>
-            <a:pPr marL="0" marR="0" lvl="0" indent="0" algn="l" defTabSz="914400" rtl="0" eaLnBrk="1" fontAlgn="auto" latinLnBrk="0" hangingPunct="1">
-              <a:lnSpc>
-                <a:spcPct val="90000"/>
-              </a:lnSpc>
-              <a:spcBef>
-                <a:spcPct val="0"/>
-              </a:spcBef>
-              <a:spcAft>
-                <a:spcPts val="0"/>
-              </a:spcAft>
-              <a:buClrTx/>
-              <a:buSzTx/>
-              <a:buFontTx/>
-              <a:buNone/>
-              <a:tabLst>
-                <a:tab pos="0" algn="l"/>
-              </a:tabLst>
-              <a:defRPr/>
-            </a:pPr>
-            <a:r>
-              <a:rPr lang="en-US" sz="3600" spc="-1" dirty="0">
-                <a:solidFill>
-                  <a:srgbClr val="009DBB"/>
-                </a:solidFill>
-                <a:latin typeface="Arial"/>
-              </a:rPr>
-              <a:t>Author’s Activity - Table</a:t>
-            </a:r>
-            <a:endParaRPr kumimoji="0" lang="en-US" sz="3600" b="0" i="0" u="none" strike="noStrike" kern="1200" cap="none" spc="-1" normalizeH="0" baseline="0" noProof="0" dirty="0">
-              <a:ln>
-                <a:noFill/>
-              </a:ln>
-              <a:solidFill>
-                <a:srgbClr val="000000"/>
-              </a:solidFill>
-              <a:effectLst/>
-              <a:uLnTx/>
-              <a:uFillTx/>
-              <a:latin typeface="Arial"/>
-              <a:ea typeface="+mj-ea"/>
-              <a:cs typeface="+mj-cs"/>
-            </a:endParaRPr>
-          </a:p>
-        </p:txBody>
-      </p:sp>
-      <p:sp>
-        <p:nvSpPr>
-          <p:cNvPr id="2" name="Slide Number Placeholder 3">
-            <a:extLst>
-              <a:ext uri="{FF2B5EF4-FFF2-40B4-BE49-F238E27FC236}">
-                <a16:creationId xmlns:a16="http://schemas.microsoft.com/office/drawing/2014/main" id="{4911B725-D399-9338-6558-F121F618D820}"/>
-              </a:ext>
-            </a:extLst>
-          </p:cNvPr>
-          <p:cNvSpPr txBox="1">
-            <a:spLocks/>
-          </p:cNvSpPr>
-          <p:nvPr/>
-        </p:nvSpPr>
-        <p:spPr>
-          <a:xfrm>
-            <a:off x="11739563" y="6477000"/>
-            <a:ext cx="452437" cy="365125"/>
-          </a:xfrm>
-          <a:prstGeom prst="rect">
-            <a:avLst/>
-          </a:prstGeom>
-        </p:spPr>
-        <p:txBody>
-          <a:bodyPr vert="horz" lIns="91440" tIns="45720" rIns="91440" bIns="45720" rtlCol="0" anchor="ctr"/>
-          <a:lstStyle>
-            <a:defPPr marR="0" lvl="0" algn="l" rtl="0">
-              <a:lnSpc>
-                <a:spcPct val="100000"/>
-              </a:lnSpc>
-              <a:spcBef>
-                <a:spcPts val="0"/>
-              </a:spcBef>
-              <a:spcAft>
-                <a:spcPts val="0"/>
-              </a:spcAft>
-            </a:defPPr>
-            <a:lvl1pPr marR="0" lvl="0" algn="ctr" rtl="0">
-              <a:lnSpc>
-                <a:spcPct val="100000"/>
-              </a:lnSpc>
-              <a:spcBef>
-                <a:spcPts val="0"/>
-              </a:spcBef>
-              <a:spcAft>
-                <a:spcPts val="0"/>
-              </a:spcAft>
-              <a:buClr>
-                <a:srgbClr val="000000"/>
-              </a:buClr>
-              <a:buFont typeface="Arial"/>
-              <a:defRPr sz="1200" b="0" i="0" u="none" strike="noStrike" cap="none">
-                <a:solidFill>
-                  <a:schemeClr val="tx1">
-                    <a:tint val="75000"/>
-                  </a:schemeClr>
-                </a:solidFill>
-                <a:latin typeface="Arial"/>
-                <a:ea typeface="Arial"/>
-                <a:cs typeface="Arial"/>
-                <a:sym typeface="Arial"/>
-              </a:defRPr>
-            </a:lvl1pPr>
-            <a:lvl2pPr marR="0" lvl="1" algn="l" rtl="0">
-              <a:lnSpc>
-                <a:spcPct val="100000"/>
-              </a:lnSpc>
-              <a:spcBef>
-                <a:spcPts val="0"/>
-              </a:spcBef>
-              <a:spcAft>
-                <a:spcPts val="0"/>
-              </a:spcAft>
-              <a:buClr>
-                <a:srgbClr val="000000"/>
-              </a:buClr>
-              <a:buFont typeface="Arial"/>
-              <a:defRPr sz="1400" b="0" i="0" u="none" strike="noStrike" cap="none">
-                <a:solidFill>
-                  <a:srgbClr val="000000"/>
-                </a:solidFill>
-                <a:latin typeface="Arial"/>
-                <a:ea typeface="Arial"/>
-                <a:cs typeface="Arial"/>
-                <a:sym typeface="Arial"/>
-              </a:defRPr>
-            </a:lvl2pPr>
-            <a:lvl3pPr marR="0" lvl="2" algn="l" rtl="0">
-              <a:lnSpc>
-                <a:spcPct val="100000"/>
-              </a:lnSpc>
-              <a:spcBef>
-                <a:spcPts val="0"/>
-              </a:spcBef>
-              <a:spcAft>
-                <a:spcPts val="0"/>
-              </a:spcAft>
-              <a:buClr>
-                <a:srgbClr val="000000"/>
-              </a:buClr>
-              <a:buFont typeface="Arial"/>
-              <a:defRPr sz="1400" b="0" i="0" u="none" strike="noStrike" cap="none">
-                <a:solidFill>
-                  <a:srgbClr val="000000"/>
-                </a:solidFill>
-                <a:latin typeface="Arial"/>
-                <a:ea typeface="Arial"/>
-                <a:cs typeface="Arial"/>
-                <a:sym typeface="Arial"/>
-              </a:defRPr>
-            </a:lvl3pPr>
-            <a:lvl4pPr marR="0" lvl="3" algn="l" rtl="0">
-              <a:lnSpc>
-                <a:spcPct val="100000"/>
-              </a:lnSpc>
-              <a:spcBef>
-                <a:spcPts val="0"/>
-              </a:spcBef>
-              <a:spcAft>
-                <a:spcPts val="0"/>
-              </a:spcAft>
-              <a:buClr>
-                <a:srgbClr val="000000"/>
-              </a:buClr>
-              <a:buFont typeface="Arial"/>
-              <a:defRPr sz="1400" b="0" i="0" u="none" strike="noStrike" cap="none">
-                <a:solidFill>
-                  <a:srgbClr val="000000"/>
-                </a:solidFill>
-                <a:latin typeface="Arial"/>
-                <a:ea typeface="Arial"/>
-                <a:cs typeface="Arial"/>
-                <a:sym typeface="Arial"/>
-              </a:defRPr>
-            </a:lvl4pPr>
-            <a:lvl5pPr marR="0" lvl="4" algn="l" rtl="0">
-              <a:lnSpc>
-                <a:spcPct val="100000"/>
-              </a:lnSpc>
-              <a:spcBef>
-                <a:spcPts val="0"/>
-              </a:spcBef>
-              <a:spcAft>
-                <a:spcPts val="0"/>
-              </a:spcAft>
-              <a:buClr>
-                <a:srgbClr val="000000"/>
-              </a:buClr>
-              <a:buFont typeface="Arial"/>
-              <a:defRPr sz="1400" b="0" i="0" u="none" strike="noStrike" cap="none">
-                <a:solidFill>
-                  <a:srgbClr val="000000"/>
-                </a:solidFill>
-                <a:latin typeface="Arial"/>
-                <a:ea typeface="Arial"/>
-                <a:cs typeface="Arial"/>
-                <a:sym typeface="Arial"/>
-              </a:defRPr>
-            </a:lvl5pPr>
-            <a:lvl6pPr marR="0" lvl="5" algn="l" rtl="0">
-              <a:lnSpc>
-                <a:spcPct val="100000"/>
-              </a:lnSpc>
-              <a:spcBef>
-                <a:spcPts val="0"/>
-              </a:spcBef>
-              <a:spcAft>
-                <a:spcPts val="0"/>
-              </a:spcAft>
-              <a:buClr>
-                <a:srgbClr val="000000"/>
-              </a:buClr>
-              <a:buFont typeface="Arial"/>
-              <a:defRPr sz="1400" b="0" i="0" u="none" strike="noStrike" cap="none">
-                <a:solidFill>
-                  <a:srgbClr val="000000"/>
-                </a:solidFill>
-                <a:latin typeface="Arial"/>
-                <a:ea typeface="Arial"/>
-                <a:cs typeface="Arial"/>
-                <a:sym typeface="Arial"/>
-              </a:defRPr>
-            </a:lvl6pPr>
-            <a:lvl7pPr marR="0" lvl="6" algn="l" rtl="0">
-              <a:lnSpc>
-                <a:spcPct val="100000"/>
-              </a:lnSpc>
-              <a:spcBef>
-                <a:spcPts val="0"/>
-              </a:spcBef>
-              <a:spcAft>
-                <a:spcPts val="0"/>
-              </a:spcAft>
-              <a:buClr>
-                <a:srgbClr val="000000"/>
-              </a:buClr>
-              <a:buFont typeface="Arial"/>
-              <a:defRPr sz="1400" b="0" i="0" u="none" strike="noStrike" cap="none">
-                <a:solidFill>
-                  <a:srgbClr val="000000"/>
-                </a:solidFill>
-                <a:latin typeface="Arial"/>
-                <a:ea typeface="Arial"/>
-                <a:cs typeface="Arial"/>
-                <a:sym typeface="Arial"/>
-              </a:defRPr>
-            </a:lvl7pPr>
-            <a:lvl8pPr marR="0" lvl="7" algn="l" rtl="0">
-              <a:lnSpc>
-                <a:spcPct val="100000"/>
-              </a:lnSpc>
-              <a:spcBef>
-                <a:spcPts val="0"/>
-              </a:spcBef>
-              <a:spcAft>
-                <a:spcPts val="0"/>
-              </a:spcAft>
-              <a:buClr>
-                <a:srgbClr val="000000"/>
-              </a:buClr>
-              <a:buFont typeface="Arial"/>
-              <a:defRPr sz="1400" b="0" i="0" u="none" strike="noStrike" cap="none">
-                <a:solidFill>
-                  <a:srgbClr val="000000"/>
-                </a:solidFill>
-                <a:latin typeface="Arial"/>
-                <a:ea typeface="Arial"/>
-                <a:cs typeface="Arial"/>
-                <a:sym typeface="Arial"/>
-              </a:defRPr>
-            </a:lvl8pPr>
-            <a:lvl9pPr marR="0" lvl="8" algn="l" rtl="0">
-              <a:lnSpc>
-                <a:spcPct val="100000"/>
-              </a:lnSpc>
-              <a:spcBef>
-                <a:spcPts val="0"/>
-              </a:spcBef>
-              <a:spcAft>
-                <a:spcPts val="0"/>
-              </a:spcAft>
-              <a:buClr>
-                <a:srgbClr val="000000"/>
-              </a:buClr>
-              <a:buFont typeface="Arial"/>
-              <a:defRPr sz="1400" b="0" i="0" u="none" strike="noStrike" cap="none">
-                <a:solidFill>
-                  <a:srgbClr val="000000"/>
-                </a:solidFill>
-                <a:latin typeface="Arial"/>
-                <a:ea typeface="Arial"/>
-                <a:cs typeface="Arial"/>
-                <a:sym typeface="Arial"/>
-              </a:defRPr>
-            </a:lvl9pPr>
-          </a:lstStyle>
-          <a:p>
-            <a:pPr>
-              <a:buClrTx/>
-              <a:buFontTx/>
-              <a:buNone/>
-              <a:tabLst>
-                <a:tab pos="0" algn="l"/>
-              </a:tabLst>
-              <a:defRPr/>
-            </a:pPr>
-            <a:fld id="{91AC96F7-F8C6-4046-8A0D-FD31126D620D}" type="slidenum">
-              <a:rPr lang="en-US" kern="1200" spc="-1" smtClean="0">
-                <a:solidFill>
-                  <a:srgbClr val="000000">
-                    <a:tint val="75000"/>
-                  </a:srgbClr>
-                </a:solidFill>
-                <a:latin typeface="Calibri"/>
-                <a:ea typeface="+mn-ea"/>
-                <a:cs typeface="+mn-cs"/>
-              </a:rPr>
-              <a:pPr>
-                <a:buClrTx/>
-                <a:buFontTx/>
-                <a:buNone/>
-                <a:tabLst>
-                  <a:tab pos="0" algn="l"/>
-                </a:tabLst>
-                <a:defRPr/>
-              </a:pPr>
-              <a:t>6</a:t>
-            </a:fld>
-            <a:endParaRPr lang="en-US" kern="1200" spc="-1" dirty="0">
-              <a:solidFill>
-                <a:srgbClr val="000000">
-                  <a:tint val="75000"/>
-                </a:srgbClr>
-              </a:solidFill>
-              <a:latin typeface="Calibri"/>
-              <a:ea typeface="+mn-ea"/>
-              <a:cs typeface="+mn-cs"/>
-            </a:endParaRPr>
-          </a:p>
-        </p:txBody>
-      </p:sp>
-      <p:pic>
-        <p:nvPicPr>
-          <p:cNvPr id="4" name="Picture 3">
-            <a:extLst>
-              <a:ext uri="{FF2B5EF4-FFF2-40B4-BE49-F238E27FC236}">
-                <a16:creationId xmlns:a16="http://schemas.microsoft.com/office/drawing/2014/main" id="{F8FFF61E-1B6E-CA4F-851F-DFB847C67D28}"/>
-              </a:ext>
-            </a:extLst>
-          </p:cNvPr>
-          <p:cNvPicPr>
-            <a:picLocks noChangeAspect="1"/>
-          </p:cNvPicPr>
-          <p:nvPr/>
-        </p:nvPicPr>
-        <p:blipFill>
-          <a:blip r:embed="rId3"/>
-          <a:stretch>
-            <a:fillRect/>
-          </a:stretch>
-        </p:blipFill>
-        <p:spPr>
-          <a:xfrm>
-            <a:off x="1051095" y="1748256"/>
-            <a:ext cx="10089808" cy="1197712"/>
-          </a:xfrm>
-          <a:prstGeom prst="rect">
-            <a:avLst/>
-          </a:prstGeom>
-          <a:solidFill>
-            <a:srgbClr val="FFFFFF">
-              <a:shade val="85000"/>
-            </a:srgbClr>
-          </a:solidFill>
-          <a:ln w="88900" cap="sq">
-            <a:solidFill>
-              <a:srgbClr val="FFFFFF"/>
-            </a:solidFill>
-            <a:miter lim="800000"/>
-          </a:ln>
-          <a:effectLst>
-            <a:outerShdw blurRad="55000" dist="18000" dir="5400000" algn="tl" rotWithShape="0">
-              <a:srgbClr val="000000">
-                <a:alpha val="40000"/>
-              </a:srgbClr>
-            </a:outerShdw>
-          </a:effectLst>
-          <a:scene3d>
-            <a:camera prst="orthographicFront"/>
-            <a:lightRig rig="twoPt" dir="t">
-              <a:rot lat="0" lon="0" rev="7200000"/>
-            </a:lightRig>
-          </a:scene3d>
-          <a:sp3d>
-            <a:bevelT w="25400" h="19050"/>
-            <a:contourClr>
-              <a:srgbClr val="FFFFFF"/>
-            </a:contourClr>
-          </a:sp3d>
-        </p:spPr>
-      </p:pic>
-      <p:pic>
-        <p:nvPicPr>
-          <p:cNvPr id="9" name="Picture 8">
-            <a:extLst>
-              <a:ext uri="{FF2B5EF4-FFF2-40B4-BE49-F238E27FC236}">
-                <a16:creationId xmlns:a16="http://schemas.microsoft.com/office/drawing/2014/main" id="{DB9E8A13-AAF6-0A2B-32F6-5D3847E30502}"/>
-              </a:ext>
-            </a:extLst>
-          </p:cNvPr>
-          <p:cNvPicPr>
-            <a:picLocks noChangeAspect="1"/>
-          </p:cNvPicPr>
-          <p:nvPr/>
-        </p:nvPicPr>
-        <p:blipFill>
-          <a:blip r:embed="rId4"/>
-          <a:stretch>
-            <a:fillRect/>
-          </a:stretch>
-        </p:blipFill>
-        <p:spPr>
-          <a:xfrm>
-            <a:off x="532940" y="3313177"/>
-            <a:ext cx="11126117" cy="1197712"/>
-          </a:xfrm>
-          <a:prstGeom prst="rect">
-            <a:avLst/>
-          </a:prstGeom>
-          <a:solidFill>
-            <a:srgbClr val="FFFFFF">
-              <a:shade val="85000"/>
-            </a:srgbClr>
-          </a:solidFill>
-          <a:ln w="88900" cap="sq">
-            <a:solidFill>
-              <a:srgbClr val="FFFFFF"/>
-            </a:solidFill>
-            <a:miter lim="800000"/>
-          </a:ln>
-          <a:effectLst>
-            <a:outerShdw blurRad="55000" dist="18000" dir="5400000" algn="tl" rotWithShape="0">
-              <a:srgbClr val="000000">
-                <a:alpha val="40000"/>
-              </a:srgbClr>
-            </a:outerShdw>
-          </a:effectLst>
-          <a:scene3d>
-            <a:camera prst="orthographicFront"/>
-            <a:lightRig rig="twoPt" dir="t">
-              <a:rot lat="0" lon="0" rev="7200000"/>
-            </a:lightRig>
-          </a:scene3d>
-          <a:sp3d>
-            <a:bevelT w="25400" h="19050"/>
-            <a:contourClr>
-              <a:srgbClr val="FFFFFF"/>
-            </a:contourClr>
-          </a:sp3d>
-        </p:spPr>
-      </p:pic>
-      <p:pic>
-        <p:nvPicPr>
-          <p:cNvPr id="11" name="Picture 10">
-            <a:extLst>
-              <a:ext uri="{FF2B5EF4-FFF2-40B4-BE49-F238E27FC236}">
-                <a16:creationId xmlns:a16="http://schemas.microsoft.com/office/drawing/2014/main" id="{96DE7B23-0388-5262-45CF-76D20B45E071}"/>
-              </a:ext>
-            </a:extLst>
-          </p:cNvPr>
-          <p:cNvPicPr>
-            <a:picLocks noChangeAspect="1"/>
-          </p:cNvPicPr>
-          <p:nvPr/>
-        </p:nvPicPr>
-        <p:blipFill>
-          <a:blip r:embed="rId5"/>
-          <a:stretch>
-            <a:fillRect/>
-          </a:stretch>
-        </p:blipFill>
-        <p:spPr>
-          <a:xfrm>
-            <a:off x="8713851" y="4823107"/>
-            <a:ext cx="2364313" cy="1197712"/>
-          </a:xfrm>
-          <a:prstGeom prst="rect">
-            <a:avLst/>
-          </a:prstGeom>
-        </p:spPr>
-      </p:pic>
-      <p:pic>
-        <p:nvPicPr>
-          <p:cNvPr id="13" name="Picture 12">
-            <a:extLst>
-              <a:ext uri="{FF2B5EF4-FFF2-40B4-BE49-F238E27FC236}">
-                <a16:creationId xmlns:a16="http://schemas.microsoft.com/office/drawing/2014/main" id="{2391A95F-1C74-4FC8-B90C-E5895E1390F2}"/>
-              </a:ext>
-            </a:extLst>
-          </p:cNvPr>
-          <p:cNvPicPr>
-            <a:picLocks noChangeAspect="1"/>
-          </p:cNvPicPr>
-          <p:nvPr/>
-        </p:nvPicPr>
-        <p:blipFill>
-          <a:blip r:embed="rId6"/>
-          <a:stretch>
-            <a:fillRect/>
-          </a:stretch>
-        </p:blipFill>
-        <p:spPr>
-          <a:xfrm>
-            <a:off x="1528615" y="4878098"/>
-            <a:ext cx="5764978" cy="1087731"/>
-          </a:xfrm>
-          <a:prstGeom prst="rect">
-            <a:avLst/>
-          </a:prstGeom>
-          <a:solidFill>
-            <a:srgbClr val="FFFFFF">
-              <a:shade val="85000"/>
-            </a:srgbClr>
-          </a:solidFill>
-          <a:ln w="88900" cap="sq">
-            <a:solidFill>
-              <a:srgbClr val="FFFFFF"/>
-            </a:solidFill>
-            <a:miter lim="800000"/>
-          </a:ln>
-          <a:effectLst>
-            <a:outerShdw blurRad="55000" dist="18000" dir="5400000" algn="tl" rotWithShape="0">
-              <a:srgbClr val="000000">
-                <a:alpha val="40000"/>
-              </a:srgbClr>
-            </a:outerShdw>
-          </a:effectLst>
-          <a:scene3d>
-            <a:camera prst="orthographicFront"/>
-            <a:lightRig rig="twoPt" dir="t">
-              <a:rot lat="0" lon="0" rev="7200000"/>
-            </a:lightRig>
-          </a:scene3d>
-          <a:sp3d>
-            <a:bevelT w="25400" h="19050"/>
-            <a:contourClr>
-              <a:srgbClr val="FFFFFF"/>
-            </a:contourClr>
-          </a:sp3d>
-        </p:spPr>
-      </p:pic>
-    </p:spTree>
-    <p:extLst>
-      <p:ext uri="{BB962C8B-B14F-4D97-AF65-F5344CB8AC3E}">
-        <p14:creationId xmlns:p14="http://schemas.microsoft.com/office/powerpoint/2010/main" val="553799419"/>
-      </p:ext>
-    </p:extLst>
-  </p:cSld>
-  <p:clrMapOvr>
-    <a:masterClrMapping/>
-  </p:clrMapOvr>
-</p:sld>
-</file>
-
-<file path=ppt/slides/slide7.xml><?xml version="1.0" encoding="utf-8"?>
-<p:sld xmlns:a="http://schemas.openxmlformats.org/drawingml/2006/main" xmlns:r="http://schemas.openxmlformats.org/officeDocument/2006/relationships" xmlns:p="http://schemas.openxmlformats.org/presentationml/2006/main">
-  <p:cSld>
-    <p:spTree>
-      <p:nvGrpSpPr>
-        <p:cNvPr id="1" name="">
-          <a:extLst>
-            <a:ext uri="{FF2B5EF4-FFF2-40B4-BE49-F238E27FC236}">
-              <a16:creationId xmlns:a16="http://schemas.microsoft.com/office/drawing/2014/main" id="{C2CDB116-F927-B998-75BE-1DADC0E0FCB4}"/>
-            </a:ext>
-          </a:extLst>
-        </p:cNvPr>
-        <p:cNvGrpSpPr/>
-        <p:nvPr/>
-      </p:nvGrpSpPr>
-      <p:grpSpPr>
-        <a:xfrm>
-          <a:off x="0" y="0"/>
-          <a:ext cx="0" cy="0"/>
-          <a:chOff x="0" y="0"/>
-          <a:chExt cx="0" cy="0"/>
-        </a:xfrm>
-      </p:grpSpPr>
-      <p:sp>
-        <p:nvSpPr>
-          <p:cNvPr id="8" name="PlaceHolder 1">
-            <a:extLst>
-              <a:ext uri="{FF2B5EF4-FFF2-40B4-BE49-F238E27FC236}">
-                <a16:creationId xmlns:a16="http://schemas.microsoft.com/office/drawing/2014/main" id="{E4417EAB-A864-C013-2BD6-8ADED0C07047}"/>
-              </a:ext>
-            </a:extLst>
-          </p:cNvPr>
-          <p:cNvSpPr txBox="1">
-            <a:spLocks/>
-          </p:cNvSpPr>
-          <p:nvPr/>
-        </p:nvSpPr>
-        <p:spPr>
-          <a:xfrm>
-            <a:off x="3403600" y="362091"/>
-            <a:ext cx="8229768" cy="766000"/>
-          </a:xfrm>
-          <a:prstGeom prst="rect">
-            <a:avLst/>
-          </a:prstGeom>
-          <a:noFill/>
-          <a:ln w="0">
-            <a:noFill/>
-          </a:ln>
-        </p:spPr>
-        <p:txBody>
-          <a:bodyPr lIns="91440" tIns="45720" rIns="91440" bIns="45720" anchor="b">
-            <a:noAutofit/>
-          </a:bodyPr>
-          <a:lstStyle>
-            <a:lvl1pPr algn="l" defTabSz="914400" rtl="0" eaLnBrk="1" latinLnBrk="0" hangingPunct="1">
-              <a:lnSpc>
-                <a:spcPct val="90000"/>
-              </a:lnSpc>
-              <a:spcBef>
-                <a:spcPct val="0"/>
-              </a:spcBef>
-              <a:buNone/>
-              <a:defRPr sz="4400" kern="1200">
-                <a:solidFill>
-                  <a:schemeClr val="tx1"/>
-                </a:solidFill>
-                <a:latin typeface="+mj-lt"/>
-                <a:ea typeface="+mj-ea"/>
-                <a:cs typeface="+mj-cs"/>
-              </a:defRPr>
-            </a:lvl1pPr>
-          </a:lstStyle>
-          <a:p>
-            <a:pPr>
-              <a:buClrTx/>
-              <a:tabLst>
-                <a:tab pos="0" algn="l"/>
-              </a:tabLst>
-              <a:defRPr/>
-            </a:pPr>
-            <a:r>
-              <a:rPr lang="en-US" sz="3600" spc="-1" dirty="0">
-                <a:solidFill>
-                  <a:srgbClr val="009DBB"/>
-                </a:solidFill>
-                <a:latin typeface="Arial"/>
-              </a:rPr>
-              <a:t>Author’s Activity - Unigram Word Cloud</a:t>
-            </a:r>
-            <a:endParaRPr kumimoji="0" lang="en-US" sz="3600" b="0" i="0" u="none" strike="noStrike" kern="1200" cap="none" spc="-1" normalizeH="0" baseline="0" noProof="0" dirty="0">
-              <a:ln>
-                <a:noFill/>
-              </a:ln>
-              <a:solidFill>
-                <a:srgbClr val="000000"/>
-              </a:solidFill>
-              <a:effectLst/>
-              <a:uLnTx/>
-              <a:uFillTx/>
-              <a:latin typeface="Arial"/>
-              <a:ea typeface="+mj-ea"/>
-              <a:cs typeface="+mj-cs"/>
-            </a:endParaRPr>
-          </a:p>
-        </p:txBody>
-      </p:sp>
-      <p:sp>
-        <p:nvSpPr>
-          <p:cNvPr id="2" name="Slide Number Placeholder 3">
-            <a:extLst>
-              <a:ext uri="{FF2B5EF4-FFF2-40B4-BE49-F238E27FC236}">
-                <a16:creationId xmlns:a16="http://schemas.microsoft.com/office/drawing/2014/main" id="{14E62347-3318-7866-4BE3-0BE3BBB3754B}"/>
-              </a:ext>
-            </a:extLst>
-          </p:cNvPr>
-          <p:cNvSpPr txBox="1">
-            <a:spLocks/>
-          </p:cNvSpPr>
-          <p:nvPr/>
-        </p:nvSpPr>
-        <p:spPr>
-          <a:xfrm>
-            <a:off x="11739563" y="6477000"/>
-            <a:ext cx="452437" cy="365125"/>
-          </a:xfrm>
-          <a:prstGeom prst="rect">
-            <a:avLst/>
-          </a:prstGeom>
-        </p:spPr>
-        <p:txBody>
-          <a:bodyPr vert="horz" lIns="91440" tIns="45720" rIns="91440" bIns="45720" rtlCol="0" anchor="ctr"/>
-          <a:lstStyle>
-            <a:defPPr marR="0" lvl="0" algn="l" rtl="0">
-              <a:lnSpc>
-                <a:spcPct val="100000"/>
-              </a:lnSpc>
-              <a:spcBef>
-                <a:spcPts val="0"/>
-              </a:spcBef>
-              <a:spcAft>
-                <a:spcPts val="0"/>
-              </a:spcAft>
-            </a:defPPr>
-            <a:lvl1pPr marR="0" lvl="0" algn="ctr" rtl="0">
-              <a:lnSpc>
-                <a:spcPct val="100000"/>
-              </a:lnSpc>
-              <a:spcBef>
-                <a:spcPts val="0"/>
-              </a:spcBef>
-              <a:spcAft>
-                <a:spcPts val="0"/>
-              </a:spcAft>
-              <a:buClr>
-                <a:srgbClr val="000000"/>
-              </a:buClr>
-              <a:buFont typeface="Arial"/>
-              <a:defRPr sz="1200" b="0" i="0" u="none" strike="noStrike" cap="none">
-                <a:solidFill>
-                  <a:schemeClr val="tx1">
-                    <a:tint val="75000"/>
-                  </a:schemeClr>
-                </a:solidFill>
-                <a:latin typeface="Arial"/>
-                <a:ea typeface="Arial"/>
-                <a:cs typeface="Arial"/>
-                <a:sym typeface="Arial"/>
-              </a:defRPr>
-            </a:lvl1pPr>
-            <a:lvl2pPr marR="0" lvl="1" algn="l" rtl="0">
-              <a:lnSpc>
-                <a:spcPct val="100000"/>
-              </a:lnSpc>
-              <a:spcBef>
-                <a:spcPts val="0"/>
-              </a:spcBef>
-              <a:spcAft>
-                <a:spcPts val="0"/>
-              </a:spcAft>
-              <a:buClr>
-                <a:srgbClr val="000000"/>
-              </a:buClr>
-              <a:buFont typeface="Arial"/>
-              <a:defRPr sz="1400" b="0" i="0" u="none" strike="noStrike" cap="none">
-                <a:solidFill>
-                  <a:srgbClr val="000000"/>
-                </a:solidFill>
-                <a:latin typeface="Arial"/>
-                <a:ea typeface="Arial"/>
-                <a:cs typeface="Arial"/>
-                <a:sym typeface="Arial"/>
-              </a:defRPr>
-            </a:lvl2pPr>
-            <a:lvl3pPr marR="0" lvl="2" algn="l" rtl="0">
-              <a:lnSpc>
-                <a:spcPct val="100000"/>
-              </a:lnSpc>
-              <a:spcBef>
-                <a:spcPts val="0"/>
-              </a:spcBef>
-              <a:spcAft>
-                <a:spcPts val="0"/>
-              </a:spcAft>
-              <a:buClr>
-                <a:srgbClr val="000000"/>
-              </a:buClr>
-              <a:buFont typeface="Arial"/>
-              <a:defRPr sz="1400" b="0" i="0" u="none" strike="noStrike" cap="none">
-                <a:solidFill>
-                  <a:srgbClr val="000000"/>
-                </a:solidFill>
-                <a:latin typeface="Arial"/>
-                <a:ea typeface="Arial"/>
-                <a:cs typeface="Arial"/>
-                <a:sym typeface="Arial"/>
-              </a:defRPr>
-            </a:lvl3pPr>
-            <a:lvl4pPr marR="0" lvl="3" algn="l" rtl="0">
-              <a:lnSpc>
-                <a:spcPct val="100000"/>
-              </a:lnSpc>
-              <a:spcBef>
-                <a:spcPts val="0"/>
-              </a:spcBef>
-              <a:spcAft>
-                <a:spcPts val="0"/>
-              </a:spcAft>
-              <a:buClr>
-                <a:srgbClr val="000000"/>
-              </a:buClr>
-              <a:buFont typeface="Arial"/>
-              <a:defRPr sz="1400" b="0" i="0" u="none" strike="noStrike" cap="none">
-                <a:solidFill>
-                  <a:srgbClr val="000000"/>
-                </a:solidFill>
-                <a:latin typeface="Arial"/>
-                <a:ea typeface="Arial"/>
-                <a:cs typeface="Arial"/>
-                <a:sym typeface="Arial"/>
-              </a:defRPr>
-            </a:lvl4pPr>
-            <a:lvl5pPr marR="0" lvl="4" algn="l" rtl="0">
-              <a:lnSpc>
-                <a:spcPct val="100000"/>
-              </a:lnSpc>
-              <a:spcBef>
-                <a:spcPts val="0"/>
-              </a:spcBef>
-              <a:spcAft>
-                <a:spcPts val="0"/>
-              </a:spcAft>
-              <a:buClr>
-                <a:srgbClr val="000000"/>
-              </a:buClr>
-              <a:buFont typeface="Arial"/>
-              <a:defRPr sz="1400" b="0" i="0" u="none" strike="noStrike" cap="none">
-                <a:solidFill>
-                  <a:srgbClr val="000000"/>
-                </a:solidFill>
-                <a:latin typeface="Arial"/>
-                <a:ea typeface="Arial"/>
-                <a:cs typeface="Arial"/>
-                <a:sym typeface="Arial"/>
-              </a:defRPr>
-            </a:lvl5pPr>
-            <a:lvl6pPr marR="0" lvl="5" algn="l" rtl="0">
-              <a:lnSpc>
-                <a:spcPct val="100000"/>
-              </a:lnSpc>
-              <a:spcBef>
-                <a:spcPts val="0"/>
-              </a:spcBef>
-              <a:spcAft>
-                <a:spcPts val="0"/>
-              </a:spcAft>
-              <a:buClr>
-                <a:srgbClr val="000000"/>
-              </a:buClr>
-              <a:buFont typeface="Arial"/>
-              <a:defRPr sz="1400" b="0" i="0" u="none" strike="noStrike" cap="none">
-                <a:solidFill>
-                  <a:srgbClr val="000000"/>
-                </a:solidFill>
-                <a:latin typeface="Arial"/>
-                <a:ea typeface="Arial"/>
-                <a:cs typeface="Arial"/>
-                <a:sym typeface="Arial"/>
-              </a:defRPr>
-            </a:lvl6pPr>
-            <a:lvl7pPr marR="0" lvl="6" algn="l" rtl="0">
-              <a:lnSpc>
-                <a:spcPct val="100000"/>
-              </a:lnSpc>
-              <a:spcBef>
-                <a:spcPts val="0"/>
-              </a:spcBef>
-              <a:spcAft>
-                <a:spcPts val="0"/>
-              </a:spcAft>
-              <a:buClr>
-                <a:srgbClr val="000000"/>
-              </a:buClr>
-              <a:buFont typeface="Arial"/>
-              <a:defRPr sz="1400" b="0" i="0" u="none" strike="noStrike" cap="none">
-                <a:solidFill>
-                  <a:srgbClr val="000000"/>
-                </a:solidFill>
-                <a:latin typeface="Arial"/>
-                <a:ea typeface="Arial"/>
-                <a:cs typeface="Arial"/>
-                <a:sym typeface="Arial"/>
-              </a:defRPr>
-            </a:lvl7pPr>
-            <a:lvl8pPr marR="0" lvl="7" algn="l" rtl="0">
-              <a:lnSpc>
-                <a:spcPct val="100000"/>
-              </a:lnSpc>
-              <a:spcBef>
-                <a:spcPts val="0"/>
-              </a:spcBef>
-              <a:spcAft>
-                <a:spcPts val="0"/>
-              </a:spcAft>
-              <a:buClr>
-                <a:srgbClr val="000000"/>
-              </a:buClr>
-              <a:buFont typeface="Arial"/>
-              <a:defRPr sz="1400" b="0" i="0" u="none" strike="noStrike" cap="none">
-                <a:solidFill>
-                  <a:srgbClr val="000000"/>
-                </a:solidFill>
-                <a:latin typeface="Arial"/>
-                <a:ea typeface="Arial"/>
-                <a:cs typeface="Arial"/>
-                <a:sym typeface="Arial"/>
-              </a:defRPr>
-            </a:lvl8pPr>
-            <a:lvl9pPr marR="0" lvl="8" algn="l" rtl="0">
-              <a:lnSpc>
-                <a:spcPct val="100000"/>
-              </a:lnSpc>
-              <a:spcBef>
-                <a:spcPts val="0"/>
-              </a:spcBef>
-              <a:spcAft>
-                <a:spcPts val="0"/>
-              </a:spcAft>
-              <a:buClr>
-                <a:srgbClr val="000000"/>
-              </a:buClr>
-              <a:buFont typeface="Arial"/>
-              <a:defRPr sz="1400" b="0" i="0" u="none" strike="noStrike" cap="none">
-                <a:solidFill>
-                  <a:srgbClr val="000000"/>
-                </a:solidFill>
-                <a:latin typeface="Arial"/>
-                <a:ea typeface="Arial"/>
-                <a:cs typeface="Arial"/>
-                <a:sym typeface="Arial"/>
-              </a:defRPr>
-            </a:lvl9pPr>
-          </a:lstStyle>
-          <a:p>
-            <a:pPr>
-              <a:buClrTx/>
-              <a:buFontTx/>
-              <a:buNone/>
-              <a:tabLst>
-                <a:tab pos="0" algn="l"/>
-              </a:tabLst>
-              <a:defRPr/>
-            </a:pPr>
-            <a:fld id="{91AC96F7-F8C6-4046-8A0D-FD31126D620D}" type="slidenum">
-              <a:rPr lang="en-US" kern="1200" spc="-1" smtClean="0">
-                <a:solidFill>
-                  <a:srgbClr val="000000">
-                    <a:tint val="75000"/>
-                  </a:srgbClr>
-                </a:solidFill>
-                <a:latin typeface="Calibri"/>
-                <a:ea typeface="+mn-ea"/>
-                <a:cs typeface="+mn-cs"/>
-              </a:rPr>
-              <a:pPr>
-                <a:buClrTx/>
-                <a:buFontTx/>
-                <a:buNone/>
-                <a:tabLst>
-                  <a:tab pos="0" algn="l"/>
-                </a:tabLst>
-                <a:defRPr/>
-              </a:pPr>
-              <a:t>7</a:t>
-            </a:fld>
-            <a:endParaRPr lang="en-US" kern="1200" spc="-1" dirty="0">
-              <a:solidFill>
-                <a:srgbClr val="000000">
-                  <a:tint val="75000"/>
-                </a:srgbClr>
-              </a:solidFill>
-              <a:latin typeface="Calibri"/>
-              <a:ea typeface="+mn-ea"/>
-              <a:cs typeface="+mn-cs"/>
-            </a:endParaRPr>
-          </a:p>
-        </p:txBody>
-      </p:sp>
-      <p:pic>
-        <p:nvPicPr>
-          <p:cNvPr id="3074" name="Picture 2">
-            <a:extLst>
-              <a:ext uri="{FF2B5EF4-FFF2-40B4-BE49-F238E27FC236}">
-                <a16:creationId xmlns:a16="http://schemas.microsoft.com/office/drawing/2014/main" id="{25CAC6B0-0980-1F9D-6A16-A6408EABA335}"/>
-              </a:ext>
-            </a:extLst>
-          </p:cNvPr>
-          <p:cNvPicPr>
-            <a:picLocks noChangeAspect="1" noChangeArrowheads="1"/>
-          </p:cNvPicPr>
-          <p:nvPr/>
-        </p:nvPicPr>
-        <p:blipFill>
-          <a:blip r:embed="rId3">
-            <a:extLst>
-              <a:ext uri="{28A0092B-C50C-407E-A947-70E740481C1C}">
-                <a14:useLocalDpi xmlns:a14="http://schemas.microsoft.com/office/drawing/2010/main" val="0"/>
-              </a:ext>
-            </a:extLst>
-          </a:blip>
-          <a:srcRect/>
-          <a:stretch>
-            <a:fillRect/>
-          </a:stretch>
-        </p:blipFill>
-        <p:spPr bwMode="auto">
-          <a:xfrm>
-            <a:off x="1600200" y="1313815"/>
-            <a:ext cx="8991600" cy="4819650"/>
-          </a:xfrm>
-          <a:prstGeom prst="rect">
-            <a:avLst/>
-          </a:prstGeom>
-          <a:solidFill>
-            <a:srgbClr val="FFFFFF">
-              <a:shade val="85000"/>
-            </a:srgbClr>
-          </a:solidFill>
-          <a:ln w="88900" cap="sq">
-            <a:solidFill>
-              <a:srgbClr val="FFFFFF"/>
-            </a:solidFill>
-            <a:miter lim="800000"/>
-          </a:ln>
-          <a:effectLst>
-            <a:outerShdw blurRad="55000" dist="18000" dir="5400000" algn="tl" rotWithShape="0">
-              <a:srgbClr val="000000">
-                <a:alpha val="40000"/>
-              </a:srgbClr>
-            </a:outerShdw>
-          </a:effectLst>
-          <a:scene3d>
-            <a:camera prst="orthographicFront"/>
-            <a:lightRig rig="twoPt" dir="t">
-              <a:rot lat="0" lon="0" rev="7200000"/>
-            </a:lightRig>
-          </a:scene3d>
-          <a:sp3d>
-            <a:bevelT w="25400" h="19050"/>
-            <a:contourClr>
-              <a:srgbClr val="FFFFFF"/>
-            </a:contourClr>
-          </a:sp3d>
-        </p:spPr>
-      </p:pic>
-    </p:spTree>
-    <p:extLst>
-      <p:ext uri="{BB962C8B-B14F-4D97-AF65-F5344CB8AC3E}">
-        <p14:creationId xmlns:p14="http://schemas.microsoft.com/office/powerpoint/2010/main" val="1040801497"/>
-      </p:ext>
-    </p:extLst>
-  </p:cSld>
-  <p:clrMapOvr>
-    <a:masterClrMapping/>
-  </p:clrMapOvr>
-</p:sld>
-</file>
-
-<file path=ppt/slides/slide8.xml><?xml version="1.0" encoding="utf-8"?>
-<p:sld xmlns:a="http://schemas.openxmlformats.org/drawingml/2006/main" xmlns:r="http://schemas.openxmlformats.org/officeDocument/2006/relationships" xmlns:p="http://schemas.openxmlformats.org/presentationml/2006/main">
-  <p:cSld>
-    <p:spTree>
-      <p:nvGrpSpPr>
-        <p:cNvPr id="1" name="">
-          <a:extLst>
-            <a:ext uri="{FF2B5EF4-FFF2-40B4-BE49-F238E27FC236}">
-              <a16:creationId xmlns:a16="http://schemas.microsoft.com/office/drawing/2014/main" id="{8B2004F0-F5DE-5C35-8D76-1A7A78F632EC}"/>
-            </a:ext>
-          </a:extLst>
-        </p:cNvPr>
-        <p:cNvGrpSpPr/>
-        <p:nvPr/>
-      </p:nvGrpSpPr>
-      <p:grpSpPr>
-        <a:xfrm>
-          <a:off x="0" y="0"/>
-          <a:ext cx="0" cy="0"/>
-          <a:chOff x="0" y="0"/>
-          <a:chExt cx="0" cy="0"/>
-        </a:xfrm>
-      </p:grpSpPr>
-      <p:sp>
-        <p:nvSpPr>
-          <p:cNvPr id="2" name="Slide Number Placeholder 3">
-            <a:extLst>
-              <a:ext uri="{FF2B5EF4-FFF2-40B4-BE49-F238E27FC236}">
-                <a16:creationId xmlns:a16="http://schemas.microsoft.com/office/drawing/2014/main" id="{FD8EDC79-8E31-9BE8-4EDC-FA7A1D40083F}"/>
-              </a:ext>
-            </a:extLst>
-          </p:cNvPr>
-          <p:cNvSpPr txBox="1">
-            <a:spLocks/>
-          </p:cNvSpPr>
-          <p:nvPr/>
-        </p:nvSpPr>
-        <p:spPr>
-          <a:xfrm>
-            <a:off x="11739563" y="6477000"/>
-            <a:ext cx="452437" cy="365125"/>
-          </a:xfrm>
-          <a:prstGeom prst="rect">
-            <a:avLst/>
-          </a:prstGeom>
-        </p:spPr>
-        <p:txBody>
-          <a:bodyPr vert="horz" lIns="91440" tIns="45720" rIns="91440" bIns="45720" rtlCol="0" anchor="ctr"/>
-          <a:lstStyle>
-            <a:defPPr marR="0" lvl="0" algn="l" rtl="0">
-              <a:lnSpc>
-                <a:spcPct val="100000"/>
-              </a:lnSpc>
-              <a:spcBef>
-                <a:spcPts val="0"/>
-              </a:spcBef>
-              <a:spcAft>
-                <a:spcPts val="0"/>
-              </a:spcAft>
-            </a:defPPr>
-            <a:lvl1pPr marR="0" lvl="0" algn="ctr" rtl="0">
-              <a:lnSpc>
-                <a:spcPct val="100000"/>
-              </a:lnSpc>
-              <a:spcBef>
-                <a:spcPts val="0"/>
-              </a:spcBef>
-              <a:spcAft>
-                <a:spcPts val="0"/>
-              </a:spcAft>
-              <a:buClr>
-                <a:srgbClr val="000000"/>
-              </a:buClr>
-              <a:buFont typeface="Arial"/>
-              <a:defRPr sz="1200" b="0" i="0" u="none" strike="noStrike" cap="none">
-                <a:solidFill>
-                  <a:schemeClr val="tx1">
-                    <a:tint val="75000"/>
-                  </a:schemeClr>
-                </a:solidFill>
-                <a:latin typeface="Arial"/>
-                <a:ea typeface="Arial"/>
-                <a:cs typeface="Arial"/>
-                <a:sym typeface="Arial"/>
-              </a:defRPr>
-            </a:lvl1pPr>
-            <a:lvl2pPr marR="0" lvl="1" algn="l" rtl="0">
-              <a:lnSpc>
-                <a:spcPct val="100000"/>
-              </a:lnSpc>
-              <a:spcBef>
-                <a:spcPts val="0"/>
-              </a:spcBef>
-              <a:spcAft>
-                <a:spcPts val="0"/>
-              </a:spcAft>
-              <a:buClr>
-                <a:srgbClr val="000000"/>
-              </a:buClr>
-              <a:buFont typeface="Arial"/>
-              <a:defRPr sz="1400" b="0" i="0" u="none" strike="noStrike" cap="none">
-                <a:solidFill>
-                  <a:srgbClr val="000000"/>
-                </a:solidFill>
-                <a:latin typeface="Arial"/>
-                <a:ea typeface="Arial"/>
-                <a:cs typeface="Arial"/>
-                <a:sym typeface="Arial"/>
-              </a:defRPr>
-            </a:lvl2pPr>
-            <a:lvl3pPr marR="0" lvl="2" algn="l" rtl="0">
-              <a:lnSpc>
-                <a:spcPct val="100000"/>
-              </a:lnSpc>
-              <a:spcBef>
-                <a:spcPts val="0"/>
-              </a:spcBef>
-              <a:spcAft>
-                <a:spcPts val="0"/>
-              </a:spcAft>
-              <a:buClr>
-                <a:srgbClr val="000000"/>
-              </a:buClr>
-              <a:buFont typeface="Arial"/>
-              <a:defRPr sz="1400" b="0" i="0" u="none" strike="noStrike" cap="none">
-                <a:solidFill>
-                  <a:srgbClr val="000000"/>
-                </a:solidFill>
-                <a:latin typeface="Arial"/>
-                <a:ea typeface="Arial"/>
-                <a:cs typeface="Arial"/>
-                <a:sym typeface="Arial"/>
-              </a:defRPr>
-            </a:lvl3pPr>
-            <a:lvl4pPr marR="0" lvl="3" algn="l" rtl="0">
-              <a:lnSpc>
-                <a:spcPct val="100000"/>
-              </a:lnSpc>
-              <a:spcBef>
-                <a:spcPts val="0"/>
-              </a:spcBef>
-              <a:spcAft>
-                <a:spcPts val="0"/>
-              </a:spcAft>
-              <a:buClr>
-                <a:srgbClr val="000000"/>
-              </a:buClr>
-              <a:buFont typeface="Arial"/>
-              <a:defRPr sz="1400" b="0" i="0" u="none" strike="noStrike" cap="none">
-                <a:solidFill>
-                  <a:srgbClr val="000000"/>
-                </a:solidFill>
-                <a:latin typeface="Arial"/>
-                <a:ea typeface="Arial"/>
-                <a:cs typeface="Arial"/>
-                <a:sym typeface="Arial"/>
-              </a:defRPr>
-            </a:lvl4pPr>
-            <a:lvl5pPr marR="0" lvl="4" algn="l" rtl="0">
-              <a:lnSpc>
-                <a:spcPct val="100000"/>
-              </a:lnSpc>
-              <a:spcBef>
-                <a:spcPts val="0"/>
-              </a:spcBef>
-              <a:spcAft>
-                <a:spcPts val="0"/>
-              </a:spcAft>
-              <a:buClr>
-                <a:srgbClr val="000000"/>
-              </a:buClr>
-              <a:buFont typeface="Arial"/>
-              <a:defRPr sz="1400" b="0" i="0" u="none" strike="noStrike" cap="none">
-                <a:solidFill>
-                  <a:srgbClr val="000000"/>
-                </a:solidFill>
-                <a:latin typeface="Arial"/>
-                <a:ea typeface="Arial"/>
-                <a:cs typeface="Arial"/>
-                <a:sym typeface="Arial"/>
-              </a:defRPr>
-            </a:lvl5pPr>
-            <a:lvl6pPr marR="0" lvl="5" algn="l" rtl="0">
-              <a:lnSpc>
-                <a:spcPct val="100000"/>
-              </a:lnSpc>
-              <a:spcBef>
-                <a:spcPts val="0"/>
-              </a:spcBef>
-              <a:spcAft>
-                <a:spcPts val="0"/>
-              </a:spcAft>
-              <a:buClr>
-                <a:srgbClr val="000000"/>
-              </a:buClr>
-              <a:buFont typeface="Arial"/>
-              <a:defRPr sz="1400" b="0" i="0" u="none" strike="noStrike" cap="none">
-                <a:solidFill>
-                  <a:srgbClr val="000000"/>
-                </a:solidFill>
-                <a:latin typeface="Arial"/>
-                <a:ea typeface="Arial"/>
-                <a:cs typeface="Arial"/>
-                <a:sym typeface="Arial"/>
-              </a:defRPr>
-            </a:lvl6pPr>
-            <a:lvl7pPr marR="0" lvl="6" algn="l" rtl="0">
-              <a:lnSpc>
-                <a:spcPct val="100000"/>
-              </a:lnSpc>
-              <a:spcBef>
-                <a:spcPts val="0"/>
-              </a:spcBef>
-              <a:spcAft>
-                <a:spcPts val="0"/>
-              </a:spcAft>
-              <a:buClr>
-                <a:srgbClr val="000000"/>
-              </a:buClr>
-              <a:buFont typeface="Arial"/>
-              <a:defRPr sz="1400" b="0" i="0" u="none" strike="noStrike" cap="none">
-                <a:solidFill>
-                  <a:srgbClr val="000000"/>
-                </a:solidFill>
-                <a:latin typeface="Arial"/>
-                <a:ea typeface="Arial"/>
-                <a:cs typeface="Arial"/>
-                <a:sym typeface="Arial"/>
-              </a:defRPr>
-            </a:lvl7pPr>
-            <a:lvl8pPr marR="0" lvl="7" algn="l" rtl="0">
-              <a:lnSpc>
-                <a:spcPct val="100000"/>
-              </a:lnSpc>
-              <a:spcBef>
-                <a:spcPts val="0"/>
-              </a:spcBef>
-              <a:spcAft>
-                <a:spcPts val="0"/>
-              </a:spcAft>
-              <a:buClr>
-                <a:srgbClr val="000000"/>
-              </a:buClr>
-              <a:buFont typeface="Arial"/>
-              <a:defRPr sz="1400" b="0" i="0" u="none" strike="noStrike" cap="none">
-                <a:solidFill>
-                  <a:srgbClr val="000000"/>
-                </a:solidFill>
-                <a:latin typeface="Arial"/>
-                <a:ea typeface="Arial"/>
-                <a:cs typeface="Arial"/>
-                <a:sym typeface="Arial"/>
-              </a:defRPr>
-            </a:lvl8pPr>
-            <a:lvl9pPr marR="0" lvl="8" algn="l" rtl="0">
-              <a:lnSpc>
-                <a:spcPct val="100000"/>
-              </a:lnSpc>
-              <a:spcBef>
-                <a:spcPts val="0"/>
-              </a:spcBef>
-              <a:spcAft>
-                <a:spcPts val="0"/>
-              </a:spcAft>
-              <a:buClr>
-                <a:srgbClr val="000000"/>
-              </a:buClr>
-              <a:buFont typeface="Arial"/>
-              <a:defRPr sz="1400" b="0" i="0" u="none" strike="noStrike" cap="none">
-                <a:solidFill>
-                  <a:srgbClr val="000000"/>
-                </a:solidFill>
-                <a:latin typeface="Arial"/>
-                <a:ea typeface="Arial"/>
-                <a:cs typeface="Arial"/>
-                <a:sym typeface="Arial"/>
-              </a:defRPr>
-            </a:lvl9pPr>
-          </a:lstStyle>
-          <a:p>
-            <a:pPr>
-              <a:buClrTx/>
-              <a:buFontTx/>
-              <a:buNone/>
-              <a:tabLst>
-                <a:tab pos="0" algn="l"/>
-              </a:tabLst>
-              <a:defRPr/>
-            </a:pPr>
-            <a:fld id="{91AC96F7-F8C6-4046-8A0D-FD31126D620D}" type="slidenum">
-              <a:rPr lang="en-US" kern="1200" spc="-1" smtClean="0">
-                <a:solidFill>
-                  <a:srgbClr val="000000">
-                    <a:tint val="75000"/>
-                  </a:srgbClr>
-                </a:solidFill>
-                <a:latin typeface="Calibri"/>
-                <a:ea typeface="+mn-ea"/>
-                <a:cs typeface="+mn-cs"/>
-              </a:rPr>
-              <a:pPr>
-                <a:buClrTx/>
-                <a:buFontTx/>
-                <a:buNone/>
-                <a:tabLst>
-                  <a:tab pos="0" algn="l"/>
-                </a:tabLst>
-                <a:defRPr/>
-              </a:pPr>
-              <a:t>8</a:t>
-            </a:fld>
-            <a:endParaRPr lang="en-US" kern="1200" spc="-1" dirty="0">
-              <a:solidFill>
-                <a:srgbClr val="000000">
-                  <a:tint val="75000"/>
-                </a:srgbClr>
-              </a:solidFill>
-              <a:latin typeface="Calibri"/>
-              <a:ea typeface="+mn-ea"/>
-              <a:cs typeface="+mn-cs"/>
-            </a:endParaRPr>
-          </a:p>
-        </p:txBody>
-      </p:sp>
-      <p:sp>
-        <p:nvSpPr>
-          <p:cNvPr id="5" name="PlaceHolder 1">
-            <a:extLst>
-              <a:ext uri="{FF2B5EF4-FFF2-40B4-BE49-F238E27FC236}">
-                <a16:creationId xmlns:a16="http://schemas.microsoft.com/office/drawing/2014/main" id="{66CD0833-AFC3-2C60-F7BE-D6F4207CAA23}"/>
-              </a:ext>
-            </a:extLst>
-          </p:cNvPr>
-          <p:cNvSpPr txBox="1">
-            <a:spLocks/>
-          </p:cNvSpPr>
-          <p:nvPr/>
-        </p:nvSpPr>
-        <p:spPr>
-          <a:xfrm>
-            <a:off x="3556000" y="514491"/>
-            <a:ext cx="8229768" cy="766000"/>
-          </a:xfrm>
-          <a:prstGeom prst="rect">
-            <a:avLst/>
-          </a:prstGeom>
-          <a:noFill/>
-          <a:ln w="0">
-            <a:noFill/>
-          </a:ln>
-        </p:spPr>
-        <p:txBody>
-          <a:bodyPr lIns="91440" tIns="45720" rIns="91440" bIns="45720" anchor="b">
-            <a:noAutofit/>
-          </a:bodyPr>
-          <a:lstStyle>
-            <a:lvl1pPr algn="l" defTabSz="914400" rtl="0" eaLnBrk="1" latinLnBrk="0" hangingPunct="1">
-              <a:lnSpc>
-                <a:spcPct val="90000"/>
-              </a:lnSpc>
-              <a:spcBef>
-                <a:spcPct val="0"/>
-              </a:spcBef>
-              <a:buNone/>
-              <a:defRPr sz="4400" kern="1200">
-                <a:solidFill>
-                  <a:schemeClr val="tx1"/>
-                </a:solidFill>
-                <a:latin typeface="+mj-lt"/>
-                <a:ea typeface="+mj-ea"/>
-                <a:cs typeface="+mj-cs"/>
-              </a:defRPr>
-            </a:lvl1pPr>
-          </a:lstStyle>
-          <a:p>
-            <a:pPr>
-              <a:buClrTx/>
-              <a:tabLst>
-                <a:tab pos="0" algn="l"/>
-              </a:tabLst>
-              <a:defRPr/>
-            </a:pPr>
-            <a:r>
-              <a:rPr lang="en-US" sz="3600" spc="-1" dirty="0">
-                <a:solidFill>
-                  <a:srgbClr val="009DBB"/>
-                </a:solidFill>
-                <a:latin typeface="Arial"/>
-              </a:rPr>
-              <a:t>Author’s Activity - Bigram Word Cloud</a:t>
-            </a:r>
-            <a:endParaRPr kumimoji="0" lang="en-US" sz="3600" b="0" i="0" u="none" strike="noStrike" kern="1200" cap="none" spc="-1" normalizeH="0" baseline="0" noProof="0" dirty="0">
-              <a:ln>
-                <a:noFill/>
-              </a:ln>
-              <a:solidFill>
-                <a:srgbClr val="000000"/>
-              </a:solidFill>
-              <a:effectLst/>
-              <a:uLnTx/>
-              <a:uFillTx/>
-              <a:latin typeface="Arial"/>
-              <a:ea typeface="+mj-ea"/>
-              <a:cs typeface="+mj-cs"/>
-            </a:endParaRPr>
-          </a:p>
-        </p:txBody>
-      </p:sp>
-      <p:pic>
-        <p:nvPicPr>
-          <p:cNvPr id="4098" name="Picture 2">
-            <a:extLst>
-              <a:ext uri="{FF2B5EF4-FFF2-40B4-BE49-F238E27FC236}">
-                <a16:creationId xmlns:a16="http://schemas.microsoft.com/office/drawing/2014/main" id="{0F87D6C1-19D9-3E66-0AF5-D25C484ACB71}"/>
-              </a:ext>
-            </a:extLst>
-          </p:cNvPr>
-          <p:cNvPicPr>
-            <a:picLocks noChangeAspect="1" noChangeArrowheads="1"/>
-          </p:cNvPicPr>
-          <p:nvPr/>
-        </p:nvPicPr>
-        <p:blipFill>
-          <a:blip r:embed="rId3">
-            <a:extLst>
-              <a:ext uri="{28A0092B-C50C-407E-A947-70E740481C1C}">
-                <a14:useLocalDpi xmlns:a14="http://schemas.microsoft.com/office/drawing/2010/main" val="0"/>
-              </a:ext>
-            </a:extLst>
-          </a:blip>
-          <a:srcRect/>
-          <a:stretch>
-            <a:fillRect/>
-          </a:stretch>
-        </p:blipFill>
-        <p:spPr bwMode="auto">
-          <a:xfrm>
-            <a:off x="1600200" y="1468920"/>
-            <a:ext cx="8991600" cy="4819650"/>
-          </a:xfrm>
-          <a:prstGeom prst="rect">
-            <a:avLst/>
-          </a:prstGeom>
-          <a:solidFill>
-            <a:srgbClr val="FFFFFF">
-              <a:shade val="85000"/>
-            </a:srgbClr>
-          </a:solidFill>
-          <a:ln w="88900" cap="sq">
-            <a:solidFill>
-              <a:srgbClr val="FFFFFF"/>
-            </a:solidFill>
-            <a:miter lim="800000"/>
-          </a:ln>
-          <a:effectLst>
-            <a:outerShdw blurRad="55000" dist="18000" dir="5400000" algn="tl" rotWithShape="0">
-              <a:srgbClr val="000000">
-                <a:alpha val="40000"/>
-              </a:srgbClr>
-            </a:outerShdw>
-          </a:effectLst>
-          <a:scene3d>
-            <a:camera prst="orthographicFront"/>
-            <a:lightRig rig="twoPt" dir="t">
-              <a:rot lat="0" lon="0" rev="7200000"/>
-            </a:lightRig>
-          </a:scene3d>
-          <a:sp3d>
-            <a:bevelT w="25400" h="19050"/>
-            <a:contourClr>
-              <a:srgbClr val="FFFFFF"/>
-            </a:contourClr>
-          </a:sp3d>
-        </p:spPr>
-      </p:pic>
-    </p:spTree>
-    <p:extLst>
-      <p:ext uri="{BB962C8B-B14F-4D97-AF65-F5344CB8AC3E}">
-        <p14:creationId xmlns:p14="http://schemas.microsoft.com/office/powerpoint/2010/main" val="3885009783"/>
-      </p:ext>
-    </p:extLst>
-  </p:cSld>
-  <p:clrMapOvr>
-    <a:masterClrMapping/>
-  </p:clrMapOvr>
-</p:sld>
-</file>
-
-<file path=ppt/slides/slide9.xml><?xml version="1.0" encoding="utf-8"?>
 <p:sld xmlns:a="http://schemas.openxmlformats.org/drawingml/2006/main" xmlns:r="http://schemas.openxmlformats.org/officeDocument/2006/relationships" xmlns:p="http://schemas.openxmlformats.org/presentationml/2006/main">
   <p:cSld>
     <p:spTree>
@@ -13249,20 +12803,8 @@
             </a:lvl1pPr>
           </a:lstStyle>
           <a:p>
-            <a:pPr marL="0" marR="0" lvl="0" indent="0" algn="l" defTabSz="914400" rtl="0" eaLnBrk="1" fontAlgn="auto" latinLnBrk="0" hangingPunct="1">
-              <a:lnSpc>
-                <a:spcPct val="90000"/>
-              </a:lnSpc>
-              <a:spcBef>
-                <a:spcPct val="0"/>
-              </a:spcBef>
-              <a:spcAft>
-                <a:spcPts val="0"/>
-              </a:spcAft>
+            <a:pPr lvl="0">
               <a:buClrTx/>
-              <a:buSzTx/>
-              <a:buFontTx/>
-              <a:buNone/>
               <a:tabLst>
                 <a:tab pos="0" algn="l"/>
               </a:tabLst>
@@ -13275,7 +12817,7 @@
                 </a:solidFill>
                 <a:latin typeface="Arial"/>
               </a:rPr>
-              <a:t>Author’s Activity – All Topic Table</a:t>
+              <a:t>Author’s Activity All Topic – Table</a:t>
             </a:r>
             <a:endParaRPr kumimoji="0" lang="en-US" sz="3600" b="0" i="0" u="none" strike="noStrike" kern="1200" cap="none" spc="-1" normalizeH="0" baseline="0" noProof="0" dirty="0">
               <a:ln>
@@ -13580,6 +13122,2946 @@
                 </a:tabLst>
                 <a:defRPr/>
               </a:pPr>
+              <a:t>6</a:t>
+            </a:fld>
+            <a:endParaRPr lang="en-US" kern="1200" spc="-1" dirty="0">
+              <a:solidFill>
+                <a:srgbClr val="000000">
+                  <a:tint val="75000"/>
+                </a:srgbClr>
+              </a:solidFill>
+              <a:latin typeface="Calibri"/>
+              <a:ea typeface="+mn-ea"/>
+              <a:cs typeface="+mn-cs"/>
+            </a:endParaRPr>
+          </a:p>
+        </p:txBody>
+      </p:sp>
+      <p:graphicFrame>
+        <p:nvGraphicFramePr>
+          <p:cNvPr id="4" name="Table 3">
+            <a:extLst>
+              <a:ext uri="{FF2B5EF4-FFF2-40B4-BE49-F238E27FC236}">
+                <a16:creationId xmlns:a16="http://schemas.microsoft.com/office/drawing/2014/main" id="{DC482DC3-7186-81BF-685C-E28E394EF550}"/>
+              </a:ext>
+            </a:extLst>
+          </p:cNvPr>
+          <p:cNvGraphicFramePr>
+            <a:graphicFrameLocks noGrp="1"/>
+          </p:cNvGraphicFramePr>
+          <p:nvPr>
+            <p:extLst>
+              <p:ext uri="{D42A27DB-BD31-4B8C-83A1-F6EECF244321}">
+                <p14:modId xmlns:p14="http://schemas.microsoft.com/office/powerpoint/2010/main" val="671392645"/>
+              </p:ext>
+            </p:extLst>
+          </p:nvPr>
+        </p:nvGraphicFramePr>
+        <p:xfrm>
+          <a:off x="1442085" y="2000377"/>
+          <a:ext cx="9307830" cy="3562204"/>
+        </p:xfrm>
+        <a:graphic>
+          <a:graphicData uri="http://schemas.openxmlformats.org/drawingml/2006/table">
+            <a:tbl>
+              <a:tblPr>
+                <a:effectLst>
+                  <a:outerShdw blurRad="63500" sx="102000" sy="102000" algn="ctr" rotWithShape="0">
+                    <a:prstClr val="black">
+                      <a:alpha val="40000"/>
+                    </a:prstClr>
+                  </a:outerShdw>
+                </a:effectLst>
+                <a:tableStyleId>{3C2FFA5D-87B4-456A-9821-1D502468CF0F}</a:tableStyleId>
+              </a:tblPr>
+              <a:tblGrid>
+                <a:gridCol w="1258614">
+                  <a:extLst>
+                    <a:ext uri="{9D8B030D-6E8A-4147-A177-3AD203B41FA5}">
+                      <a16:colId xmlns:a16="http://schemas.microsoft.com/office/drawing/2014/main" val="3846384309"/>
+                    </a:ext>
+                  </a:extLst>
+                </a:gridCol>
+                <a:gridCol w="807275">
+                  <a:extLst>
+                    <a:ext uri="{9D8B030D-6E8A-4147-A177-3AD203B41FA5}">
+                      <a16:colId xmlns:a16="http://schemas.microsoft.com/office/drawing/2014/main" val="1861347610"/>
+                    </a:ext>
+                  </a:extLst>
+                </a:gridCol>
+                <a:gridCol w="702347">
+                  <a:extLst>
+                    <a:ext uri="{9D8B030D-6E8A-4147-A177-3AD203B41FA5}">
+                      <a16:colId xmlns:a16="http://schemas.microsoft.com/office/drawing/2014/main" val="1733923800"/>
+                    </a:ext>
+                  </a:extLst>
+                </a:gridCol>
+                <a:gridCol w="1020598">
+                  <a:extLst>
+                    <a:ext uri="{9D8B030D-6E8A-4147-A177-3AD203B41FA5}">
+                      <a16:colId xmlns:a16="http://schemas.microsoft.com/office/drawing/2014/main" val="1095989406"/>
+                    </a:ext>
+                  </a:extLst>
+                </a:gridCol>
+                <a:gridCol w="1119366">
+                  <a:extLst>
+                    <a:ext uri="{9D8B030D-6E8A-4147-A177-3AD203B41FA5}">
+                      <a16:colId xmlns:a16="http://schemas.microsoft.com/office/drawing/2014/main" val="714661279"/>
+                    </a:ext>
+                  </a:extLst>
+                </a:gridCol>
+                <a:gridCol w="1360798">
+                  <a:extLst>
+                    <a:ext uri="{9D8B030D-6E8A-4147-A177-3AD203B41FA5}">
+                      <a16:colId xmlns:a16="http://schemas.microsoft.com/office/drawing/2014/main" val="4037356942"/>
+                    </a:ext>
+                  </a:extLst>
+                </a:gridCol>
+                <a:gridCol w="3038832">
+                  <a:extLst>
+                    <a:ext uri="{9D8B030D-6E8A-4147-A177-3AD203B41FA5}">
+                      <a16:colId xmlns:a16="http://schemas.microsoft.com/office/drawing/2014/main" val="3362208206"/>
+                    </a:ext>
+                  </a:extLst>
+                </a:gridCol>
+              </a:tblGrid>
+              <a:tr h="710107">
+                <a:tc>
+                  <a:txBody>
+                    <a:bodyPr/>
+                    <a:lstStyle/>
+                    <a:p>
+                      <a:pPr>
+                        <a:buNone/>
+                      </a:pPr>
+                      <a:r>
+                        <a:rPr lang="en-GB" sz="1700" b="1" kern="1200" dirty="0">
+                          <a:solidFill>
+                            <a:schemeClr val="dk1"/>
+                          </a:solidFill>
+                          <a:effectLst/>
+                        </a:rPr>
+                        <a:t>Authors</a:t>
+                      </a:r>
+                      <a:endParaRPr lang="en-GB" sz="1700" b="1" kern="1200" dirty="0">
+                        <a:solidFill>
+                          <a:schemeClr val="dk1"/>
+                        </a:solidFill>
+                        <a:effectLst/>
+                        <a:latin typeface="+mn-lt"/>
+                        <a:ea typeface="+mn-ea"/>
+                        <a:cs typeface="+mn-cs"/>
+                      </a:endParaRPr>
+                    </a:p>
+                  </a:txBody>
+                  <a:tcPr marL="42383" marR="42383" marT="7064" marB="7064" anchor="ctr"/>
+                </a:tc>
+                <a:tc>
+                  <a:txBody>
+                    <a:bodyPr/>
+                    <a:lstStyle/>
+                    <a:p>
+                      <a:pPr>
+                        <a:buNone/>
+                      </a:pPr>
+                      <a:r>
+                        <a:rPr lang="en-GB" sz="1700" b="1" kern="1200" dirty="0">
+                          <a:solidFill>
+                            <a:schemeClr val="dk1"/>
+                          </a:solidFill>
+                          <a:effectLst/>
+                        </a:rPr>
+                        <a:t>Topic Id</a:t>
+                      </a:r>
+                      <a:endParaRPr lang="en-GB" sz="1700" b="1" kern="1200" dirty="0">
+                        <a:solidFill>
+                          <a:schemeClr val="dk1"/>
+                        </a:solidFill>
+                        <a:effectLst/>
+                        <a:latin typeface="+mn-lt"/>
+                        <a:ea typeface="+mn-ea"/>
+                        <a:cs typeface="+mn-cs"/>
+                      </a:endParaRPr>
+                    </a:p>
+                  </a:txBody>
+                  <a:tcPr marL="42383" marR="42383" marT="7064" marB="7064" anchor="ctr"/>
+                </a:tc>
+                <a:tc>
+                  <a:txBody>
+                    <a:bodyPr/>
+                    <a:lstStyle/>
+                    <a:p>
+                      <a:pPr>
+                        <a:buNone/>
+                      </a:pPr>
+                      <a:r>
+                        <a:rPr lang="en-GB" sz="1700" b="1" kern="1200">
+                          <a:solidFill>
+                            <a:schemeClr val="dk1"/>
+                          </a:solidFill>
+                          <a:effectLst/>
+                        </a:rPr>
+                        <a:t>Topic</a:t>
+                      </a:r>
+                      <a:endParaRPr lang="en-GB" sz="1700" b="1" kern="1200">
+                        <a:solidFill>
+                          <a:schemeClr val="dk1"/>
+                        </a:solidFill>
+                        <a:effectLst/>
+                        <a:latin typeface="+mn-lt"/>
+                        <a:ea typeface="+mn-ea"/>
+                        <a:cs typeface="+mn-cs"/>
+                      </a:endParaRPr>
+                    </a:p>
+                  </a:txBody>
+                  <a:tcPr marL="42383" marR="42383" marT="7064" marB="7064" anchor="ctr"/>
+                </a:tc>
+                <a:tc>
+                  <a:txBody>
+                    <a:bodyPr/>
+                    <a:lstStyle/>
+                    <a:p>
+                      <a:pPr>
+                        <a:buNone/>
+                      </a:pPr>
+                      <a:r>
+                        <a:rPr lang="en-GB" sz="1700" b="1" kern="1200" dirty="0">
+                          <a:solidFill>
+                            <a:schemeClr val="dk1"/>
+                          </a:solidFill>
+                          <a:effectLst/>
+                        </a:rPr>
+                        <a:t>Number of Posts</a:t>
+                      </a:r>
+                      <a:endParaRPr lang="en-GB" sz="1700" b="1" kern="1200" dirty="0">
+                        <a:solidFill>
+                          <a:schemeClr val="dk1"/>
+                        </a:solidFill>
+                        <a:effectLst/>
+                        <a:latin typeface="+mn-lt"/>
+                        <a:ea typeface="+mn-ea"/>
+                        <a:cs typeface="+mn-cs"/>
+                      </a:endParaRPr>
+                    </a:p>
+                  </a:txBody>
+                  <a:tcPr marL="42383" marR="42383" marT="7064" marB="7064" anchor="ctr"/>
+                </a:tc>
+                <a:tc>
+                  <a:txBody>
+                    <a:bodyPr/>
+                    <a:lstStyle/>
+                    <a:p>
+                      <a:pPr>
+                        <a:buNone/>
+                      </a:pPr>
+                      <a:r>
+                        <a:rPr lang="en-GB" sz="1700" b="1" kern="1200" dirty="0">
+                          <a:solidFill>
+                            <a:schemeClr val="dk1"/>
+                          </a:solidFill>
+                          <a:effectLst/>
+                        </a:rPr>
+                        <a:t>Average Posts TF-IDF Score</a:t>
+                      </a:r>
+                      <a:endParaRPr lang="en-GB" sz="1700" b="1" kern="1200" dirty="0">
+                        <a:solidFill>
+                          <a:schemeClr val="dk1"/>
+                        </a:solidFill>
+                        <a:effectLst/>
+                        <a:latin typeface="+mn-lt"/>
+                        <a:ea typeface="+mn-ea"/>
+                        <a:cs typeface="+mn-cs"/>
+                      </a:endParaRPr>
+                    </a:p>
+                  </a:txBody>
+                  <a:tcPr marL="42383" marR="42383" marT="7064" marB="7064" anchor="ctr"/>
+                </a:tc>
+                <a:tc>
+                  <a:txBody>
+                    <a:bodyPr/>
+                    <a:lstStyle/>
+                    <a:p>
+                      <a:pPr>
+                        <a:buNone/>
+                      </a:pPr>
+                      <a:r>
+                        <a:rPr lang="en-GB" sz="1700" b="1" kern="1200" dirty="0">
+                          <a:solidFill>
+                            <a:schemeClr val="dk1"/>
+                          </a:solidFill>
+                          <a:effectLst/>
+                        </a:rPr>
+                        <a:t>Hashtags (Counts)</a:t>
+                      </a:r>
+                      <a:endParaRPr lang="en-GB" sz="1700" b="1" kern="1200" dirty="0">
+                        <a:solidFill>
+                          <a:schemeClr val="dk1"/>
+                        </a:solidFill>
+                        <a:effectLst/>
+                        <a:latin typeface="+mn-lt"/>
+                        <a:ea typeface="+mn-ea"/>
+                        <a:cs typeface="+mn-cs"/>
+                      </a:endParaRPr>
+                    </a:p>
+                  </a:txBody>
+                  <a:tcPr marL="42383" marR="42383" marT="7064" marB="7064" anchor="ctr"/>
+                </a:tc>
+                <a:tc>
+                  <a:txBody>
+                    <a:bodyPr/>
+                    <a:lstStyle/>
+                    <a:p>
+                      <a:pPr>
+                        <a:buNone/>
+                      </a:pPr>
+                      <a:r>
+                        <a:rPr lang="en-GB" sz="1700" b="1" kern="1200" dirty="0">
+                          <a:solidFill>
+                            <a:schemeClr val="dk1"/>
+                          </a:solidFill>
+                          <a:effectLst/>
+                        </a:rPr>
+                        <a:t>Topic (Frequencies)</a:t>
+                      </a:r>
+                      <a:endParaRPr lang="en-GB" sz="1700" b="1" kern="1200" dirty="0">
+                        <a:solidFill>
+                          <a:schemeClr val="dk1"/>
+                        </a:solidFill>
+                        <a:effectLst/>
+                        <a:latin typeface="+mn-lt"/>
+                        <a:ea typeface="+mn-ea"/>
+                        <a:cs typeface="+mn-cs"/>
+                      </a:endParaRPr>
+                    </a:p>
+                  </a:txBody>
+                  <a:tcPr marL="42383" marR="42383" marT="7064" marB="7064" anchor="ctr"/>
+                </a:tc>
+                <a:extLst>
+                  <a:ext uri="{0D108BD9-81ED-4DB2-BD59-A6C34878D82A}">
+                    <a16:rowId xmlns:a16="http://schemas.microsoft.com/office/drawing/2014/main" val="2137955925"/>
+                  </a:ext>
+                </a:extLst>
+              </a:tr>
+              <a:tr h="2770836">
+                <a:tc>
+                  <a:txBody>
+                    <a:bodyPr/>
+                    <a:lstStyle/>
+                    <a:p>
+                      <a:pPr fontAlgn="t">
+                        <a:buNone/>
+                      </a:pPr>
+                      <a:r>
+                        <a:rPr lang="en-GB" sz="1700" kern="1200" dirty="0" err="1">
+                          <a:solidFill>
+                            <a:schemeClr val="dk1"/>
+                          </a:solidFill>
+                          <a:effectLst/>
+                        </a:rPr>
+                        <a:t>KeepDotCa</a:t>
+                      </a:r>
+                      <a:endParaRPr lang="en-GB" sz="1700" kern="1200" dirty="0">
+                        <a:solidFill>
+                          <a:schemeClr val="dk1"/>
+                        </a:solidFill>
+                        <a:effectLst/>
+                        <a:latin typeface="+mn-lt"/>
+                        <a:ea typeface="+mn-ea"/>
+                        <a:cs typeface="+mn-cs"/>
+                      </a:endParaRPr>
+                    </a:p>
+                  </a:txBody>
+                  <a:tcPr marL="42383" marR="42383" marT="7064" marB="7064"/>
+                </a:tc>
+                <a:tc>
+                  <a:txBody>
+                    <a:bodyPr/>
+                    <a:lstStyle/>
+                    <a:p>
+                      <a:pPr fontAlgn="t">
+                        <a:buNone/>
+                      </a:pPr>
+                      <a:r>
+                        <a:rPr lang="en-IL" sz="1700" kern="1200" dirty="0">
+                          <a:solidFill>
+                            <a:schemeClr val="dk1"/>
+                          </a:solidFill>
+                          <a:effectLst/>
+                        </a:rPr>
+                        <a:t>-</a:t>
+                      </a:r>
+                      <a:endParaRPr lang="en-IL" sz="1700" kern="1200" dirty="0">
+                        <a:solidFill>
+                          <a:schemeClr val="dk1"/>
+                        </a:solidFill>
+                        <a:effectLst/>
+                        <a:latin typeface="+mn-lt"/>
+                        <a:ea typeface="+mn-ea"/>
+                        <a:cs typeface="+mn-cs"/>
+                      </a:endParaRPr>
+                    </a:p>
+                  </a:txBody>
+                  <a:tcPr marL="42383" marR="42383" marT="7064" marB="7064"/>
+                </a:tc>
+                <a:tc>
+                  <a:txBody>
+                    <a:bodyPr/>
+                    <a:lstStyle/>
+                    <a:p>
+                      <a:pPr fontAlgn="t">
+                        <a:buNone/>
+                      </a:pPr>
+                      <a:r>
+                        <a:rPr lang="en-GB" sz="1700" kern="1200" dirty="0">
+                          <a:solidFill>
+                            <a:schemeClr val="dk1"/>
+                          </a:solidFill>
+                          <a:effectLst/>
+                        </a:rPr>
+                        <a:t>All Topics</a:t>
+                      </a:r>
+                      <a:endParaRPr lang="en-GB" sz="1700" kern="1200" dirty="0">
+                        <a:solidFill>
+                          <a:schemeClr val="dk1"/>
+                        </a:solidFill>
+                        <a:effectLst/>
+                        <a:latin typeface="+mn-lt"/>
+                        <a:ea typeface="+mn-ea"/>
+                        <a:cs typeface="+mn-cs"/>
+                      </a:endParaRPr>
+                    </a:p>
+                  </a:txBody>
+                  <a:tcPr marL="42383" marR="42383" marT="7064" marB="7064"/>
+                </a:tc>
+                <a:tc>
+                  <a:txBody>
+                    <a:bodyPr/>
+                    <a:lstStyle/>
+                    <a:p>
+                      <a:pPr algn="r" fontAlgn="t">
+                        <a:buNone/>
+                      </a:pPr>
+                      <a:r>
+                        <a:rPr lang="en-IL" sz="1700" kern="1200">
+                          <a:solidFill>
+                            <a:schemeClr val="dk1"/>
+                          </a:solidFill>
+                          <a:effectLst/>
+                        </a:rPr>
+                        <a:t>34</a:t>
+                      </a:r>
+                      <a:endParaRPr lang="en-IL" sz="1700" kern="1200">
+                        <a:solidFill>
+                          <a:schemeClr val="dk1"/>
+                        </a:solidFill>
+                        <a:effectLst/>
+                        <a:latin typeface="+mn-lt"/>
+                        <a:ea typeface="+mn-ea"/>
+                        <a:cs typeface="+mn-cs"/>
+                      </a:endParaRPr>
+                    </a:p>
+                  </a:txBody>
+                  <a:tcPr marL="42383" marR="42383" marT="7064" marB="7064"/>
+                </a:tc>
+                <a:tc>
+                  <a:txBody>
+                    <a:bodyPr/>
+                    <a:lstStyle/>
+                    <a:p>
+                      <a:pPr algn="r" fontAlgn="t">
+                        <a:buNone/>
+                      </a:pPr>
+                      <a:r>
+                        <a:rPr lang="en-IL" sz="1700" kern="1200">
+                          <a:solidFill>
+                            <a:schemeClr val="dk1"/>
+                          </a:solidFill>
+                          <a:effectLst/>
+                        </a:rPr>
+                        <a:t>0.1134</a:t>
+                      </a:r>
+                      <a:endParaRPr lang="en-IL" sz="1700" kern="1200">
+                        <a:solidFill>
+                          <a:schemeClr val="dk1"/>
+                        </a:solidFill>
+                        <a:effectLst/>
+                        <a:latin typeface="+mn-lt"/>
+                        <a:ea typeface="+mn-ea"/>
+                        <a:cs typeface="+mn-cs"/>
+                      </a:endParaRPr>
+                    </a:p>
+                  </a:txBody>
+                  <a:tcPr marL="42383" marR="42383" marT="7064" marB="7064"/>
+                </a:tc>
+                <a:tc>
+                  <a:txBody>
+                    <a:bodyPr/>
+                    <a:lstStyle/>
+                    <a:p>
+                      <a:pPr fontAlgn="t">
+                        <a:buNone/>
+                      </a:pPr>
+                      <a:r>
+                        <a:rPr lang="sv-SE" sz="1700" kern="1200">
+                          <a:solidFill>
+                            <a:schemeClr val="dk1"/>
+                          </a:solidFill>
+                          <a:effectLst/>
+                        </a:rPr>
+                        <a:t>#Egypt(9), #Greyson(7), #cabinet(5), #Harper(5), #attack(4)</a:t>
+                      </a:r>
+                      <a:endParaRPr lang="sv-SE" sz="1700" kern="1200">
+                        <a:solidFill>
+                          <a:schemeClr val="dk1"/>
+                        </a:solidFill>
+                        <a:effectLst/>
+                        <a:latin typeface="+mn-lt"/>
+                        <a:ea typeface="+mn-ea"/>
+                        <a:cs typeface="+mn-cs"/>
+                      </a:endParaRPr>
+                    </a:p>
+                  </a:txBody>
+                  <a:tcPr marL="42383" marR="42383" marT="7064" marB="7064"/>
+                </a:tc>
+                <a:tc>
+                  <a:txBody>
+                    <a:bodyPr/>
+                    <a:lstStyle/>
+                    <a:p>
+                      <a:pPr fontAlgn="t">
+                        <a:buNone/>
+                      </a:pPr>
+                      <a:r>
+                        <a:rPr lang="en-GB" sz="1700" kern="1200" dirty="0">
+                          <a:solidFill>
+                            <a:schemeClr val="dk1"/>
+                          </a:solidFill>
+                          <a:effectLst/>
+                        </a:rPr>
+                        <a:t>Canadians held without charge in Egypt headed home(11), Senior ministers demand world powers reject </a:t>
+                      </a:r>
+                      <a:r>
+                        <a:rPr lang="en-GB" sz="1700" kern="1200" dirty="0" err="1">
+                          <a:solidFill>
+                            <a:schemeClr val="dk1"/>
+                          </a:solidFill>
+                          <a:effectLst/>
+                        </a:rPr>
+                        <a:t>Irans</a:t>
+                      </a:r>
+                      <a:r>
+                        <a:rPr lang="en-GB" sz="1700" kern="1200" dirty="0">
+                          <a:solidFill>
+                            <a:schemeClr val="dk1"/>
+                          </a:solidFill>
+                          <a:effectLst/>
+                        </a:rPr>
+                        <a:t> cosmetic concessions(7), Nairobi attack shakes sense of security for </a:t>
+                      </a:r>
+                      <a:r>
+                        <a:rPr lang="en-GB" sz="1700" kern="1200" dirty="0" err="1">
+                          <a:solidFill>
+                            <a:schemeClr val="dk1"/>
+                          </a:solidFill>
+                          <a:effectLst/>
+                        </a:rPr>
+                        <a:t>Kenyas</a:t>
+                      </a:r>
+                      <a:r>
+                        <a:rPr lang="en-GB" sz="1700" kern="1200" dirty="0">
+                          <a:solidFill>
+                            <a:schemeClr val="dk1"/>
+                          </a:solidFill>
+                          <a:effectLst/>
+                        </a:rPr>
+                        <a:t> Jews(3), Two freed Canadians unable to leave Egypt(3), Master of mistrust(2)</a:t>
+                      </a:r>
+                      <a:endParaRPr lang="en-GB" sz="1700" kern="1200" dirty="0">
+                        <a:solidFill>
+                          <a:schemeClr val="dk1"/>
+                        </a:solidFill>
+                        <a:effectLst/>
+                        <a:latin typeface="+mn-lt"/>
+                        <a:ea typeface="+mn-ea"/>
+                        <a:cs typeface="+mn-cs"/>
+                      </a:endParaRPr>
+                    </a:p>
+                  </a:txBody>
+                  <a:tcPr marL="42383" marR="42383" marT="7064" marB="7064"/>
+                </a:tc>
+                <a:extLst>
+                  <a:ext uri="{0D108BD9-81ED-4DB2-BD59-A6C34878D82A}">
+                    <a16:rowId xmlns:a16="http://schemas.microsoft.com/office/drawing/2014/main" val="1527148667"/>
+                  </a:ext>
+                </a:extLst>
+              </a:tr>
+            </a:tbl>
+          </a:graphicData>
+        </a:graphic>
+      </p:graphicFrame>
+    </p:spTree>
+    <p:extLst>
+      <p:ext uri="{BB962C8B-B14F-4D97-AF65-F5344CB8AC3E}">
+        <p14:creationId xmlns:p14="http://schemas.microsoft.com/office/powerpoint/2010/main" val="2605016121"/>
+      </p:ext>
+    </p:extLst>
+  </p:cSld>
+  <p:clrMapOvr>
+    <a:masterClrMapping/>
+  </p:clrMapOvr>
+</p:sld>
+</file>
+
+<file path=ppt/slides/slide7.xml><?xml version="1.0" encoding="utf-8"?>
+<p:sld xmlns:a="http://schemas.openxmlformats.org/drawingml/2006/main" xmlns:r="http://schemas.openxmlformats.org/officeDocument/2006/relationships" xmlns:p="http://schemas.openxmlformats.org/presentationml/2006/main">
+  <p:cSld>
+    <p:spTree>
+      <p:nvGrpSpPr>
+        <p:cNvPr id="1" name="">
+          <a:extLst>
+            <a:ext uri="{FF2B5EF4-FFF2-40B4-BE49-F238E27FC236}">
+              <a16:creationId xmlns:a16="http://schemas.microsoft.com/office/drawing/2014/main" id="{7CC1A562-0273-3A18-434C-8CF275B94447}"/>
+            </a:ext>
+          </a:extLst>
+        </p:cNvPr>
+        <p:cNvGrpSpPr/>
+        <p:nvPr/>
+      </p:nvGrpSpPr>
+      <p:grpSpPr>
+        <a:xfrm>
+          <a:off x="0" y="0"/>
+          <a:ext cx="0" cy="0"/>
+          <a:chOff x="0" y="0"/>
+          <a:chExt cx="0" cy="0"/>
+        </a:xfrm>
+      </p:grpSpPr>
+      <p:sp>
+        <p:nvSpPr>
+          <p:cNvPr id="8" name="PlaceHolder 1">
+            <a:extLst>
+              <a:ext uri="{FF2B5EF4-FFF2-40B4-BE49-F238E27FC236}">
+                <a16:creationId xmlns:a16="http://schemas.microsoft.com/office/drawing/2014/main" id="{842125B2-836C-0877-09A8-256635CA121F}"/>
+              </a:ext>
+            </a:extLst>
+          </p:cNvPr>
+          <p:cNvSpPr txBox="1">
+            <a:spLocks/>
+          </p:cNvSpPr>
+          <p:nvPr/>
+        </p:nvSpPr>
+        <p:spPr>
+          <a:xfrm>
+            <a:off x="3402957" y="357847"/>
+            <a:ext cx="7233831" cy="766000"/>
+          </a:xfrm>
+          <a:prstGeom prst="rect">
+            <a:avLst/>
+          </a:prstGeom>
+          <a:noFill/>
+          <a:ln w="0">
+            <a:noFill/>
+          </a:ln>
+        </p:spPr>
+        <p:txBody>
+          <a:bodyPr lIns="91440" tIns="45720" rIns="91440" bIns="45720" anchor="b">
+            <a:noAutofit/>
+          </a:bodyPr>
+          <a:lstStyle>
+            <a:lvl1pPr algn="l" defTabSz="914400" rtl="0" eaLnBrk="1" latinLnBrk="0" hangingPunct="1">
+              <a:lnSpc>
+                <a:spcPct val="90000"/>
+              </a:lnSpc>
+              <a:spcBef>
+                <a:spcPct val="0"/>
+              </a:spcBef>
+              <a:buNone/>
+              <a:defRPr sz="4400" kern="1200">
+                <a:solidFill>
+                  <a:schemeClr val="tx1"/>
+                </a:solidFill>
+                <a:latin typeface="+mj-lt"/>
+                <a:ea typeface="+mj-ea"/>
+                <a:cs typeface="+mj-cs"/>
+              </a:defRPr>
+            </a:lvl1pPr>
+          </a:lstStyle>
+          <a:p>
+            <a:pPr marL="0" marR="0" lvl="0" indent="0" algn="l" defTabSz="914400" rtl="0" eaLnBrk="1" fontAlgn="auto" latinLnBrk="0" hangingPunct="1">
+              <a:lnSpc>
+                <a:spcPct val="90000"/>
+              </a:lnSpc>
+              <a:spcBef>
+                <a:spcPct val="0"/>
+              </a:spcBef>
+              <a:spcAft>
+                <a:spcPts val="0"/>
+              </a:spcAft>
+              <a:buClrTx/>
+              <a:buSzTx/>
+              <a:buFontTx/>
+              <a:buNone/>
+              <a:tabLst>
+                <a:tab pos="0" algn="l"/>
+              </a:tabLst>
+              <a:defRPr/>
+            </a:pPr>
+            <a:r>
+              <a:rPr lang="en-US" sz="3600" spc="-1" dirty="0">
+                <a:solidFill>
+                  <a:srgbClr val="009DBB"/>
+                </a:solidFill>
+                <a:latin typeface="Arial"/>
+              </a:rPr>
+              <a:t>Author’s Activity Topic 123 - Table</a:t>
+            </a:r>
+            <a:endParaRPr kumimoji="0" lang="en-US" sz="3600" b="0" i="0" u="none" strike="noStrike" kern="1200" cap="none" spc="-1" normalizeH="0" baseline="0" noProof="0" dirty="0">
+              <a:ln>
+                <a:noFill/>
+              </a:ln>
+              <a:solidFill>
+                <a:srgbClr val="000000"/>
+              </a:solidFill>
+              <a:effectLst/>
+              <a:uLnTx/>
+              <a:uFillTx/>
+              <a:latin typeface="Arial"/>
+              <a:ea typeface="+mj-ea"/>
+              <a:cs typeface="+mj-cs"/>
+            </a:endParaRPr>
+          </a:p>
+        </p:txBody>
+      </p:sp>
+      <p:sp>
+        <p:nvSpPr>
+          <p:cNvPr id="2" name="Slide Number Placeholder 3">
+            <a:extLst>
+              <a:ext uri="{FF2B5EF4-FFF2-40B4-BE49-F238E27FC236}">
+                <a16:creationId xmlns:a16="http://schemas.microsoft.com/office/drawing/2014/main" id="{4911B725-D399-9338-6558-F121F618D820}"/>
+              </a:ext>
+            </a:extLst>
+          </p:cNvPr>
+          <p:cNvSpPr txBox="1">
+            <a:spLocks/>
+          </p:cNvSpPr>
+          <p:nvPr/>
+        </p:nvSpPr>
+        <p:spPr>
+          <a:xfrm>
+            <a:off x="11739563" y="6477000"/>
+            <a:ext cx="452437" cy="365125"/>
+          </a:xfrm>
+          <a:prstGeom prst="rect">
+            <a:avLst/>
+          </a:prstGeom>
+        </p:spPr>
+        <p:txBody>
+          <a:bodyPr vert="horz" lIns="91440" tIns="45720" rIns="91440" bIns="45720" rtlCol="0" anchor="ctr"/>
+          <a:lstStyle>
+            <a:defPPr marR="0" lvl="0" algn="l" rtl="0">
+              <a:lnSpc>
+                <a:spcPct val="100000"/>
+              </a:lnSpc>
+              <a:spcBef>
+                <a:spcPts val="0"/>
+              </a:spcBef>
+              <a:spcAft>
+                <a:spcPts val="0"/>
+              </a:spcAft>
+            </a:defPPr>
+            <a:lvl1pPr marR="0" lvl="0" algn="ctr" rtl="0">
+              <a:lnSpc>
+                <a:spcPct val="100000"/>
+              </a:lnSpc>
+              <a:spcBef>
+                <a:spcPts val="0"/>
+              </a:spcBef>
+              <a:spcAft>
+                <a:spcPts val="0"/>
+              </a:spcAft>
+              <a:buClr>
+                <a:srgbClr val="000000"/>
+              </a:buClr>
+              <a:buFont typeface="Arial"/>
+              <a:defRPr sz="1200" b="0" i="0" u="none" strike="noStrike" cap="none">
+                <a:solidFill>
+                  <a:schemeClr val="tx1">
+                    <a:tint val="75000"/>
+                  </a:schemeClr>
+                </a:solidFill>
+                <a:latin typeface="Arial"/>
+                <a:ea typeface="Arial"/>
+                <a:cs typeface="Arial"/>
+                <a:sym typeface="Arial"/>
+              </a:defRPr>
+            </a:lvl1pPr>
+            <a:lvl2pPr marR="0" lvl="1" algn="l" rtl="0">
+              <a:lnSpc>
+                <a:spcPct val="100000"/>
+              </a:lnSpc>
+              <a:spcBef>
+                <a:spcPts val="0"/>
+              </a:spcBef>
+              <a:spcAft>
+                <a:spcPts val="0"/>
+              </a:spcAft>
+              <a:buClr>
+                <a:srgbClr val="000000"/>
+              </a:buClr>
+              <a:buFont typeface="Arial"/>
+              <a:defRPr sz="1400" b="0" i="0" u="none" strike="noStrike" cap="none">
+                <a:solidFill>
+                  <a:srgbClr val="000000"/>
+                </a:solidFill>
+                <a:latin typeface="Arial"/>
+                <a:ea typeface="Arial"/>
+                <a:cs typeface="Arial"/>
+                <a:sym typeface="Arial"/>
+              </a:defRPr>
+            </a:lvl2pPr>
+            <a:lvl3pPr marR="0" lvl="2" algn="l" rtl="0">
+              <a:lnSpc>
+                <a:spcPct val="100000"/>
+              </a:lnSpc>
+              <a:spcBef>
+                <a:spcPts val="0"/>
+              </a:spcBef>
+              <a:spcAft>
+                <a:spcPts val="0"/>
+              </a:spcAft>
+              <a:buClr>
+                <a:srgbClr val="000000"/>
+              </a:buClr>
+              <a:buFont typeface="Arial"/>
+              <a:defRPr sz="1400" b="0" i="0" u="none" strike="noStrike" cap="none">
+                <a:solidFill>
+                  <a:srgbClr val="000000"/>
+                </a:solidFill>
+                <a:latin typeface="Arial"/>
+                <a:ea typeface="Arial"/>
+                <a:cs typeface="Arial"/>
+                <a:sym typeface="Arial"/>
+              </a:defRPr>
+            </a:lvl3pPr>
+            <a:lvl4pPr marR="0" lvl="3" algn="l" rtl="0">
+              <a:lnSpc>
+                <a:spcPct val="100000"/>
+              </a:lnSpc>
+              <a:spcBef>
+                <a:spcPts val="0"/>
+              </a:spcBef>
+              <a:spcAft>
+                <a:spcPts val="0"/>
+              </a:spcAft>
+              <a:buClr>
+                <a:srgbClr val="000000"/>
+              </a:buClr>
+              <a:buFont typeface="Arial"/>
+              <a:defRPr sz="1400" b="0" i="0" u="none" strike="noStrike" cap="none">
+                <a:solidFill>
+                  <a:srgbClr val="000000"/>
+                </a:solidFill>
+                <a:latin typeface="Arial"/>
+                <a:ea typeface="Arial"/>
+                <a:cs typeface="Arial"/>
+                <a:sym typeface="Arial"/>
+              </a:defRPr>
+            </a:lvl4pPr>
+            <a:lvl5pPr marR="0" lvl="4" algn="l" rtl="0">
+              <a:lnSpc>
+                <a:spcPct val="100000"/>
+              </a:lnSpc>
+              <a:spcBef>
+                <a:spcPts val="0"/>
+              </a:spcBef>
+              <a:spcAft>
+                <a:spcPts val="0"/>
+              </a:spcAft>
+              <a:buClr>
+                <a:srgbClr val="000000"/>
+              </a:buClr>
+              <a:buFont typeface="Arial"/>
+              <a:defRPr sz="1400" b="0" i="0" u="none" strike="noStrike" cap="none">
+                <a:solidFill>
+                  <a:srgbClr val="000000"/>
+                </a:solidFill>
+                <a:latin typeface="Arial"/>
+                <a:ea typeface="Arial"/>
+                <a:cs typeface="Arial"/>
+                <a:sym typeface="Arial"/>
+              </a:defRPr>
+            </a:lvl5pPr>
+            <a:lvl6pPr marR="0" lvl="5" algn="l" rtl="0">
+              <a:lnSpc>
+                <a:spcPct val="100000"/>
+              </a:lnSpc>
+              <a:spcBef>
+                <a:spcPts val="0"/>
+              </a:spcBef>
+              <a:spcAft>
+                <a:spcPts val="0"/>
+              </a:spcAft>
+              <a:buClr>
+                <a:srgbClr val="000000"/>
+              </a:buClr>
+              <a:buFont typeface="Arial"/>
+              <a:defRPr sz="1400" b="0" i="0" u="none" strike="noStrike" cap="none">
+                <a:solidFill>
+                  <a:srgbClr val="000000"/>
+                </a:solidFill>
+                <a:latin typeface="Arial"/>
+                <a:ea typeface="Arial"/>
+                <a:cs typeface="Arial"/>
+                <a:sym typeface="Arial"/>
+              </a:defRPr>
+            </a:lvl6pPr>
+            <a:lvl7pPr marR="0" lvl="6" algn="l" rtl="0">
+              <a:lnSpc>
+                <a:spcPct val="100000"/>
+              </a:lnSpc>
+              <a:spcBef>
+                <a:spcPts val="0"/>
+              </a:spcBef>
+              <a:spcAft>
+                <a:spcPts val="0"/>
+              </a:spcAft>
+              <a:buClr>
+                <a:srgbClr val="000000"/>
+              </a:buClr>
+              <a:buFont typeface="Arial"/>
+              <a:defRPr sz="1400" b="0" i="0" u="none" strike="noStrike" cap="none">
+                <a:solidFill>
+                  <a:srgbClr val="000000"/>
+                </a:solidFill>
+                <a:latin typeface="Arial"/>
+                <a:ea typeface="Arial"/>
+                <a:cs typeface="Arial"/>
+                <a:sym typeface="Arial"/>
+              </a:defRPr>
+            </a:lvl7pPr>
+            <a:lvl8pPr marR="0" lvl="7" algn="l" rtl="0">
+              <a:lnSpc>
+                <a:spcPct val="100000"/>
+              </a:lnSpc>
+              <a:spcBef>
+                <a:spcPts val="0"/>
+              </a:spcBef>
+              <a:spcAft>
+                <a:spcPts val="0"/>
+              </a:spcAft>
+              <a:buClr>
+                <a:srgbClr val="000000"/>
+              </a:buClr>
+              <a:buFont typeface="Arial"/>
+              <a:defRPr sz="1400" b="0" i="0" u="none" strike="noStrike" cap="none">
+                <a:solidFill>
+                  <a:srgbClr val="000000"/>
+                </a:solidFill>
+                <a:latin typeface="Arial"/>
+                <a:ea typeface="Arial"/>
+                <a:cs typeface="Arial"/>
+                <a:sym typeface="Arial"/>
+              </a:defRPr>
+            </a:lvl8pPr>
+            <a:lvl9pPr marR="0" lvl="8" algn="l" rtl="0">
+              <a:lnSpc>
+                <a:spcPct val="100000"/>
+              </a:lnSpc>
+              <a:spcBef>
+                <a:spcPts val="0"/>
+              </a:spcBef>
+              <a:spcAft>
+                <a:spcPts val="0"/>
+              </a:spcAft>
+              <a:buClr>
+                <a:srgbClr val="000000"/>
+              </a:buClr>
+              <a:buFont typeface="Arial"/>
+              <a:defRPr sz="1400" b="0" i="0" u="none" strike="noStrike" cap="none">
+                <a:solidFill>
+                  <a:srgbClr val="000000"/>
+                </a:solidFill>
+                <a:latin typeface="Arial"/>
+                <a:ea typeface="Arial"/>
+                <a:cs typeface="Arial"/>
+                <a:sym typeface="Arial"/>
+              </a:defRPr>
+            </a:lvl9pPr>
+          </a:lstStyle>
+          <a:p>
+            <a:pPr>
+              <a:buClrTx/>
+              <a:buFontTx/>
+              <a:buNone/>
+              <a:tabLst>
+                <a:tab pos="0" algn="l"/>
+              </a:tabLst>
+              <a:defRPr/>
+            </a:pPr>
+            <a:fld id="{91AC96F7-F8C6-4046-8A0D-FD31126D620D}" type="slidenum">
+              <a:rPr lang="en-US" kern="1200" spc="-1" smtClean="0">
+                <a:solidFill>
+                  <a:srgbClr val="000000">
+                    <a:tint val="75000"/>
+                  </a:srgbClr>
+                </a:solidFill>
+                <a:latin typeface="Calibri"/>
+                <a:ea typeface="+mn-ea"/>
+                <a:cs typeface="+mn-cs"/>
+              </a:rPr>
+              <a:pPr>
+                <a:buClrTx/>
+                <a:buFontTx/>
+                <a:buNone/>
+                <a:tabLst>
+                  <a:tab pos="0" algn="l"/>
+                </a:tabLst>
+                <a:defRPr/>
+              </a:pPr>
+              <a:t>7</a:t>
+            </a:fld>
+            <a:endParaRPr lang="en-US" kern="1200" spc="-1" dirty="0">
+              <a:solidFill>
+                <a:srgbClr val="000000">
+                  <a:tint val="75000"/>
+                </a:srgbClr>
+              </a:solidFill>
+              <a:latin typeface="Calibri"/>
+              <a:ea typeface="+mn-ea"/>
+              <a:cs typeface="+mn-cs"/>
+            </a:endParaRPr>
+          </a:p>
+        </p:txBody>
+      </p:sp>
+      <p:graphicFrame>
+        <p:nvGraphicFramePr>
+          <p:cNvPr id="5" name="Table 4">
+            <a:extLst>
+              <a:ext uri="{FF2B5EF4-FFF2-40B4-BE49-F238E27FC236}">
+                <a16:creationId xmlns:a16="http://schemas.microsoft.com/office/drawing/2014/main" id="{2F242B97-C964-7545-6F18-5C4C1AA65F43}"/>
+              </a:ext>
+            </a:extLst>
+          </p:cNvPr>
+          <p:cNvGraphicFramePr>
+            <a:graphicFrameLocks noGrp="1"/>
+          </p:cNvGraphicFramePr>
+          <p:nvPr>
+            <p:extLst>
+              <p:ext uri="{D42A27DB-BD31-4B8C-83A1-F6EECF244321}">
+                <p14:modId xmlns:p14="http://schemas.microsoft.com/office/powerpoint/2010/main" val="1061705974"/>
+              </p:ext>
+            </p:extLst>
+          </p:nvPr>
+        </p:nvGraphicFramePr>
+        <p:xfrm>
+          <a:off x="1667207" y="2366634"/>
+          <a:ext cx="8857586" cy="2873868"/>
+        </p:xfrm>
+        <a:graphic>
+          <a:graphicData uri="http://schemas.openxmlformats.org/drawingml/2006/table">
+            <a:tbl>
+              <a:tblPr>
+                <a:effectLst>
+                  <a:outerShdw blurRad="63500" sx="102000" sy="102000" algn="ctr" rotWithShape="0">
+                    <a:prstClr val="black">
+                      <a:alpha val="40000"/>
+                    </a:prstClr>
+                  </a:outerShdw>
+                </a:effectLst>
+                <a:tableStyleId>{3C2FFA5D-87B4-456A-9821-1D502468CF0F}</a:tableStyleId>
+              </a:tblPr>
+              <a:tblGrid>
+                <a:gridCol w="1220343">
+                  <a:extLst>
+                    <a:ext uri="{9D8B030D-6E8A-4147-A177-3AD203B41FA5}">
+                      <a16:colId xmlns:a16="http://schemas.microsoft.com/office/drawing/2014/main" val="1414142671"/>
+                    </a:ext>
+                  </a:extLst>
+                </a:gridCol>
+                <a:gridCol w="693825">
+                  <a:extLst>
+                    <a:ext uri="{9D8B030D-6E8A-4147-A177-3AD203B41FA5}">
+                      <a16:colId xmlns:a16="http://schemas.microsoft.com/office/drawing/2014/main" val="1306443194"/>
+                    </a:ext>
+                  </a:extLst>
+                </a:gridCol>
+                <a:gridCol w="1533718">
+                  <a:extLst>
+                    <a:ext uri="{9D8B030D-6E8A-4147-A177-3AD203B41FA5}">
+                      <a16:colId xmlns:a16="http://schemas.microsoft.com/office/drawing/2014/main" val="2679240646"/>
+                    </a:ext>
+                  </a:extLst>
+                </a:gridCol>
+                <a:gridCol w="919947">
+                  <a:extLst>
+                    <a:ext uri="{9D8B030D-6E8A-4147-A177-3AD203B41FA5}">
+                      <a16:colId xmlns:a16="http://schemas.microsoft.com/office/drawing/2014/main" val="4251921230"/>
+                    </a:ext>
+                  </a:extLst>
+                </a:gridCol>
+                <a:gridCol w="1575388">
+                  <a:extLst>
+                    <a:ext uri="{9D8B030D-6E8A-4147-A177-3AD203B41FA5}">
+                      <a16:colId xmlns:a16="http://schemas.microsoft.com/office/drawing/2014/main" val="1861789558"/>
+                    </a:ext>
+                  </a:extLst>
+                </a:gridCol>
+                <a:gridCol w="1429176">
+                  <a:extLst>
+                    <a:ext uri="{9D8B030D-6E8A-4147-A177-3AD203B41FA5}">
+                      <a16:colId xmlns:a16="http://schemas.microsoft.com/office/drawing/2014/main" val="1122872063"/>
+                    </a:ext>
+                  </a:extLst>
+                </a:gridCol>
+                <a:gridCol w="1485189">
+                  <a:extLst>
+                    <a:ext uri="{9D8B030D-6E8A-4147-A177-3AD203B41FA5}">
+                      <a16:colId xmlns:a16="http://schemas.microsoft.com/office/drawing/2014/main" val="3157598025"/>
+                    </a:ext>
+                  </a:extLst>
+                </a:gridCol>
+              </a:tblGrid>
+              <a:tr h="1052803">
+                <a:tc>
+                  <a:txBody>
+                    <a:bodyPr/>
+                    <a:lstStyle/>
+                    <a:p>
+                      <a:pPr>
+                        <a:buNone/>
+                      </a:pPr>
+                      <a:r>
+                        <a:rPr lang="en-GB" sz="1700" b="1" dirty="0">
+                          <a:effectLst/>
+                        </a:rPr>
+                        <a:t>Authors</a:t>
+                      </a:r>
+                    </a:p>
+                  </a:txBody>
+                  <a:tcPr marL="84406" marR="84406" marT="14068" marB="14068" anchor="ctr"/>
+                </a:tc>
+                <a:tc>
+                  <a:txBody>
+                    <a:bodyPr/>
+                    <a:lstStyle/>
+                    <a:p>
+                      <a:pPr>
+                        <a:buNone/>
+                      </a:pPr>
+                      <a:r>
+                        <a:rPr lang="en-GB" sz="1700" b="1" dirty="0">
+                          <a:effectLst/>
+                        </a:rPr>
+                        <a:t>Topic Id</a:t>
+                      </a:r>
+                    </a:p>
+                  </a:txBody>
+                  <a:tcPr marL="84406" marR="84406" marT="14068" marB="14068" anchor="ctr"/>
+                </a:tc>
+                <a:tc>
+                  <a:txBody>
+                    <a:bodyPr/>
+                    <a:lstStyle/>
+                    <a:p>
+                      <a:pPr>
+                        <a:buNone/>
+                      </a:pPr>
+                      <a:r>
+                        <a:rPr lang="en-GB" sz="1700" b="1">
+                          <a:effectLst/>
+                        </a:rPr>
+                        <a:t>Topic</a:t>
+                      </a:r>
+                    </a:p>
+                  </a:txBody>
+                  <a:tcPr marL="84406" marR="84406" marT="14068" marB="14068" anchor="ctr"/>
+                </a:tc>
+                <a:tc>
+                  <a:txBody>
+                    <a:bodyPr/>
+                    <a:lstStyle/>
+                    <a:p>
+                      <a:pPr>
+                        <a:buNone/>
+                      </a:pPr>
+                      <a:r>
+                        <a:rPr lang="en-GB" sz="1700" b="1" dirty="0">
+                          <a:effectLst/>
+                        </a:rPr>
+                        <a:t>Number of Posts</a:t>
+                      </a:r>
+                    </a:p>
+                  </a:txBody>
+                  <a:tcPr marL="84406" marR="84406" marT="14068" marB="14068" anchor="ctr"/>
+                </a:tc>
+                <a:tc>
+                  <a:txBody>
+                    <a:bodyPr/>
+                    <a:lstStyle/>
+                    <a:p>
+                      <a:pPr>
+                        <a:buNone/>
+                      </a:pPr>
+                      <a:r>
+                        <a:rPr lang="en-GB" sz="1700" b="1" dirty="0">
+                          <a:effectLst/>
+                        </a:rPr>
+                        <a:t>Average Posts TF-IDF Score</a:t>
+                      </a:r>
+                    </a:p>
+                  </a:txBody>
+                  <a:tcPr marL="84406" marR="84406" marT="14068" marB="14068" anchor="ctr"/>
+                </a:tc>
+                <a:tc>
+                  <a:txBody>
+                    <a:bodyPr/>
+                    <a:lstStyle/>
+                    <a:p>
+                      <a:pPr>
+                        <a:buNone/>
+                      </a:pPr>
+                      <a:r>
+                        <a:rPr lang="en-GB" sz="1700" b="1" dirty="0">
+                          <a:effectLst/>
+                        </a:rPr>
+                        <a:t>Hashtags (Counts)</a:t>
+                      </a:r>
+                    </a:p>
+                  </a:txBody>
+                  <a:tcPr marL="84406" marR="84406" marT="14068" marB="14068" anchor="ctr"/>
+                </a:tc>
+                <a:tc>
+                  <a:txBody>
+                    <a:bodyPr/>
+                    <a:lstStyle/>
+                    <a:p>
+                      <a:pPr>
+                        <a:buNone/>
+                      </a:pPr>
+                      <a:r>
+                        <a:rPr lang="en-GB" sz="1700" b="1" dirty="0">
+                          <a:effectLst/>
+                        </a:rPr>
+                        <a:t>Topic (Frequencies)</a:t>
+                      </a:r>
+                    </a:p>
+                  </a:txBody>
+                  <a:tcPr marL="84406" marR="84406" marT="14068" marB="14068" anchor="ctr"/>
+                </a:tc>
+                <a:extLst>
+                  <a:ext uri="{0D108BD9-81ED-4DB2-BD59-A6C34878D82A}">
+                    <a16:rowId xmlns:a16="http://schemas.microsoft.com/office/drawing/2014/main" val="1080997263"/>
+                  </a:ext>
+                </a:extLst>
+              </a:tr>
+              <a:tr h="1821065">
+                <a:tc>
+                  <a:txBody>
+                    <a:bodyPr/>
+                    <a:lstStyle/>
+                    <a:p>
+                      <a:pPr fontAlgn="t">
+                        <a:buNone/>
+                      </a:pPr>
+                      <a:r>
+                        <a:rPr lang="en-GB" sz="1700" dirty="0" err="1">
+                          <a:effectLst/>
+                        </a:rPr>
+                        <a:t>KeepDotCa</a:t>
+                      </a:r>
+                      <a:endParaRPr lang="en-GB" sz="1700" dirty="0">
+                        <a:effectLst/>
+                      </a:endParaRPr>
+                    </a:p>
+                  </a:txBody>
+                  <a:tcPr marL="84406" marR="84406" marT="14068" marB="14068"/>
+                </a:tc>
+                <a:tc>
+                  <a:txBody>
+                    <a:bodyPr/>
+                    <a:lstStyle/>
+                    <a:p>
+                      <a:pPr fontAlgn="t">
+                        <a:buNone/>
+                      </a:pPr>
+                      <a:r>
+                        <a:rPr lang="en-IL" sz="1700">
+                          <a:effectLst/>
+                        </a:rPr>
+                        <a:t>123</a:t>
+                      </a:r>
+                    </a:p>
+                  </a:txBody>
+                  <a:tcPr marL="84406" marR="84406" marT="14068" marB="14068"/>
+                </a:tc>
+                <a:tc>
+                  <a:txBody>
+                    <a:bodyPr/>
+                    <a:lstStyle/>
+                    <a:p>
+                      <a:pPr fontAlgn="t">
+                        <a:buNone/>
+                      </a:pPr>
+                      <a:r>
+                        <a:rPr lang="en-GB" sz="1700" dirty="0">
+                          <a:effectLst/>
+                        </a:rPr>
+                        <a:t>Canadians held without charge in Egypt headed home</a:t>
+                      </a:r>
+                    </a:p>
+                  </a:txBody>
+                  <a:tcPr marL="84406" marR="84406" marT="14068" marB="14068"/>
+                </a:tc>
+                <a:tc>
+                  <a:txBody>
+                    <a:bodyPr/>
+                    <a:lstStyle/>
+                    <a:p>
+                      <a:pPr algn="r" fontAlgn="t">
+                        <a:buNone/>
+                      </a:pPr>
+                      <a:r>
+                        <a:rPr lang="en-IL" sz="1700">
+                          <a:effectLst/>
+                        </a:rPr>
+                        <a:t>11</a:t>
+                      </a:r>
+                    </a:p>
+                  </a:txBody>
+                  <a:tcPr marL="84406" marR="84406" marT="14068" marB="14068"/>
+                </a:tc>
+                <a:tc>
+                  <a:txBody>
+                    <a:bodyPr/>
+                    <a:lstStyle/>
+                    <a:p>
+                      <a:pPr algn="r" fontAlgn="t">
+                        <a:buNone/>
+                      </a:pPr>
+                      <a:r>
+                        <a:rPr lang="en-IL" sz="1700" dirty="0">
+                          <a:effectLst/>
+                        </a:rPr>
+                        <a:t>0.206</a:t>
+                      </a:r>
+                    </a:p>
+                  </a:txBody>
+                  <a:tcPr marL="84406" marR="84406" marT="14068" marB="14068"/>
+                </a:tc>
+                <a:tc>
+                  <a:txBody>
+                    <a:bodyPr/>
+                    <a:lstStyle/>
+                    <a:p>
+                      <a:pPr fontAlgn="t">
+                        <a:buNone/>
+                      </a:pPr>
+                      <a:r>
+                        <a:rPr lang="en-GB" sz="1700">
+                          <a:effectLst/>
+                        </a:rPr>
+                        <a:t>#Egypt(8), #Greyson(6), #Canadians(3), #free(2), #charge(1)</a:t>
+                      </a:r>
+                    </a:p>
+                  </a:txBody>
+                  <a:tcPr marL="84406" marR="84406" marT="14068" marB="14068"/>
+                </a:tc>
+                <a:tc>
+                  <a:txBody>
+                    <a:bodyPr/>
+                    <a:lstStyle/>
+                    <a:p>
+                      <a:pPr fontAlgn="t">
+                        <a:buNone/>
+                      </a:pPr>
+                      <a:r>
+                        <a:rPr lang="en-GB" sz="1700" dirty="0">
+                          <a:effectLst/>
+                        </a:rPr>
+                        <a:t>Canadians held without charge in Egypt headed home(11)</a:t>
+                      </a:r>
+                    </a:p>
+                  </a:txBody>
+                  <a:tcPr marL="84406" marR="84406" marT="14068" marB="14068"/>
+                </a:tc>
+                <a:extLst>
+                  <a:ext uri="{0D108BD9-81ED-4DB2-BD59-A6C34878D82A}">
+                    <a16:rowId xmlns:a16="http://schemas.microsoft.com/office/drawing/2014/main" val="3242725736"/>
+                  </a:ext>
+                </a:extLst>
+              </a:tr>
+            </a:tbl>
+          </a:graphicData>
+        </a:graphic>
+      </p:graphicFrame>
+    </p:spTree>
+    <p:extLst>
+      <p:ext uri="{BB962C8B-B14F-4D97-AF65-F5344CB8AC3E}">
+        <p14:creationId xmlns:p14="http://schemas.microsoft.com/office/powerpoint/2010/main" val="553799419"/>
+      </p:ext>
+    </p:extLst>
+  </p:cSld>
+  <p:clrMapOvr>
+    <a:masterClrMapping/>
+  </p:clrMapOvr>
+</p:sld>
+</file>
+
+<file path=ppt/slides/slide8.xml><?xml version="1.0" encoding="utf-8"?>
+<p:sld xmlns:a="http://schemas.openxmlformats.org/drawingml/2006/main" xmlns:r="http://schemas.openxmlformats.org/officeDocument/2006/relationships" xmlns:p="http://schemas.openxmlformats.org/presentationml/2006/main">
+  <p:cSld>
+    <p:spTree>
+      <p:nvGrpSpPr>
+        <p:cNvPr id="1" name="">
+          <a:extLst>
+            <a:ext uri="{FF2B5EF4-FFF2-40B4-BE49-F238E27FC236}">
+              <a16:creationId xmlns:a16="http://schemas.microsoft.com/office/drawing/2014/main" id="{CA6E0A7C-A86E-1411-51CD-A2667F7D7297}"/>
+            </a:ext>
+          </a:extLst>
+        </p:cNvPr>
+        <p:cNvGrpSpPr/>
+        <p:nvPr/>
+      </p:nvGrpSpPr>
+      <p:grpSpPr>
+        <a:xfrm>
+          <a:off x="0" y="0"/>
+          <a:ext cx="0" cy="0"/>
+          <a:chOff x="0" y="0"/>
+          <a:chExt cx="0" cy="0"/>
+        </a:xfrm>
+      </p:grpSpPr>
+      <p:sp>
+        <p:nvSpPr>
+          <p:cNvPr id="2" name="Slide Number Placeholder 3">
+            <a:extLst>
+              <a:ext uri="{FF2B5EF4-FFF2-40B4-BE49-F238E27FC236}">
+                <a16:creationId xmlns:a16="http://schemas.microsoft.com/office/drawing/2014/main" id="{05133115-E608-157A-F87A-E98E312EB8F4}"/>
+              </a:ext>
+            </a:extLst>
+          </p:cNvPr>
+          <p:cNvSpPr txBox="1">
+            <a:spLocks/>
+          </p:cNvSpPr>
+          <p:nvPr/>
+        </p:nvSpPr>
+        <p:spPr>
+          <a:xfrm>
+            <a:off x="11739563" y="6477000"/>
+            <a:ext cx="452437" cy="365125"/>
+          </a:xfrm>
+          <a:prstGeom prst="rect">
+            <a:avLst/>
+          </a:prstGeom>
+        </p:spPr>
+        <p:txBody>
+          <a:bodyPr vert="horz" lIns="91440" tIns="45720" rIns="91440" bIns="45720" rtlCol="0" anchor="ctr"/>
+          <a:lstStyle>
+            <a:defPPr marR="0" lvl="0" algn="l" rtl="0">
+              <a:lnSpc>
+                <a:spcPct val="100000"/>
+              </a:lnSpc>
+              <a:spcBef>
+                <a:spcPts val="0"/>
+              </a:spcBef>
+              <a:spcAft>
+                <a:spcPts val="0"/>
+              </a:spcAft>
+            </a:defPPr>
+            <a:lvl1pPr marR="0" lvl="0" algn="ctr" rtl="0">
+              <a:lnSpc>
+                <a:spcPct val="100000"/>
+              </a:lnSpc>
+              <a:spcBef>
+                <a:spcPts val="0"/>
+              </a:spcBef>
+              <a:spcAft>
+                <a:spcPts val="0"/>
+              </a:spcAft>
+              <a:buClr>
+                <a:srgbClr val="000000"/>
+              </a:buClr>
+              <a:buFont typeface="Arial"/>
+              <a:defRPr sz="1200" b="0" i="0" u="none" strike="noStrike" cap="none">
+                <a:solidFill>
+                  <a:schemeClr val="tx1">
+                    <a:tint val="75000"/>
+                  </a:schemeClr>
+                </a:solidFill>
+                <a:latin typeface="Arial"/>
+                <a:ea typeface="Arial"/>
+                <a:cs typeface="Arial"/>
+                <a:sym typeface="Arial"/>
+              </a:defRPr>
+            </a:lvl1pPr>
+            <a:lvl2pPr marR="0" lvl="1" algn="l" rtl="0">
+              <a:lnSpc>
+                <a:spcPct val="100000"/>
+              </a:lnSpc>
+              <a:spcBef>
+                <a:spcPts val="0"/>
+              </a:spcBef>
+              <a:spcAft>
+                <a:spcPts val="0"/>
+              </a:spcAft>
+              <a:buClr>
+                <a:srgbClr val="000000"/>
+              </a:buClr>
+              <a:buFont typeface="Arial"/>
+              <a:defRPr sz="1400" b="0" i="0" u="none" strike="noStrike" cap="none">
+                <a:solidFill>
+                  <a:srgbClr val="000000"/>
+                </a:solidFill>
+                <a:latin typeface="Arial"/>
+                <a:ea typeface="Arial"/>
+                <a:cs typeface="Arial"/>
+                <a:sym typeface="Arial"/>
+              </a:defRPr>
+            </a:lvl2pPr>
+            <a:lvl3pPr marR="0" lvl="2" algn="l" rtl="0">
+              <a:lnSpc>
+                <a:spcPct val="100000"/>
+              </a:lnSpc>
+              <a:spcBef>
+                <a:spcPts val="0"/>
+              </a:spcBef>
+              <a:spcAft>
+                <a:spcPts val="0"/>
+              </a:spcAft>
+              <a:buClr>
+                <a:srgbClr val="000000"/>
+              </a:buClr>
+              <a:buFont typeface="Arial"/>
+              <a:defRPr sz="1400" b="0" i="0" u="none" strike="noStrike" cap="none">
+                <a:solidFill>
+                  <a:srgbClr val="000000"/>
+                </a:solidFill>
+                <a:latin typeface="Arial"/>
+                <a:ea typeface="Arial"/>
+                <a:cs typeface="Arial"/>
+                <a:sym typeface="Arial"/>
+              </a:defRPr>
+            </a:lvl3pPr>
+            <a:lvl4pPr marR="0" lvl="3" algn="l" rtl="0">
+              <a:lnSpc>
+                <a:spcPct val="100000"/>
+              </a:lnSpc>
+              <a:spcBef>
+                <a:spcPts val="0"/>
+              </a:spcBef>
+              <a:spcAft>
+                <a:spcPts val="0"/>
+              </a:spcAft>
+              <a:buClr>
+                <a:srgbClr val="000000"/>
+              </a:buClr>
+              <a:buFont typeface="Arial"/>
+              <a:defRPr sz="1400" b="0" i="0" u="none" strike="noStrike" cap="none">
+                <a:solidFill>
+                  <a:srgbClr val="000000"/>
+                </a:solidFill>
+                <a:latin typeface="Arial"/>
+                <a:ea typeface="Arial"/>
+                <a:cs typeface="Arial"/>
+                <a:sym typeface="Arial"/>
+              </a:defRPr>
+            </a:lvl4pPr>
+            <a:lvl5pPr marR="0" lvl="4" algn="l" rtl="0">
+              <a:lnSpc>
+                <a:spcPct val="100000"/>
+              </a:lnSpc>
+              <a:spcBef>
+                <a:spcPts val="0"/>
+              </a:spcBef>
+              <a:spcAft>
+                <a:spcPts val="0"/>
+              </a:spcAft>
+              <a:buClr>
+                <a:srgbClr val="000000"/>
+              </a:buClr>
+              <a:buFont typeface="Arial"/>
+              <a:defRPr sz="1400" b="0" i="0" u="none" strike="noStrike" cap="none">
+                <a:solidFill>
+                  <a:srgbClr val="000000"/>
+                </a:solidFill>
+                <a:latin typeface="Arial"/>
+                <a:ea typeface="Arial"/>
+                <a:cs typeface="Arial"/>
+                <a:sym typeface="Arial"/>
+              </a:defRPr>
+            </a:lvl5pPr>
+            <a:lvl6pPr marR="0" lvl="5" algn="l" rtl="0">
+              <a:lnSpc>
+                <a:spcPct val="100000"/>
+              </a:lnSpc>
+              <a:spcBef>
+                <a:spcPts val="0"/>
+              </a:spcBef>
+              <a:spcAft>
+                <a:spcPts val="0"/>
+              </a:spcAft>
+              <a:buClr>
+                <a:srgbClr val="000000"/>
+              </a:buClr>
+              <a:buFont typeface="Arial"/>
+              <a:defRPr sz="1400" b="0" i="0" u="none" strike="noStrike" cap="none">
+                <a:solidFill>
+                  <a:srgbClr val="000000"/>
+                </a:solidFill>
+                <a:latin typeface="Arial"/>
+                <a:ea typeface="Arial"/>
+                <a:cs typeface="Arial"/>
+                <a:sym typeface="Arial"/>
+              </a:defRPr>
+            </a:lvl6pPr>
+            <a:lvl7pPr marR="0" lvl="6" algn="l" rtl="0">
+              <a:lnSpc>
+                <a:spcPct val="100000"/>
+              </a:lnSpc>
+              <a:spcBef>
+                <a:spcPts val="0"/>
+              </a:spcBef>
+              <a:spcAft>
+                <a:spcPts val="0"/>
+              </a:spcAft>
+              <a:buClr>
+                <a:srgbClr val="000000"/>
+              </a:buClr>
+              <a:buFont typeface="Arial"/>
+              <a:defRPr sz="1400" b="0" i="0" u="none" strike="noStrike" cap="none">
+                <a:solidFill>
+                  <a:srgbClr val="000000"/>
+                </a:solidFill>
+                <a:latin typeface="Arial"/>
+                <a:ea typeface="Arial"/>
+                <a:cs typeface="Arial"/>
+                <a:sym typeface="Arial"/>
+              </a:defRPr>
+            </a:lvl7pPr>
+            <a:lvl8pPr marR="0" lvl="7" algn="l" rtl="0">
+              <a:lnSpc>
+                <a:spcPct val="100000"/>
+              </a:lnSpc>
+              <a:spcBef>
+                <a:spcPts val="0"/>
+              </a:spcBef>
+              <a:spcAft>
+                <a:spcPts val="0"/>
+              </a:spcAft>
+              <a:buClr>
+                <a:srgbClr val="000000"/>
+              </a:buClr>
+              <a:buFont typeface="Arial"/>
+              <a:defRPr sz="1400" b="0" i="0" u="none" strike="noStrike" cap="none">
+                <a:solidFill>
+                  <a:srgbClr val="000000"/>
+                </a:solidFill>
+                <a:latin typeface="Arial"/>
+                <a:ea typeface="Arial"/>
+                <a:cs typeface="Arial"/>
+                <a:sym typeface="Arial"/>
+              </a:defRPr>
+            </a:lvl8pPr>
+            <a:lvl9pPr marR="0" lvl="8" algn="l" rtl="0">
+              <a:lnSpc>
+                <a:spcPct val="100000"/>
+              </a:lnSpc>
+              <a:spcBef>
+                <a:spcPts val="0"/>
+              </a:spcBef>
+              <a:spcAft>
+                <a:spcPts val="0"/>
+              </a:spcAft>
+              <a:buClr>
+                <a:srgbClr val="000000"/>
+              </a:buClr>
+              <a:buFont typeface="Arial"/>
+              <a:defRPr sz="1400" b="0" i="0" u="none" strike="noStrike" cap="none">
+                <a:solidFill>
+                  <a:srgbClr val="000000"/>
+                </a:solidFill>
+                <a:latin typeface="Arial"/>
+                <a:ea typeface="Arial"/>
+                <a:cs typeface="Arial"/>
+                <a:sym typeface="Arial"/>
+              </a:defRPr>
+            </a:lvl9pPr>
+          </a:lstStyle>
+          <a:p>
+            <a:pPr>
+              <a:buClrTx/>
+              <a:buFontTx/>
+              <a:buNone/>
+              <a:tabLst>
+                <a:tab pos="0" algn="l"/>
+              </a:tabLst>
+              <a:defRPr/>
+            </a:pPr>
+            <a:fld id="{91AC96F7-F8C6-4046-8A0D-FD31126D620D}" type="slidenum">
+              <a:rPr lang="en-US" kern="1200" spc="-1" smtClean="0">
+                <a:solidFill>
+                  <a:srgbClr val="000000">
+                    <a:tint val="75000"/>
+                  </a:srgbClr>
+                </a:solidFill>
+                <a:latin typeface="Calibri"/>
+                <a:ea typeface="+mn-ea"/>
+                <a:cs typeface="+mn-cs"/>
+              </a:rPr>
+              <a:pPr>
+                <a:buClrTx/>
+                <a:buFontTx/>
+                <a:buNone/>
+                <a:tabLst>
+                  <a:tab pos="0" algn="l"/>
+                </a:tabLst>
+                <a:defRPr/>
+              </a:pPr>
+              <a:t>8</a:t>
+            </a:fld>
+            <a:endParaRPr lang="en-US" kern="1200" spc="-1" dirty="0">
+              <a:solidFill>
+                <a:srgbClr val="000000">
+                  <a:tint val="75000"/>
+                </a:srgbClr>
+              </a:solidFill>
+              <a:latin typeface="Calibri"/>
+              <a:ea typeface="+mn-ea"/>
+              <a:cs typeface="+mn-cs"/>
+            </a:endParaRPr>
+          </a:p>
+        </p:txBody>
+      </p:sp>
+      <p:sp>
+        <p:nvSpPr>
+          <p:cNvPr id="5" name="PlaceHolder 1">
+            <a:extLst>
+              <a:ext uri="{FF2B5EF4-FFF2-40B4-BE49-F238E27FC236}">
+                <a16:creationId xmlns:a16="http://schemas.microsoft.com/office/drawing/2014/main" id="{48D5DF51-D71D-5281-1448-7E12FF58AF36}"/>
+              </a:ext>
+            </a:extLst>
+          </p:cNvPr>
+          <p:cNvSpPr txBox="1">
+            <a:spLocks/>
+          </p:cNvSpPr>
+          <p:nvPr/>
+        </p:nvSpPr>
+        <p:spPr>
+          <a:xfrm>
+            <a:off x="3556000" y="514491"/>
+            <a:ext cx="8229768" cy="766000"/>
+          </a:xfrm>
+          <a:prstGeom prst="rect">
+            <a:avLst/>
+          </a:prstGeom>
+          <a:noFill/>
+          <a:ln w="0">
+            <a:noFill/>
+          </a:ln>
+        </p:spPr>
+        <p:txBody>
+          <a:bodyPr lIns="91440" tIns="45720" rIns="91440" bIns="45720" anchor="b">
+            <a:noAutofit/>
+          </a:bodyPr>
+          <a:lstStyle>
+            <a:lvl1pPr algn="l" defTabSz="914400" rtl="0" eaLnBrk="1" latinLnBrk="0" hangingPunct="1">
+              <a:lnSpc>
+                <a:spcPct val="90000"/>
+              </a:lnSpc>
+              <a:spcBef>
+                <a:spcPct val="0"/>
+              </a:spcBef>
+              <a:buNone/>
+              <a:defRPr sz="4400" kern="1200">
+                <a:solidFill>
+                  <a:schemeClr val="tx1"/>
+                </a:solidFill>
+                <a:latin typeface="+mj-lt"/>
+                <a:ea typeface="+mj-ea"/>
+                <a:cs typeface="+mj-cs"/>
+              </a:defRPr>
+            </a:lvl1pPr>
+          </a:lstStyle>
+          <a:p>
+            <a:pPr>
+              <a:buClrTx/>
+              <a:tabLst>
+                <a:tab pos="0" algn="l"/>
+              </a:tabLst>
+              <a:defRPr/>
+            </a:pPr>
+            <a:r>
+              <a:rPr lang="en-US" sz="3600" spc="-1" dirty="0">
+                <a:solidFill>
+                  <a:srgbClr val="009DBB"/>
+                </a:solidFill>
+                <a:latin typeface="Arial"/>
+              </a:rPr>
+              <a:t>Author’s Activity – Top Posts</a:t>
+            </a:r>
+            <a:endParaRPr kumimoji="0" lang="en-US" sz="3600" b="0" i="0" u="none" strike="noStrike" kern="1200" cap="none" spc="-1" normalizeH="0" baseline="0" noProof="0" dirty="0">
+              <a:ln>
+                <a:noFill/>
+              </a:ln>
+              <a:solidFill>
+                <a:srgbClr val="000000"/>
+              </a:solidFill>
+              <a:effectLst/>
+              <a:uLnTx/>
+              <a:uFillTx/>
+              <a:latin typeface="Arial"/>
+              <a:ea typeface="+mj-ea"/>
+              <a:cs typeface="+mj-cs"/>
+            </a:endParaRPr>
+          </a:p>
+        </p:txBody>
+      </p:sp>
+      <p:graphicFrame>
+        <p:nvGraphicFramePr>
+          <p:cNvPr id="3" name="Table 2">
+            <a:extLst>
+              <a:ext uri="{FF2B5EF4-FFF2-40B4-BE49-F238E27FC236}">
+                <a16:creationId xmlns:a16="http://schemas.microsoft.com/office/drawing/2014/main" id="{9A9B3FA1-4F68-555F-35C1-1BCB45D3C189}"/>
+              </a:ext>
+            </a:extLst>
+          </p:cNvPr>
+          <p:cNvGraphicFramePr>
+            <a:graphicFrameLocks noGrp="1"/>
+          </p:cNvGraphicFramePr>
+          <p:nvPr>
+            <p:extLst>
+              <p:ext uri="{D42A27DB-BD31-4B8C-83A1-F6EECF244321}">
+                <p14:modId xmlns:p14="http://schemas.microsoft.com/office/powerpoint/2010/main" val="3004075397"/>
+              </p:ext>
+            </p:extLst>
+          </p:nvPr>
+        </p:nvGraphicFramePr>
+        <p:xfrm>
+          <a:off x="1033938" y="1491284"/>
+          <a:ext cx="10124124" cy="4696154"/>
+        </p:xfrm>
+        <a:graphic>
+          <a:graphicData uri="http://schemas.openxmlformats.org/drawingml/2006/table">
+            <a:tbl>
+              <a:tblPr>
+                <a:tableStyleId>{3C2FFA5D-87B4-456A-9821-1D502468CF0F}</a:tableStyleId>
+              </a:tblPr>
+              <a:tblGrid>
+                <a:gridCol w="581502">
+                  <a:extLst>
+                    <a:ext uri="{9D8B030D-6E8A-4147-A177-3AD203B41FA5}">
+                      <a16:colId xmlns:a16="http://schemas.microsoft.com/office/drawing/2014/main" val="2269369541"/>
+                    </a:ext>
+                  </a:extLst>
+                </a:gridCol>
+                <a:gridCol w="2194560">
+                  <a:extLst>
+                    <a:ext uri="{9D8B030D-6E8A-4147-A177-3AD203B41FA5}">
+                      <a16:colId xmlns:a16="http://schemas.microsoft.com/office/drawing/2014/main" val="3615811544"/>
+                    </a:ext>
+                  </a:extLst>
+                </a:gridCol>
+                <a:gridCol w="899160">
+                  <a:extLst>
+                    <a:ext uri="{9D8B030D-6E8A-4147-A177-3AD203B41FA5}">
+                      <a16:colId xmlns:a16="http://schemas.microsoft.com/office/drawing/2014/main" val="1549680739"/>
+                    </a:ext>
+                  </a:extLst>
+                </a:gridCol>
+                <a:gridCol w="6448902">
+                  <a:extLst>
+                    <a:ext uri="{9D8B030D-6E8A-4147-A177-3AD203B41FA5}">
+                      <a16:colId xmlns:a16="http://schemas.microsoft.com/office/drawing/2014/main" val="3743989402"/>
+                    </a:ext>
+                  </a:extLst>
+                </a:gridCol>
+              </a:tblGrid>
+              <a:tr h="293549">
+                <a:tc>
+                  <a:txBody>
+                    <a:bodyPr/>
+                    <a:lstStyle/>
+                    <a:p>
+                      <a:pPr>
+                        <a:buNone/>
+                      </a:pPr>
+                      <a:r>
+                        <a:rPr lang="en-GB" sz="1700" b="1" kern="1200" dirty="0">
+                          <a:solidFill>
+                            <a:schemeClr val="dk1"/>
+                          </a:solidFill>
+                          <a:effectLst/>
+                        </a:rPr>
+                        <a:t>topic</a:t>
+                      </a:r>
+                      <a:endParaRPr lang="en-GB" sz="1700" b="1" kern="1200" dirty="0">
+                        <a:solidFill>
+                          <a:schemeClr val="dk1"/>
+                        </a:solidFill>
+                        <a:effectLst/>
+                        <a:latin typeface="+mn-lt"/>
+                        <a:ea typeface="+mn-ea"/>
+                        <a:cs typeface="+mn-cs"/>
+                      </a:endParaRPr>
+                    </a:p>
+                  </a:txBody>
+                  <a:tcPr marL="35667" marR="35667" marT="5944" marB="5944" anchor="ctr"/>
+                </a:tc>
+                <a:tc>
+                  <a:txBody>
+                    <a:bodyPr/>
+                    <a:lstStyle/>
+                    <a:p>
+                      <a:pPr>
+                        <a:buNone/>
+                      </a:pPr>
+                      <a:r>
+                        <a:rPr lang="en-GB" sz="1700" b="1" kern="1200">
+                          <a:solidFill>
+                            <a:schemeClr val="dk1"/>
+                          </a:solidFill>
+                          <a:effectLst/>
+                        </a:rPr>
+                        <a:t>title</a:t>
+                      </a:r>
+                      <a:endParaRPr lang="en-GB" sz="1700" b="1" kern="1200">
+                        <a:solidFill>
+                          <a:schemeClr val="dk1"/>
+                        </a:solidFill>
+                        <a:effectLst/>
+                        <a:latin typeface="+mn-lt"/>
+                        <a:ea typeface="+mn-ea"/>
+                        <a:cs typeface="+mn-cs"/>
+                      </a:endParaRPr>
+                    </a:p>
+                  </a:txBody>
+                  <a:tcPr marL="35667" marR="35667" marT="5944" marB="5944" anchor="ctr"/>
+                </a:tc>
+                <a:tc>
+                  <a:txBody>
+                    <a:bodyPr/>
+                    <a:lstStyle/>
+                    <a:p>
+                      <a:pPr>
+                        <a:buNone/>
+                      </a:pPr>
+                      <a:r>
+                        <a:rPr lang="en-GB" sz="1700" b="1" kern="1200">
+                          <a:solidFill>
+                            <a:schemeClr val="dk1"/>
+                          </a:solidFill>
+                          <a:effectLst/>
+                        </a:rPr>
+                        <a:t>date</a:t>
+                      </a:r>
+                      <a:endParaRPr lang="en-GB" sz="1700" b="1" kern="1200">
+                        <a:solidFill>
+                          <a:schemeClr val="dk1"/>
+                        </a:solidFill>
+                        <a:effectLst/>
+                        <a:latin typeface="+mn-lt"/>
+                        <a:ea typeface="+mn-ea"/>
+                        <a:cs typeface="+mn-cs"/>
+                      </a:endParaRPr>
+                    </a:p>
+                  </a:txBody>
+                  <a:tcPr marL="35667" marR="35667" marT="5944" marB="5944" anchor="ctr"/>
+                </a:tc>
+                <a:tc>
+                  <a:txBody>
+                    <a:bodyPr/>
+                    <a:lstStyle/>
+                    <a:p>
+                      <a:pPr>
+                        <a:buNone/>
+                      </a:pPr>
+                      <a:r>
+                        <a:rPr lang="en-GB" sz="1700" b="1" kern="1200" dirty="0">
+                          <a:solidFill>
+                            <a:schemeClr val="dk1"/>
+                          </a:solidFill>
+                          <a:effectLst/>
+                        </a:rPr>
+                        <a:t>content</a:t>
+                      </a:r>
+                      <a:endParaRPr lang="en-GB" sz="1700" b="1" kern="1200" dirty="0">
+                        <a:solidFill>
+                          <a:schemeClr val="dk1"/>
+                        </a:solidFill>
+                        <a:effectLst/>
+                        <a:latin typeface="+mn-lt"/>
+                        <a:ea typeface="+mn-ea"/>
+                        <a:cs typeface="+mn-cs"/>
+                      </a:endParaRPr>
+                    </a:p>
+                  </a:txBody>
+                  <a:tcPr marL="35667" marR="35667" marT="5944" marB="5944" anchor="ctr"/>
+                </a:tc>
+                <a:extLst>
+                  <a:ext uri="{0D108BD9-81ED-4DB2-BD59-A6C34878D82A}">
+                    <a16:rowId xmlns:a16="http://schemas.microsoft.com/office/drawing/2014/main" val="1185830756"/>
+                  </a:ext>
+                </a:extLst>
+              </a:tr>
+              <a:tr h="880521">
+                <a:tc>
+                  <a:txBody>
+                    <a:bodyPr/>
+                    <a:lstStyle/>
+                    <a:p>
+                      <a:pPr algn="r" fontAlgn="t">
+                        <a:buNone/>
+                      </a:pPr>
+                      <a:r>
+                        <a:rPr lang="en-IL" sz="1700" kern="1200" dirty="0">
+                          <a:solidFill>
+                            <a:schemeClr val="dk1"/>
+                          </a:solidFill>
+                          <a:effectLst/>
+                        </a:rPr>
+                        <a:t>123</a:t>
+                      </a:r>
+                      <a:endParaRPr lang="en-IL" sz="1700" kern="1200" dirty="0">
+                        <a:solidFill>
+                          <a:schemeClr val="dk1"/>
+                        </a:solidFill>
+                        <a:effectLst/>
+                        <a:latin typeface="+mn-lt"/>
+                        <a:ea typeface="+mn-ea"/>
+                        <a:cs typeface="+mn-cs"/>
+                      </a:endParaRPr>
+                    </a:p>
+                  </a:txBody>
+                  <a:tcPr marL="35667" marR="35667" marT="5944" marB="5944"/>
+                </a:tc>
+                <a:tc>
+                  <a:txBody>
+                    <a:bodyPr/>
+                    <a:lstStyle/>
+                    <a:p>
+                      <a:pPr fontAlgn="t">
+                        <a:buNone/>
+                      </a:pPr>
+                      <a:r>
+                        <a:rPr lang="en-GB" sz="1700" kern="1200" dirty="0">
+                          <a:solidFill>
+                            <a:schemeClr val="dk1"/>
+                          </a:solidFill>
+                          <a:effectLst/>
+                        </a:rPr>
+                        <a:t>Canadians held without charge in Egypt headed home</a:t>
+                      </a:r>
+                      <a:endParaRPr lang="en-GB" sz="1700" kern="1200" dirty="0">
+                        <a:solidFill>
+                          <a:schemeClr val="dk1"/>
+                        </a:solidFill>
+                        <a:effectLst/>
+                        <a:latin typeface="+mn-lt"/>
+                        <a:ea typeface="+mn-ea"/>
+                        <a:cs typeface="+mn-cs"/>
+                      </a:endParaRPr>
+                    </a:p>
+                  </a:txBody>
+                  <a:tcPr marL="35667" marR="35667" marT="5944" marB="5944"/>
+                </a:tc>
+                <a:tc>
+                  <a:txBody>
+                    <a:bodyPr/>
+                    <a:lstStyle/>
+                    <a:p>
+                      <a:pPr fontAlgn="t">
+                        <a:buNone/>
+                      </a:pPr>
+                      <a:r>
+                        <a:rPr lang="en-IL" sz="1700" kern="1200">
+                          <a:solidFill>
+                            <a:schemeClr val="dk1"/>
+                          </a:solidFill>
+                          <a:effectLst/>
+                        </a:rPr>
+                        <a:t>2013-10-11 23:15:45</a:t>
+                      </a:r>
+                      <a:endParaRPr lang="en-IL" sz="1700" kern="1200">
+                        <a:solidFill>
+                          <a:schemeClr val="dk1"/>
+                        </a:solidFill>
+                        <a:effectLst/>
+                        <a:latin typeface="+mn-lt"/>
+                        <a:ea typeface="+mn-ea"/>
+                        <a:cs typeface="+mn-cs"/>
+                      </a:endParaRPr>
+                    </a:p>
+                  </a:txBody>
+                  <a:tcPr marL="35667" marR="35667" marT="5944" marB="5944"/>
+                </a:tc>
+                <a:tc>
+                  <a:txBody>
+                    <a:bodyPr/>
+                    <a:lstStyle/>
+                    <a:p>
+                      <a:pPr fontAlgn="t">
+                        <a:buNone/>
+                      </a:pPr>
+                      <a:r>
+                        <a:rPr lang="en-GB" sz="1700" kern="1200" dirty="0">
+                          <a:solidFill>
+                            <a:schemeClr val="dk1"/>
+                          </a:solidFill>
+                          <a:effectLst/>
+                        </a:rPr>
+                        <a:t>keep.ca: 2 Canadians jailed in Egypt without charge reportedly heading home - TORONTO - Two... http://bit.ly/1een04y # Canadians # charge</a:t>
+                      </a:r>
+                      <a:endParaRPr lang="en-GB" sz="1700" kern="1200" dirty="0">
+                        <a:solidFill>
+                          <a:schemeClr val="dk1"/>
+                        </a:solidFill>
+                        <a:effectLst/>
+                        <a:latin typeface="+mn-lt"/>
+                        <a:ea typeface="+mn-ea"/>
+                        <a:cs typeface="+mn-cs"/>
+                      </a:endParaRPr>
+                    </a:p>
+                  </a:txBody>
+                  <a:tcPr marL="35667" marR="35667" marT="5944" marB="5944"/>
+                </a:tc>
+                <a:extLst>
+                  <a:ext uri="{0D108BD9-81ED-4DB2-BD59-A6C34878D82A}">
+                    <a16:rowId xmlns:a16="http://schemas.microsoft.com/office/drawing/2014/main" val="3652083475"/>
+                  </a:ext>
+                </a:extLst>
+              </a:tr>
+              <a:tr h="880521">
+                <a:tc>
+                  <a:txBody>
+                    <a:bodyPr/>
+                    <a:lstStyle/>
+                    <a:p>
+                      <a:pPr algn="r" fontAlgn="t">
+                        <a:buNone/>
+                      </a:pPr>
+                      <a:r>
+                        <a:rPr lang="en-IL" sz="1700" kern="1200">
+                          <a:solidFill>
+                            <a:schemeClr val="dk1"/>
+                          </a:solidFill>
+                          <a:effectLst/>
+                        </a:rPr>
+                        <a:t>123</a:t>
+                      </a:r>
+                      <a:endParaRPr lang="en-IL" sz="1700" kern="1200">
+                        <a:solidFill>
+                          <a:schemeClr val="dk1"/>
+                        </a:solidFill>
+                        <a:effectLst/>
+                        <a:latin typeface="+mn-lt"/>
+                        <a:ea typeface="+mn-ea"/>
+                        <a:cs typeface="+mn-cs"/>
+                      </a:endParaRPr>
+                    </a:p>
+                  </a:txBody>
+                  <a:tcPr marL="35667" marR="35667" marT="5944" marB="5944"/>
+                </a:tc>
+                <a:tc>
+                  <a:txBody>
+                    <a:bodyPr/>
+                    <a:lstStyle/>
+                    <a:p>
+                      <a:pPr fontAlgn="t">
+                        <a:buNone/>
+                      </a:pPr>
+                      <a:r>
+                        <a:rPr lang="en-GB" sz="1700" kern="1200">
+                          <a:solidFill>
+                            <a:schemeClr val="dk1"/>
+                          </a:solidFill>
+                          <a:effectLst/>
+                        </a:rPr>
+                        <a:t>Canadians held without charge in Egypt headed home</a:t>
+                      </a:r>
+                      <a:endParaRPr lang="en-GB" sz="1700" kern="1200">
+                        <a:solidFill>
+                          <a:schemeClr val="dk1"/>
+                        </a:solidFill>
+                        <a:effectLst/>
+                        <a:latin typeface="+mn-lt"/>
+                        <a:ea typeface="+mn-ea"/>
+                        <a:cs typeface="+mn-cs"/>
+                      </a:endParaRPr>
+                    </a:p>
+                  </a:txBody>
+                  <a:tcPr marL="35667" marR="35667" marT="5944" marB="5944"/>
+                </a:tc>
+                <a:tc>
+                  <a:txBody>
+                    <a:bodyPr/>
+                    <a:lstStyle/>
+                    <a:p>
+                      <a:pPr fontAlgn="t">
+                        <a:buNone/>
+                      </a:pPr>
+                      <a:r>
+                        <a:rPr lang="en-IL" sz="1700" kern="1200">
+                          <a:solidFill>
+                            <a:schemeClr val="dk1"/>
+                          </a:solidFill>
+                          <a:effectLst/>
+                        </a:rPr>
+                        <a:t>2013-09-30 23:31:11</a:t>
+                      </a:r>
+                      <a:endParaRPr lang="en-IL" sz="1700" kern="1200">
+                        <a:solidFill>
+                          <a:schemeClr val="dk1"/>
+                        </a:solidFill>
+                        <a:effectLst/>
+                        <a:latin typeface="+mn-lt"/>
+                        <a:ea typeface="+mn-ea"/>
+                        <a:cs typeface="+mn-cs"/>
+                      </a:endParaRPr>
+                    </a:p>
+                  </a:txBody>
+                  <a:tcPr marL="35667" marR="35667" marT="5944" marB="5944"/>
+                </a:tc>
+                <a:tc>
+                  <a:txBody>
+                    <a:bodyPr/>
+                    <a:lstStyle/>
+                    <a:p>
+                      <a:pPr fontAlgn="t">
+                        <a:buNone/>
+                      </a:pPr>
+                      <a:r>
+                        <a:rPr lang="en-GB" sz="1700" kern="1200" dirty="0">
+                          <a:solidFill>
+                            <a:schemeClr val="dk1"/>
+                          </a:solidFill>
+                          <a:effectLst/>
+                        </a:rPr>
+                        <a:t>keep.ca: Two Canadians held in Egypt have detention extended: family - Two Canadians arrested and held... http://bit.ly/15EFDZG # Canadians</a:t>
+                      </a:r>
+                      <a:endParaRPr lang="en-GB" sz="1700" kern="1200" dirty="0">
+                        <a:solidFill>
+                          <a:schemeClr val="dk1"/>
+                        </a:solidFill>
+                        <a:effectLst/>
+                        <a:latin typeface="+mn-lt"/>
+                        <a:ea typeface="+mn-ea"/>
+                        <a:cs typeface="+mn-cs"/>
+                      </a:endParaRPr>
+                    </a:p>
+                  </a:txBody>
+                  <a:tcPr marL="35667" marR="35667" marT="5944" marB="5944"/>
+                </a:tc>
+                <a:extLst>
+                  <a:ext uri="{0D108BD9-81ED-4DB2-BD59-A6C34878D82A}">
+                    <a16:rowId xmlns:a16="http://schemas.microsoft.com/office/drawing/2014/main" val="783971237"/>
+                  </a:ext>
+                </a:extLst>
+              </a:tr>
+              <a:tr h="880521">
+                <a:tc>
+                  <a:txBody>
+                    <a:bodyPr/>
+                    <a:lstStyle/>
+                    <a:p>
+                      <a:pPr algn="r" fontAlgn="t">
+                        <a:buNone/>
+                      </a:pPr>
+                      <a:r>
+                        <a:rPr lang="en-IL" sz="1700" kern="1200">
+                          <a:solidFill>
+                            <a:schemeClr val="dk1"/>
+                          </a:solidFill>
+                          <a:effectLst/>
+                        </a:rPr>
+                        <a:t>123</a:t>
+                      </a:r>
+                      <a:endParaRPr lang="en-IL" sz="1700" kern="1200">
+                        <a:solidFill>
+                          <a:schemeClr val="dk1"/>
+                        </a:solidFill>
+                        <a:effectLst/>
+                        <a:latin typeface="+mn-lt"/>
+                        <a:ea typeface="+mn-ea"/>
+                        <a:cs typeface="+mn-cs"/>
+                      </a:endParaRPr>
+                    </a:p>
+                  </a:txBody>
+                  <a:tcPr marL="35667" marR="35667" marT="5944" marB="5944"/>
+                </a:tc>
+                <a:tc>
+                  <a:txBody>
+                    <a:bodyPr/>
+                    <a:lstStyle/>
+                    <a:p>
+                      <a:pPr fontAlgn="t">
+                        <a:buNone/>
+                      </a:pPr>
+                      <a:r>
+                        <a:rPr lang="en-GB" sz="1700" kern="1200">
+                          <a:solidFill>
+                            <a:schemeClr val="dk1"/>
+                          </a:solidFill>
+                          <a:effectLst/>
+                        </a:rPr>
+                        <a:t>Canadians held without charge in Egypt headed home</a:t>
+                      </a:r>
+                      <a:endParaRPr lang="en-GB" sz="1700" kern="1200">
+                        <a:solidFill>
+                          <a:schemeClr val="dk1"/>
+                        </a:solidFill>
+                        <a:effectLst/>
+                        <a:latin typeface="+mn-lt"/>
+                        <a:ea typeface="+mn-ea"/>
+                        <a:cs typeface="+mn-cs"/>
+                      </a:endParaRPr>
+                    </a:p>
+                  </a:txBody>
+                  <a:tcPr marL="35667" marR="35667" marT="5944" marB="5944"/>
+                </a:tc>
+                <a:tc>
+                  <a:txBody>
+                    <a:bodyPr/>
+                    <a:lstStyle/>
+                    <a:p>
+                      <a:pPr fontAlgn="t">
+                        <a:buNone/>
+                      </a:pPr>
+                      <a:r>
+                        <a:rPr lang="en-IL" sz="1700" kern="1200" dirty="0">
+                          <a:solidFill>
+                            <a:schemeClr val="dk1"/>
+                          </a:solidFill>
+                          <a:effectLst/>
+                        </a:rPr>
+                        <a:t>2013-09-30 05:59:35</a:t>
+                      </a:r>
+                      <a:endParaRPr lang="en-IL" sz="1700" kern="1200" dirty="0">
+                        <a:solidFill>
+                          <a:schemeClr val="dk1"/>
+                        </a:solidFill>
+                        <a:effectLst/>
+                        <a:latin typeface="+mn-lt"/>
+                        <a:ea typeface="+mn-ea"/>
+                        <a:cs typeface="+mn-cs"/>
+                      </a:endParaRPr>
+                    </a:p>
+                  </a:txBody>
+                  <a:tcPr marL="35667" marR="35667" marT="5944" marB="5944"/>
+                </a:tc>
+                <a:tc>
+                  <a:txBody>
+                    <a:bodyPr/>
+                    <a:lstStyle/>
+                    <a:p>
+                      <a:pPr fontAlgn="t">
+                        <a:buNone/>
+                      </a:pPr>
+                      <a:r>
+                        <a:rPr lang="en-GB" sz="1700" kern="1200" dirty="0">
+                          <a:solidFill>
+                            <a:schemeClr val="dk1"/>
+                          </a:solidFill>
+                          <a:effectLst/>
+                        </a:rPr>
+                        <a:t>keep.ca: Two Canadians held in Egypt have detention extended: family - Two Canadians arrested and held... http://bit.ly/15EFDZG # Canadians</a:t>
+                      </a:r>
+                      <a:endParaRPr lang="en-GB" sz="1700" kern="1200" dirty="0">
+                        <a:solidFill>
+                          <a:schemeClr val="dk1"/>
+                        </a:solidFill>
+                        <a:effectLst/>
+                        <a:latin typeface="+mn-lt"/>
+                        <a:ea typeface="+mn-ea"/>
+                        <a:cs typeface="+mn-cs"/>
+                      </a:endParaRPr>
+                    </a:p>
+                  </a:txBody>
+                  <a:tcPr marL="35667" marR="35667" marT="5944" marB="5944"/>
+                </a:tc>
+                <a:extLst>
+                  <a:ext uri="{0D108BD9-81ED-4DB2-BD59-A6C34878D82A}">
+                    <a16:rowId xmlns:a16="http://schemas.microsoft.com/office/drawing/2014/main" val="2253728347"/>
+                  </a:ext>
+                </a:extLst>
+              </a:tr>
+              <a:tr h="880521">
+                <a:tc>
+                  <a:txBody>
+                    <a:bodyPr/>
+                    <a:lstStyle/>
+                    <a:p>
+                      <a:pPr algn="r" fontAlgn="t">
+                        <a:buNone/>
+                      </a:pPr>
+                      <a:r>
+                        <a:rPr lang="en-IL" sz="1700" kern="1200">
+                          <a:solidFill>
+                            <a:schemeClr val="dk1"/>
+                          </a:solidFill>
+                          <a:effectLst/>
+                        </a:rPr>
+                        <a:t>123</a:t>
+                      </a:r>
+                      <a:endParaRPr lang="en-IL" sz="1700" kern="1200">
+                        <a:solidFill>
+                          <a:schemeClr val="dk1"/>
+                        </a:solidFill>
+                        <a:effectLst/>
+                        <a:latin typeface="+mn-lt"/>
+                        <a:ea typeface="+mn-ea"/>
+                        <a:cs typeface="+mn-cs"/>
+                      </a:endParaRPr>
+                    </a:p>
+                  </a:txBody>
+                  <a:tcPr marL="35667" marR="35667" marT="5944" marB="5944"/>
+                </a:tc>
+                <a:tc>
+                  <a:txBody>
+                    <a:bodyPr/>
+                    <a:lstStyle/>
+                    <a:p>
+                      <a:pPr fontAlgn="t">
+                        <a:buNone/>
+                      </a:pPr>
+                      <a:r>
+                        <a:rPr lang="en-GB" sz="1700" kern="1200">
+                          <a:solidFill>
+                            <a:schemeClr val="dk1"/>
+                          </a:solidFill>
+                          <a:effectLst/>
+                        </a:rPr>
+                        <a:t>Canadians held without charge in Egypt headed home</a:t>
+                      </a:r>
+                      <a:endParaRPr lang="en-GB" sz="1700" kern="1200">
+                        <a:solidFill>
+                          <a:schemeClr val="dk1"/>
+                        </a:solidFill>
+                        <a:effectLst/>
+                        <a:latin typeface="+mn-lt"/>
+                        <a:ea typeface="+mn-ea"/>
+                        <a:cs typeface="+mn-cs"/>
+                      </a:endParaRPr>
+                    </a:p>
+                  </a:txBody>
+                  <a:tcPr marL="35667" marR="35667" marT="5944" marB="5944"/>
+                </a:tc>
+                <a:tc>
+                  <a:txBody>
+                    <a:bodyPr/>
+                    <a:lstStyle/>
+                    <a:p>
+                      <a:pPr fontAlgn="t">
+                        <a:buNone/>
+                      </a:pPr>
+                      <a:r>
+                        <a:rPr lang="en-IL" sz="1700" kern="1200">
+                          <a:solidFill>
+                            <a:schemeClr val="dk1"/>
+                          </a:solidFill>
+                          <a:effectLst/>
+                        </a:rPr>
+                        <a:t>2013-10-08 16:13:08</a:t>
+                      </a:r>
+                      <a:endParaRPr lang="en-IL" sz="1700" kern="1200">
+                        <a:solidFill>
+                          <a:schemeClr val="dk1"/>
+                        </a:solidFill>
+                        <a:effectLst/>
+                        <a:latin typeface="+mn-lt"/>
+                        <a:ea typeface="+mn-ea"/>
+                        <a:cs typeface="+mn-cs"/>
+                      </a:endParaRPr>
+                    </a:p>
+                  </a:txBody>
+                  <a:tcPr marL="35667" marR="35667" marT="5944" marB="5944"/>
+                </a:tc>
+                <a:tc>
+                  <a:txBody>
+                    <a:bodyPr/>
+                    <a:lstStyle/>
+                    <a:p>
+                      <a:pPr fontAlgn="t">
+                        <a:buNone/>
+                      </a:pPr>
+                      <a:r>
+                        <a:rPr lang="en-GB" sz="1700" kern="1200" dirty="0">
+                          <a:solidFill>
+                            <a:schemeClr val="dk1"/>
+                          </a:solidFill>
+                          <a:effectLst/>
+                        </a:rPr>
+                        <a:t>keep.ca: John Greyson, Tarek Loubani released in Egypt, not yet heading home - Two Canadians held... http://bit.ly/GCRSzH # Egypt # Greyson</a:t>
+                      </a:r>
+                      <a:endParaRPr lang="en-GB" sz="1700" kern="1200" dirty="0">
+                        <a:solidFill>
+                          <a:schemeClr val="dk1"/>
+                        </a:solidFill>
+                        <a:effectLst/>
+                        <a:latin typeface="+mn-lt"/>
+                        <a:ea typeface="+mn-ea"/>
+                        <a:cs typeface="+mn-cs"/>
+                      </a:endParaRPr>
+                    </a:p>
+                  </a:txBody>
+                  <a:tcPr marL="35667" marR="35667" marT="5944" marB="5944"/>
+                </a:tc>
+                <a:extLst>
+                  <a:ext uri="{0D108BD9-81ED-4DB2-BD59-A6C34878D82A}">
+                    <a16:rowId xmlns:a16="http://schemas.microsoft.com/office/drawing/2014/main" val="1795014841"/>
+                  </a:ext>
+                </a:extLst>
+              </a:tr>
+              <a:tr h="880521">
+                <a:tc>
+                  <a:txBody>
+                    <a:bodyPr/>
+                    <a:lstStyle/>
+                    <a:p>
+                      <a:pPr algn="r" fontAlgn="t">
+                        <a:buNone/>
+                      </a:pPr>
+                      <a:r>
+                        <a:rPr lang="en-IL" sz="1700" kern="1200" dirty="0">
+                          <a:solidFill>
+                            <a:schemeClr val="dk1"/>
+                          </a:solidFill>
+                          <a:effectLst/>
+                        </a:rPr>
+                        <a:t>123</a:t>
+                      </a:r>
+                      <a:endParaRPr lang="en-IL" sz="1700" kern="1200" dirty="0">
+                        <a:solidFill>
+                          <a:schemeClr val="dk1"/>
+                        </a:solidFill>
+                        <a:effectLst/>
+                        <a:latin typeface="+mn-lt"/>
+                        <a:ea typeface="+mn-ea"/>
+                        <a:cs typeface="+mn-cs"/>
+                      </a:endParaRPr>
+                    </a:p>
+                  </a:txBody>
+                  <a:tcPr marL="35667" marR="35667" marT="5944" marB="5944"/>
+                </a:tc>
+                <a:tc>
+                  <a:txBody>
+                    <a:bodyPr/>
+                    <a:lstStyle/>
+                    <a:p>
+                      <a:pPr fontAlgn="t">
+                        <a:buNone/>
+                      </a:pPr>
+                      <a:r>
+                        <a:rPr lang="en-GB" sz="1700" kern="1200">
+                          <a:solidFill>
+                            <a:schemeClr val="dk1"/>
+                          </a:solidFill>
+                          <a:effectLst/>
+                        </a:rPr>
+                        <a:t>Canadians held without charge in Egypt headed home</a:t>
+                      </a:r>
+                      <a:endParaRPr lang="en-GB" sz="1700" kern="1200">
+                        <a:solidFill>
+                          <a:schemeClr val="dk1"/>
+                        </a:solidFill>
+                        <a:effectLst/>
+                        <a:latin typeface="+mn-lt"/>
+                        <a:ea typeface="+mn-ea"/>
+                        <a:cs typeface="+mn-cs"/>
+                      </a:endParaRPr>
+                    </a:p>
+                  </a:txBody>
+                  <a:tcPr marL="35667" marR="35667" marT="5944" marB="5944"/>
+                </a:tc>
+                <a:tc>
+                  <a:txBody>
+                    <a:bodyPr/>
+                    <a:lstStyle/>
+                    <a:p>
+                      <a:pPr fontAlgn="t">
+                        <a:buNone/>
+                      </a:pPr>
+                      <a:r>
+                        <a:rPr lang="en-IL" sz="1700" kern="1200">
+                          <a:solidFill>
+                            <a:schemeClr val="dk1"/>
+                          </a:solidFill>
+                          <a:effectLst/>
+                        </a:rPr>
+                        <a:t>2013-10-06 21:04:44</a:t>
+                      </a:r>
+                      <a:endParaRPr lang="en-IL" sz="1700" kern="1200">
+                        <a:solidFill>
+                          <a:schemeClr val="dk1"/>
+                        </a:solidFill>
+                        <a:effectLst/>
+                        <a:latin typeface="+mn-lt"/>
+                        <a:ea typeface="+mn-ea"/>
+                        <a:cs typeface="+mn-cs"/>
+                      </a:endParaRPr>
+                    </a:p>
+                  </a:txBody>
+                  <a:tcPr marL="35667" marR="35667" marT="5944" marB="5944"/>
+                </a:tc>
+                <a:tc>
+                  <a:txBody>
+                    <a:bodyPr/>
+                    <a:lstStyle/>
+                    <a:p>
+                      <a:pPr fontAlgn="t">
+                        <a:buNone/>
+                      </a:pPr>
+                      <a:r>
+                        <a:rPr lang="en-GB" sz="1700" kern="1200" dirty="0">
+                          <a:solidFill>
+                            <a:schemeClr val="dk1"/>
+                          </a:solidFill>
+                          <a:effectLst/>
+                        </a:rPr>
+                        <a:t>keep.ca: John Greyson, Tarek Loubani released in Egypt, not yet heading home - Two Canadians held... http://bit.ly/GCRSzH # Egypt # Greyson</a:t>
+                      </a:r>
+                      <a:endParaRPr lang="en-GB" sz="1700" kern="1200" dirty="0">
+                        <a:solidFill>
+                          <a:schemeClr val="dk1"/>
+                        </a:solidFill>
+                        <a:effectLst/>
+                        <a:latin typeface="+mn-lt"/>
+                        <a:ea typeface="+mn-ea"/>
+                        <a:cs typeface="+mn-cs"/>
+                      </a:endParaRPr>
+                    </a:p>
+                  </a:txBody>
+                  <a:tcPr marL="35667" marR="35667" marT="5944" marB="5944"/>
+                </a:tc>
+                <a:extLst>
+                  <a:ext uri="{0D108BD9-81ED-4DB2-BD59-A6C34878D82A}">
+                    <a16:rowId xmlns:a16="http://schemas.microsoft.com/office/drawing/2014/main" val="2487471717"/>
+                  </a:ext>
+                </a:extLst>
+              </a:tr>
+            </a:tbl>
+          </a:graphicData>
+        </a:graphic>
+      </p:graphicFrame>
+    </p:spTree>
+    <p:extLst>
+      <p:ext uri="{BB962C8B-B14F-4D97-AF65-F5344CB8AC3E}">
+        <p14:creationId xmlns:p14="http://schemas.microsoft.com/office/powerpoint/2010/main" val="3607200553"/>
+      </p:ext>
+    </p:extLst>
+  </p:cSld>
+  <p:clrMapOvr>
+    <a:masterClrMapping/>
+  </p:clrMapOvr>
+</p:sld>
+</file>
+
+<file path=ppt/slides/slide9.xml><?xml version="1.0" encoding="utf-8"?>
+<p:sld xmlns:a="http://schemas.openxmlformats.org/drawingml/2006/main" xmlns:r="http://schemas.openxmlformats.org/officeDocument/2006/relationships" xmlns:p="http://schemas.openxmlformats.org/presentationml/2006/main">
+  <p:cSld>
+    <p:spTree>
+      <p:nvGrpSpPr>
+        <p:cNvPr id="1" name="">
+          <a:extLst>
+            <a:ext uri="{FF2B5EF4-FFF2-40B4-BE49-F238E27FC236}">
+              <a16:creationId xmlns:a16="http://schemas.microsoft.com/office/drawing/2014/main" id="{23A27828-8C84-3B03-B059-99DCFCE0D3BE}"/>
+            </a:ext>
+          </a:extLst>
+        </p:cNvPr>
+        <p:cNvGrpSpPr/>
+        <p:nvPr/>
+      </p:nvGrpSpPr>
+      <p:grpSpPr>
+        <a:xfrm>
+          <a:off x="0" y="0"/>
+          <a:ext cx="0" cy="0"/>
+          <a:chOff x="0" y="0"/>
+          <a:chExt cx="0" cy="0"/>
+        </a:xfrm>
+      </p:grpSpPr>
+      <p:sp>
+        <p:nvSpPr>
+          <p:cNvPr id="2" name="Slide Number Placeholder 3">
+            <a:extLst>
+              <a:ext uri="{FF2B5EF4-FFF2-40B4-BE49-F238E27FC236}">
+                <a16:creationId xmlns:a16="http://schemas.microsoft.com/office/drawing/2014/main" id="{3F27E83A-F795-6B67-69B8-69A2B90CDBB7}"/>
+              </a:ext>
+            </a:extLst>
+          </p:cNvPr>
+          <p:cNvSpPr txBox="1">
+            <a:spLocks/>
+          </p:cNvSpPr>
+          <p:nvPr/>
+        </p:nvSpPr>
+        <p:spPr>
+          <a:xfrm>
+            <a:off x="11739563" y="6477000"/>
+            <a:ext cx="452437" cy="365125"/>
+          </a:xfrm>
+          <a:prstGeom prst="rect">
+            <a:avLst/>
+          </a:prstGeom>
+        </p:spPr>
+        <p:txBody>
+          <a:bodyPr vert="horz" lIns="91440" tIns="45720" rIns="91440" bIns="45720" rtlCol="0" anchor="ctr"/>
+          <a:lstStyle>
+            <a:defPPr marR="0" lvl="0" algn="l" rtl="0">
+              <a:lnSpc>
+                <a:spcPct val="100000"/>
+              </a:lnSpc>
+              <a:spcBef>
+                <a:spcPts val="0"/>
+              </a:spcBef>
+              <a:spcAft>
+                <a:spcPts val="0"/>
+              </a:spcAft>
+            </a:defPPr>
+            <a:lvl1pPr marR="0" lvl="0" algn="ctr" rtl="0">
+              <a:lnSpc>
+                <a:spcPct val="100000"/>
+              </a:lnSpc>
+              <a:spcBef>
+                <a:spcPts val="0"/>
+              </a:spcBef>
+              <a:spcAft>
+                <a:spcPts val="0"/>
+              </a:spcAft>
+              <a:buClr>
+                <a:srgbClr val="000000"/>
+              </a:buClr>
+              <a:buFont typeface="Arial"/>
+              <a:defRPr sz="1200" b="0" i="0" u="none" strike="noStrike" cap="none">
+                <a:solidFill>
+                  <a:schemeClr val="tx1">
+                    <a:tint val="75000"/>
+                  </a:schemeClr>
+                </a:solidFill>
+                <a:latin typeface="Arial"/>
+                <a:ea typeface="Arial"/>
+                <a:cs typeface="Arial"/>
+                <a:sym typeface="Arial"/>
+              </a:defRPr>
+            </a:lvl1pPr>
+            <a:lvl2pPr marR="0" lvl="1" algn="l" rtl="0">
+              <a:lnSpc>
+                <a:spcPct val="100000"/>
+              </a:lnSpc>
+              <a:spcBef>
+                <a:spcPts val="0"/>
+              </a:spcBef>
+              <a:spcAft>
+                <a:spcPts val="0"/>
+              </a:spcAft>
+              <a:buClr>
+                <a:srgbClr val="000000"/>
+              </a:buClr>
+              <a:buFont typeface="Arial"/>
+              <a:defRPr sz="1400" b="0" i="0" u="none" strike="noStrike" cap="none">
+                <a:solidFill>
+                  <a:srgbClr val="000000"/>
+                </a:solidFill>
+                <a:latin typeface="Arial"/>
+                <a:ea typeface="Arial"/>
+                <a:cs typeface="Arial"/>
+                <a:sym typeface="Arial"/>
+              </a:defRPr>
+            </a:lvl2pPr>
+            <a:lvl3pPr marR="0" lvl="2" algn="l" rtl="0">
+              <a:lnSpc>
+                <a:spcPct val="100000"/>
+              </a:lnSpc>
+              <a:spcBef>
+                <a:spcPts val="0"/>
+              </a:spcBef>
+              <a:spcAft>
+                <a:spcPts val="0"/>
+              </a:spcAft>
+              <a:buClr>
+                <a:srgbClr val="000000"/>
+              </a:buClr>
+              <a:buFont typeface="Arial"/>
+              <a:defRPr sz="1400" b="0" i="0" u="none" strike="noStrike" cap="none">
+                <a:solidFill>
+                  <a:srgbClr val="000000"/>
+                </a:solidFill>
+                <a:latin typeface="Arial"/>
+                <a:ea typeface="Arial"/>
+                <a:cs typeface="Arial"/>
+                <a:sym typeface="Arial"/>
+              </a:defRPr>
+            </a:lvl3pPr>
+            <a:lvl4pPr marR="0" lvl="3" algn="l" rtl="0">
+              <a:lnSpc>
+                <a:spcPct val="100000"/>
+              </a:lnSpc>
+              <a:spcBef>
+                <a:spcPts val="0"/>
+              </a:spcBef>
+              <a:spcAft>
+                <a:spcPts val="0"/>
+              </a:spcAft>
+              <a:buClr>
+                <a:srgbClr val="000000"/>
+              </a:buClr>
+              <a:buFont typeface="Arial"/>
+              <a:defRPr sz="1400" b="0" i="0" u="none" strike="noStrike" cap="none">
+                <a:solidFill>
+                  <a:srgbClr val="000000"/>
+                </a:solidFill>
+                <a:latin typeface="Arial"/>
+                <a:ea typeface="Arial"/>
+                <a:cs typeface="Arial"/>
+                <a:sym typeface="Arial"/>
+              </a:defRPr>
+            </a:lvl4pPr>
+            <a:lvl5pPr marR="0" lvl="4" algn="l" rtl="0">
+              <a:lnSpc>
+                <a:spcPct val="100000"/>
+              </a:lnSpc>
+              <a:spcBef>
+                <a:spcPts val="0"/>
+              </a:spcBef>
+              <a:spcAft>
+                <a:spcPts val="0"/>
+              </a:spcAft>
+              <a:buClr>
+                <a:srgbClr val="000000"/>
+              </a:buClr>
+              <a:buFont typeface="Arial"/>
+              <a:defRPr sz="1400" b="0" i="0" u="none" strike="noStrike" cap="none">
+                <a:solidFill>
+                  <a:srgbClr val="000000"/>
+                </a:solidFill>
+                <a:latin typeface="Arial"/>
+                <a:ea typeface="Arial"/>
+                <a:cs typeface="Arial"/>
+                <a:sym typeface="Arial"/>
+              </a:defRPr>
+            </a:lvl5pPr>
+            <a:lvl6pPr marR="0" lvl="5" algn="l" rtl="0">
+              <a:lnSpc>
+                <a:spcPct val="100000"/>
+              </a:lnSpc>
+              <a:spcBef>
+                <a:spcPts val="0"/>
+              </a:spcBef>
+              <a:spcAft>
+                <a:spcPts val="0"/>
+              </a:spcAft>
+              <a:buClr>
+                <a:srgbClr val="000000"/>
+              </a:buClr>
+              <a:buFont typeface="Arial"/>
+              <a:defRPr sz="1400" b="0" i="0" u="none" strike="noStrike" cap="none">
+                <a:solidFill>
+                  <a:srgbClr val="000000"/>
+                </a:solidFill>
+                <a:latin typeface="Arial"/>
+                <a:ea typeface="Arial"/>
+                <a:cs typeface="Arial"/>
+                <a:sym typeface="Arial"/>
+              </a:defRPr>
+            </a:lvl6pPr>
+            <a:lvl7pPr marR="0" lvl="6" algn="l" rtl="0">
+              <a:lnSpc>
+                <a:spcPct val="100000"/>
+              </a:lnSpc>
+              <a:spcBef>
+                <a:spcPts val="0"/>
+              </a:spcBef>
+              <a:spcAft>
+                <a:spcPts val="0"/>
+              </a:spcAft>
+              <a:buClr>
+                <a:srgbClr val="000000"/>
+              </a:buClr>
+              <a:buFont typeface="Arial"/>
+              <a:defRPr sz="1400" b="0" i="0" u="none" strike="noStrike" cap="none">
+                <a:solidFill>
+                  <a:srgbClr val="000000"/>
+                </a:solidFill>
+                <a:latin typeface="Arial"/>
+                <a:ea typeface="Arial"/>
+                <a:cs typeface="Arial"/>
+                <a:sym typeface="Arial"/>
+              </a:defRPr>
+            </a:lvl7pPr>
+            <a:lvl8pPr marR="0" lvl="7" algn="l" rtl="0">
+              <a:lnSpc>
+                <a:spcPct val="100000"/>
+              </a:lnSpc>
+              <a:spcBef>
+                <a:spcPts val="0"/>
+              </a:spcBef>
+              <a:spcAft>
+                <a:spcPts val="0"/>
+              </a:spcAft>
+              <a:buClr>
+                <a:srgbClr val="000000"/>
+              </a:buClr>
+              <a:buFont typeface="Arial"/>
+              <a:defRPr sz="1400" b="0" i="0" u="none" strike="noStrike" cap="none">
+                <a:solidFill>
+                  <a:srgbClr val="000000"/>
+                </a:solidFill>
+                <a:latin typeface="Arial"/>
+                <a:ea typeface="Arial"/>
+                <a:cs typeface="Arial"/>
+                <a:sym typeface="Arial"/>
+              </a:defRPr>
+            </a:lvl8pPr>
+            <a:lvl9pPr marR="0" lvl="8" algn="l" rtl="0">
+              <a:lnSpc>
+                <a:spcPct val="100000"/>
+              </a:lnSpc>
+              <a:spcBef>
+                <a:spcPts val="0"/>
+              </a:spcBef>
+              <a:spcAft>
+                <a:spcPts val="0"/>
+              </a:spcAft>
+              <a:buClr>
+                <a:srgbClr val="000000"/>
+              </a:buClr>
+              <a:buFont typeface="Arial"/>
+              <a:defRPr sz="1400" b="0" i="0" u="none" strike="noStrike" cap="none">
+                <a:solidFill>
+                  <a:srgbClr val="000000"/>
+                </a:solidFill>
+                <a:latin typeface="Arial"/>
+                <a:ea typeface="Arial"/>
+                <a:cs typeface="Arial"/>
+                <a:sym typeface="Arial"/>
+              </a:defRPr>
+            </a:lvl9pPr>
+          </a:lstStyle>
+          <a:p>
+            <a:pPr>
+              <a:buClrTx/>
+              <a:buFontTx/>
+              <a:buNone/>
+              <a:tabLst>
+                <a:tab pos="0" algn="l"/>
+              </a:tabLst>
+              <a:defRPr/>
+            </a:pPr>
+            <a:fld id="{91AC96F7-F8C6-4046-8A0D-FD31126D620D}" type="slidenum">
+              <a:rPr lang="en-US" kern="1200" spc="-1" smtClean="0">
+                <a:solidFill>
+                  <a:srgbClr val="000000">
+                    <a:tint val="75000"/>
+                  </a:srgbClr>
+                </a:solidFill>
+                <a:latin typeface="Calibri"/>
+                <a:ea typeface="+mn-ea"/>
+                <a:cs typeface="+mn-cs"/>
+              </a:rPr>
+              <a:pPr>
+                <a:buClrTx/>
+                <a:buFontTx/>
+                <a:buNone/>
+                <a:tabLst>
+                  <a:tab pos="0" algn="l"/>
+                </a:tabLst>
+                <a:defRPr/>
+              </a:pPr>
               <a:t>9</a:t>
             </a:fld>
             <a:endParaRPr lang="en-US" kern="1200" spc="-1" dirty="0">
@@ -13595,191 +16077,939 @@
           </a:p>
         </p:txBody>
       </p:sp>
-      <p:pic>
-        <p:nvPicPr>
-          <p:cNvPr id="5" name="Picture 4">
+      <p:sp>
+        <p:nvSpPr>
+          <p:cNvPr id="5" name="PlaceHolder 1">
             <a:extLst>
               <a:ext uri="{FF2B5EF4-FFF2-40B4-BE49-F238E27FC236}">
-                <a16:creationId xmlns:a16="http://schemas.microsoft.com/office/drawing/2014/main" id="{4D73735B-1AFE-51C3-7C15-FE227A63D30F}"/>
+                <a16:creationId xmlns:a16="http://schemas.microsoft.com/office/drawing/2014/main" id="{AFDC49B3-9E72-F16F-C315-9A04A7088F0A}"/>
               </a:ext>
             </a:extLst>
           </p:cNvPr>
-          <p:cNvPicPr>
-            <a:picLocks noChangeAspect="1"/>
-          </p:cNvPicPr>
+          <p:cNvSpPr txBox="1">
+            <a:spLocks/>
+          </p:cNvSpPr>
           <p:nvPr/>
-        </p:nvPicPr>
-        <p:blipFill>
-          <a:blip r:embed="rId3"/>
-          <a:srcRect b="23850"/>
-          <a:stretch>
-            <a:fillRect/>
-          </a:stretch>
-        </p:blipFill>
+        </p:nvSpPr>
         <p:spPr>
           <a:xfrm>
-            <a:off x="1154412" y="1930541"/>
-            <a:ext cx="9883175" cy="1208900"/>
+            <a:off x="3556000" y="514491"/>
+            <a:ext cx="8229768" cy="766000"/>
           </a:xfrm>
           <a:prstGeom prst="rect">
             <a:avLst/>
           </a:prstGeom>
-          <a:solidFill>
-            <a:srgbClr val="FFFFFF">
-              <a:shade val="85000"/>
-            </a:srgbClr>
-          </a:solidFill>
-          <a:ln w="88900" cap="sq">
-            <a:solidFill>
-              <a:srgbClr val="FFFFFF"/>
-            </a:solidFill>
-            <a:miter lim="800000"/>
+          <a:noFill/>
+          <a:ln w="0">
+            <a:noFill/>
           </a:ln>
-          <a:effectLst>
-            <a:outerShdw blurRad="55000" dist="18000" dir="5400000" algn="tl" rotWithShape="0">
-              <a:srgbClr val="000000">
-                <a:alpha val="40000"/>
-              </a:srgbClr>
-            </a:outerShdw>
-          </a:effectLst>
-          <a:scene3d>
-            <a:camera prst="orthographicFront"/>
-            <a:lightRig rig="twoPt" dir="t">
-              <a:rot lat="0" lon="0" rev="7200000"/>
-            </a:lightRig>
-          </a:scene3d>
-          <a:sp3d>
-            <a:bevelT w="25400" h="19050"/>
-            <a:contourClr>
-              <a:srgbClr val="FFFFFF"/>
-            </a:contourClr>
-          </a:sp3d>
         </p:spPr>
-      </p:pic>
-      <p:pic>
-        <p:nvPicPr>
-          <p:cNvPr id="7" name="Picture 6">
+        <p:txBody>
+          <a:bodyPr lIns="91440" tIns="45720" rIns="91440" bIns="45720" anchor="b">
+            <a:noAutofit/>
+          </a:bodyPr>
+          <a:lstStyle>
+            <a:lvl1pPr algn="l" defTabSz="914400" rtl="0" eaLnBrk="1" latinLnBrk="0" hangingPunct="1">
+              <a:lnSpc>
+                <a:spcPct val="90000"/>
+              </a:lnSpc>
+              <a:spcBef>
+                <a:spcPct val="0"/>
+              </a:spcBef>
+              <a:buNone/>
+              <a:defRPr sz="4400" kern="1200">
+                <a:solidFill>
+                  <a:schemeClr val="tx1"/>
+                </a:solidFill>
+                <a:latin typeface="+mj-lt"/>
+                <a:ea typeface="+mj-ea"/>
+                <a:cs typeface="+mj-cs"/>
+              </a:defRPr>
+            </a:lvl1pPr>
+          </a:lstStyle>
+          <a:p>
+            <a:pPr>
+              <a:buClrTx/>
+              <a:tabLst>
+                <a:tab pos="0" algn="l"/>
+              </a:tabLst>
+              <a:defRPr/>
+            </a:pPr>
+            <a:r>
+              <a:rPr lang="en-US" sz="3600" spc="-1" dirty="0">
+                <a:solidFill>
+                  <a:srgbClr val="009DBB"/>
+                </a:solidFill>
+                <a:latin typeface="Arial"/>
+              </a:rPr>
+              <a:t>Author’s Activity – </a:t>
+            </a:r>
+            <a:r>
+              <a:rPr lang="en-GB" sz="3600" spc="-1" dirty="0">
+                <a:solidFill>
+                  <a:srgbClr val="009DBB"/>
+                </a:solidFill>
+                <a:latin typeface="Arial"/>
+              </a:rPr>
+              <a:t>Lowest Score Posts</a:t>
+            </a:r>
+            <a:endParaRPr lang="en-US" sz="3600" spc="-1" dirty="0">
+              <a:solidFill>
+                <a:srgbClr val="009DBB"/>
+              </a:solidFill>
+              <a:latin typeface="Arial"/>
+            </a:endParaRPr>
+          </a:p>
+        </p:txBody>
+      </p:sp>
+      <p:graphicFrame>
+        <p:nvGraphicFramePr>
+          <p:cNvPr id="4" name="Table 3">
             <a:extLst>
               <a:ext uri="{FF2B5EF4-FFF2-40B4-BE49-F238E27FC236}">
-                <a16:creationId xmlns:a16="http://schemas.microsoft.com/office/drawing/2014/main" id="{7B9F050D-0435-86B9-6518-25B609D2BBAD}"/>
+                <a16:creationId xmlns:a16="http://schemas.microsoft.com/office/drawing/2014/main" id="{65A5D64B-60D9-A722-1CA9-9E8D0FBB6F13}"/>
               </a:ext>
             </a:extLst>
           </p:cNvPr>
-          <p:cNvPicPr>
-            <a:picLocks noChangeAspect="1"/>
-          </p:cNvPicPr>
-          <p:nvPr/>
-        </p:nvPicPr>
-        <p:blipFill>
-          <a:blip r:embed="rId4"/>
-          <a:stretch>
-            <a:fillRect/>
-          </a:stretch>
-        </p:blipFill>
-        <p:spPr>
-          <a:xfrm>
-            <a:off x="1914057" y="3910398"/>
-            <a:ext cx="8363883" cy="1412287"/>
-          </a:xfrm>
-          <a:prstGeom prst="rect">
-            <a:avLst/>
-          </a:prstGeom>
-          <a:solidFill>
-            <a:srgbClr val="FFFFFF">
-              <a:shade val="85000"/>
-            </a:srgbClr>
-          </a:solidFill>
-          <a:ln w="190500" cap="rnd">
-            <a:solidFill>
-              <a:srgbClr val="FFFFFF"/>
-            </a:solidFill>
-          </a:ln>
-          <a:effectLst>
-            <a:outerShdw blurRad="50000" algn="tl" rotWithShape="0">
-              <a:srgbClr val="000000">
-                <a:alpha val="41000"/>
-              </a:srgbClr>
-            </a:outerShdw>
-          </a:effectLst>
-          <a:scene3d>
-            <a:camera prst="orthographicFront"/>
-            <a:lightRig rig="twoPt" dir="t">
-              <a:rot lat="0" lon="0" rev="7800000"/>
-            </a:lightRig>
-          </a:scene3d>
-          <a:sp3d contourW="6350">
-            <a:bevelT w="50800" h="16510"/>
-            <a:contourClr>
-              <a:srgbClr val="C0C0C0"/>
-            </a:contourClr>
-          </a:sp3d>
-        </p:spPr>
-      </p:pic>
-      <p:pic>
-        <p:nvPicPr>
-          <p:cNvPr id="3" name="Picture 2">
-            <a:extLst>
-              <a:ext uri="{FF2B5EF4-FFF2-40B4-BE49-F238E27FC236}">
-                <a16:creationId xmlns:a16="http://schemas.microsoft.com/office/drawing/2014/main" id="{3F7E64C2-508F-1C5B-654C-F229EB824B6B}"/>
-              </a:ext>
-            </a:extLst>
-          </p:cNvPr>
-          <p:cNvPicPr>
-            <a:picLocks noChangeAspect="1"/>
-          </p:cNvPicPr>
-          <p:nvPr/>
-        </p:nvPicPr>
-        <p:blipFill>
-          <a:blip r:embed="rId3"/>
-          <a:srcRect t="78710" r="34785"/>
-          <a:stretch>
-            <a:fillRect/>
-          </a:stretch>
-        </p:blipFill>
-        <p:spPr>
-          <a:xfrm>
-            <a:off x="1154412" y="5883358"/>
-            <a:ext cx="5947429" cy="311886"/>
-          </a:xfrm>
-          <a:prstGeom prst="rect">
-            <a:avLst/>
-          </a:prstGeom>
-          <a:solidFill>
-            <a:srgbClr val="FFFFFF">
-              <a:shade val="85000"/>
-            </a:srgbClr>
-          </a:solidFill>
-          <a:ln w="88900" cap="sq">
-            <a:solidFill>
-              <a:srgbClr val="FFFFFF"/>
-            </a:solidFill>
-            <a:miter lim="800000"/>
-          </a:ln>
-          <a:effectLst>
-            <a:outerShdw blurRad="55000" dist="18000" dir="5400000" algn="tl" rotWithShape="0">
-              <a:srgbClr val="000000">
-                <a:alpha val="40000"/>
-              </a:srgbClr>
-            </a:outerShdw>
-          </a:effectLst>
-          <a:scene3d>
-            <a:camera prst="orthographicFront"/>
-            <a:lightRig rig="twoPt" dir="t">
-              <a:rot lat="0" lon="0" rev="7200000"/>
-            </a:lightRig>
-          </a:scene3d>
-          <a:sp3d>
-            <a:bevelT w="25400" h="19050"/>
-            <a:contourClr>
-              <a:srgbClr val="FFFFFF"/>
-            </a:contourClr>
-          </a:sp3d>
-        </p:spPr>
-      </p:pic>
+          <p:cNvGraphicFramePr>
+            <a:graphicFrameLocks noGrp="1"/>
+          </p:cNvGraphicFramePr>
+          <p:nvPr>
+            <p:extLst>
+              <p:ext uri="{D42A27DB-BD31-4B8C-83A1-F6EECF244321}">
+                <p14:modId xmlns:p14="http://schemas.microsoft.com/office/powerpoint/2010/main" val="3435762419"/>
+              </p:ext>
+            </p:extLst>
+          </p:nvPr>
+        </p:nvGraphicFramePr>
+        <p:xfrm>
+          <a:off x="1288414" y="1341782"/>
+          <a:ext cx="9615171" cy="4880372"/>
+        </p:xfrm>
+        <a:graphic>
+          <a:graphicData uri="http://schemas.openxmlformats.org/drawingml/2006/table">
+            <a:tbl>
+              <a:tblPr>
+                <a:tableStyleId>{3C2FFA5D-87B4-456A-9821-1D502468CF0F}</a:tableStyleId>
+              </a:tblPr>
+              <a:tblGrid>
+                <a:gridCol w="562612">
+                  <a:extLst>
+                    <a:ext uri="{9D8B030D-6E8A-4147-A177-3AD203B41FA5}">
+                      <a16:colId xmlns:a16="http://schemas.microsoft.com/office/drawing/2014/main" val="920587159"/>
+                    </a:ext>
+                  </a:extLst>
+                </a:gridCol>
+                <a:gridCol w="1983422">
+                  <a:extLst>
+                    <a:ext uri="{9D8B030D-6E8A-4147-A177-3AD203B41FA5}">
+                      <a16:colId xmlns:a16="http://schemas.microsoft.com/office/drawing/2014/main" val="4161082558"/>
+                    </a:ext>
+                  </a:extLst>
+                </a:gridCol>
+                <a:gridCol w="1061501">
+                  <a:extLst>
+                    <a:ext uri="{9D8B030D-6E8A-4147-A177-3AD203B41FA5}">
+                      <a16:colId xmlns:a16="http://schemas.microsoft.com/office/drawing/2014/main" val="2866878403"/>
+                    </a:ext>
+                  </a:extLst>
+                </a:gridCol>
+                <a:gridCol w="6007636">
+                  <a:extLst>
+                    <a:ext uri="{9D8B030D-6E8A-4147-A177-3AD203B41FA5}">
+                      <a16:colId xmlns:a16="http://schemas.microsoft.com/office/drawing/2014/main" val="1970128721"/>
+                    </a:ext>
+                  </a:extLst>
+                </a:gridCol>
+              </a:tblGrid>
+              <a:tr h="232437">
+                <a:tc>
+                  <a:txBody>
+                    <a:bodyPr/>
+                    <a:lstStyle/>
+                    <a:p>
+                      <a:pPr>
+                        <a:buNone/>
+                      </a:pPr>
+                      <a:r>
+                        <a:rPr lang="en-GB" sz="1700" b="1" kern="1200" dirty="0">
+                          <a:solidFill>
+                            <a:schemeClr val="dk1"/>
+                          </a:solidFill>
+                          <a:effectLst/>
+                        </a:rPr>
+                        <a:t>topic</a:t>
+                      </a:r>
+                      <a:endParaRPr lang="en-GB" sz="1700" b="1" kern="1200" dirty="0">
+                        <a:solidFill>
+                          <a:schemeClr val="dk1"/>
+                        </a:solidFill>
+                        <a:effectLst/>
+                        <a:latin typeface="+mn-lt"/>
+                        <a:ea typeface="+mn-ea"/>
+                        <a:cs typeface="+mn-cs"/>
+                      </a:endParaRPr>
+                    </a:p>
+                  </a:txBody>
+                  <a:tcPr marL="36566" marR="36566" marT="6094" marB="6094" anchor="ctr"/>
+                </a:tc>
+                <a:tc>
+                  <a:txBody>
+                    <a:bodyPr/>
+                    <a:lstStyle/>
+                    <a:p>
+                      <a:pPr>
+                        <a:buNone/>
+                      </a:pPr>
+                      <a:r>
+                        <a:rPr lang="en-GB" sz="1700" b="1" kern="1200">
+                          <a:solidFill>
+                            <a:schemeClr val="dk1"/>
+                          </a:solidFill>
+                          <a:effectLst/>
+                        </a:rPr>
+                        <a:t>title</a:t>
+                      </a:r>
+                      <a:endParaRPr lang="en-GB" sz="1700" b="1" kern="1200">
+                        <a:solidFill>
+                          <a:schemeClr val="dk1"/>
+                        </a:solidFill>
+                        <a:effectLst/>
+                        <a:latin typeface="+mn-lt"/>
+                        <a:ea typeface="+mn-ea"/>
+                        <a:cs typeface="+mn-cs"/>
+                      </a:endParaRPr>
+                    </a:p>
+                  </a:txBody>
+                  <a:tcPr marL="36566" marR="36566" marT="6094" marB="6094" anchor="ctr"/>
+                </a:tc>
+                <a:tc>
+                  <a:txBody>
+                    <a:bodyPr/>
+                    <a:lstStyle/>
+                    <a:p>
+                      <a:pPr>
+                        <a:buNone/>
+                      </a:pPr>
+                      <a:r>
+                        <a:rPr lang="en-GB" sz="1700" b="1" kern="1200">
+                          <a:solidFill>
+                            <a:schemeClr val="dk1"/>
+                          </a:solidFill>
+                          <a:effectLst/>
+                        </a:rPr>
+                        <a:t>date</a:t>
+                      </a:r>
+                      <a:endParaRPr lang="en-GB" sz="1700" b="1" kern="1200">
+                        <a:solidFill>
+                          <a:schemeClr val="dk1"/>
+                        </a:solidFill>
+                        <a:effectLst/>
+                        <a:latin typeface="+mn-lt"/>
+                        <a:ea typeface="+mn-ea"/>
+                        <a:cs typeface="+mn-cs"/>
+                      </a:endParaRPr>
+                    </a:p>
+                  </a:txBody>
+                  <a:tcPr marL="36566" marR="36566" marT="6094" marB="6094" anchor="ctr"/>
+                </a:tc>
+                <a:tc>
+                  <a:txBody>
+                    <a:bodyPr/>
+                    <a:lstStyle/>
+                    <a:p>
+                      <a:pPr>
+                        <a:buNone/>
+                      </a:pPr>
+                      <a:r>
+                        <a:rPr lang="en-GB" sz="1700" b="1" kern="1200" dirty="0">
+                          <a:solidFill>
+                            <a:schemeClr val="dk1"/>
+                          </a:solidFill>
+                          <a:effectLst/>
+                        </a:rPr>
+                        <a:t>content</a:t>
+                      </a:r>
+                      <a:endParaRPr lang="en-GB" sz="1700" b="1" kern="1200" dirty="0">
+                        <a:solidFill>
+                          <a:schemeClr val="dk1"/>
+                        </a:solidFill>
+                        <a:effectLst/>
+                        <a:latin typeface="+mn-lt"/>
+                        <a:ea typeface="+mn-ea"/>
+                        <a:cs typeface="+mn-cs"/>
+                      </a:endParaRPr>
+                    </a:p>
+                  </a:txBody>
+                  <a:tcPr marL="36566" marR="36566" marT="6094" marB="6094" anchor="ctr"/>
+                </a:tc>
+                <a:extLst>
+                  <a:ext uri="{0D108BD9-81ED-4DB2-BD59-A6C34878D82A}">
+                    <a16:rowId xmlns:a16="http://schemas.microsoft.com/office/drawing/2014/main" val="3661525350"/>
+                  </a:ext>
+                </a:extLst>
+              </a:tr>
+              <a:tr h="1120410">
+                <a:tc>
+                  <a:txBody>
+                    <a:bodyPr/>
+                    <a:lstStyle/>
+                    <a:p>
+                      <a:pPr algn="r" fontAlgn="t">
+                        <a:buNone/>
+                      </a:pPr>
+                      <a:r>
+                        <a:rPr lang="en-IL" sz="1700" kern="1200">
+                          <a:solidFill>
+                            <a:schemeClr val="dk1"/>
+                          </a:solidFill>
+                          <a:effectLst/>
+                        </a:rPr>
+                        <a:t>84</a:t>
+                      </a:r>
+                      <a:endParaRPr lang="en-IL" sz="1700" kern="1200">
+                        <a:solidFill>
+                          <a:schemeClr val="dk1"/>
+                        </a:solidFill>
+                        <a:effectLst/>
+                        <a:latin typeface="+mn-lt"/>
+                        <a:ea typeface="+mn-ea"/>
+                        <a:cs typeface="+mn-cs"/>
+                      </a:endParaRPr>
+                    </a:p>
+                  </a:txBody>
+                  <a:tcPr marL="36566" marR="36566" marT="6094" marB="6094"/>
+                </a:tc>
+                <a:tc>
+                  <a:txBody>
+                    <a:bodyPr/>
+                    <a:lstStyle/>
+                    <a:p>
+                      <a:pPr fontAlgn="t">
+                        <a:buNone/>
+                      </a:pPr>
+                      <a:r>
+                        <a:rPr lang="en-GB" sz="1700" kern="1200">
+                          <a:solidFill>
+                            <a:schemeClr val="dk1"/>
+                          </a:solidFill>
+                          <a:effectLst/>
+                        </a:rPr>
+                        <a:t>As talks kick off Iran calls Western reaction to nuclear proposal good</a:t>
+                      </a:r>
+                      <a:endParaRPr lang="en-GB" sz="1700" kern="1200">
+                        <a:solidFill>
+                          <a:schemeClr val="dk1"/>
+                        </a:solidFill>
+                        <a:effectLst/>
+                        <a:latin typeface="+mn-lt"/>
+                        <a:ea typeface="+mn-ea"/>
+                        <a:cs typeface="+mn-cs"/>
+                      </a:endParaRPr>
+                    </a:p>
+                  </a:txBody>
+                  <a:tcPr marL="36566" marR="36566" marT="6094" marB="6094"/>
+                </a:tc>
+                <a:tc>
+                  <a:txBody>
+                    <a:bodyPr/>
+                    <a:lstStyle/>
+                    <a:p>
+                      <a:pPr fontAlgn="t">
+                        <a:buNone/>
+                      </a:pPr>
+                      <a:r>
+                        <a:rPr lang="en-IL" sz="1700" kern="1200">
+                          <a:solidFill>
+                            <a:schemeClr val="dk1"/>
+                          </a:solidFill>
+                          <a:effectLst/>
+                        </a:rPr>
+                        <a:t>2013-09-25 22:50:45</a:t>
+                      </a:r>
+                      <a:endParaRPr lang="en-IL" sz="1700" kern="1200">
+                        <a:solidFill>
+                          <a:schemeClr val="dk1"/>
+                        </a:solidFill>
+                        <a:effectLst/>
+                        <a:latin typeface="+mn-lt"/>
+                        <a:ea typeface="+mn-ea"/>
+                        <a:cs typeface="+mn-cs"/>
+                      </a:endParaRPr>
+                    </a:p>
+                  </a:txBody>
+                  <a:tcPr marL="36566" marR="36566" marT="6094" marB="6094"/>
+                </a:tc>
+                <a:tc>
+                  <a:txBody>
+                    <a:bodyPr/>
+                    <a:lstStyle/>
+                    <a:p>
+                      <a:pPr fontAlgn="t">
+                        <a:buNone/>
+                      </a:pPr>
+                      <a:r>
+                        <a:rPr lang="en-GB" sz="1700" kern="1200" dirty="0">
+                          <a:solidFill>
+                            <a:schemeClr val="dk1"/>
+                          </a:solidFill>
+                          <a:effectLst/>
+                        </a:rPr>
+                        <a:t>keep.ca: Deputy warden can't remember talks with teen prisoner who killed herself - TORONTO - A... http://bit.ly/190ueDF # can't # Deputy</a:t>
+                      </a:r>
+                      <a:endParaRPr lang="en-GB" sz="1700" kern="1200" dirty="0">
+                        <a:solidFill>
+                          <a:schemeClr val="dk1"/>
+                        </a:solidFill>
+                        <a:effectLst/>
+                        <a:latin typeface="+mn-lt"/>
+                        <a:ea typeface="+mn-ea"/>
+                        <a:cs typeface="+mn-cs"/>
+                      </a:endParaRPr>
+                    </a:p>
+                  </a:txBody>
+                  <a:tcPr marL="36566" marR="36566" marT="6094" marB="6094"/>
+                </a:tc>
+                <a:extLst>
+                  <a:ext uri="{0D108BD9-81ED-4DB2-BD59-A6C34878D82A}">
+                    <a16:rowId xmlns:a16="http://schemas.microsoft.com/office/drawing/2014/main" val="2816228446"/>
+                  </a:ext>
+                </a:extLst>
+              </a:tr>
+              <a:tr h="1120410">
+                <a:tc>
+                  <a:txBody>
+                    <a:bodyPr/>
+                    <a:lstStyle/>
+                    <a:p>
+                      <a:pPr algn="r" fontAlgn="t">
+                        <a:buNone/>
+                      </a:pPr>
+                      <a:r>
+                        <a:rPr lang="en-IL" sz="1700" kern="1200">
+                          <a:solidFill>
+                            <a:schemeClr val="dk1"/>
+                          </a:solidFill>
+                          <a:effectLst/>
+                        </a:rPr>
+                        <a:t>84</a:t>
+                      </a:r>
+                      <a:endParaRPr lang="en-IL" sz="1700" kern="1200">
+                        <a:solidFill>
+                          <a:schemeClr val="dk1"/>
+                        </a:solidFill>
+                        <a:effectLst/>
+                        <a:latin typeface="+mn-lt"/>
+                        <a:ea typeface="+mn-ea"/>
+                        <a:cs typeface="+mn-cs"/>
+                      </a:endParaRPr>
+                    </a:p>
+                  </a:txBody>
+                  <a:tcPr marL="36566" marR="36566" marT="6094" marB="6094"/>
+                </a:tc>
+                <a:tc>
+                  <a:txBody>
+                    <a:bodyPr/>
+                    <a:lstStyle/>
+                    <a:p>
+                      <a:pPr fontAlgn="t">
+                        <a:buNone/>
+                      </a:pPr>
+                      <a:r>
+                        <a:rPr lang="en-GB" sz="1700" kern="1200">
+                          <a:solidFill>
+                            <a:schemeClr val="dk1"/>
+                          </a:solidFill>
+                          <a:effectLst/>
+                        </a:rPr>
+                        <a:t>As talks kick off Iran calls Western reaction to nuclear proposal good</a:t>
+                      </a:r>
+                      <a:endParaRPr lang="en-GB" sz="1700" kern="1200">
+                        <a:solidFill>
+                          <a:schemeClr val="dk1"/>
+                        </a:solidFill>
+                        <a:effectLst/>
+                        <a:latin typeface="+mn-lt"/>
+                        <a:ea typeface="+mn-ea"/>
+                        <a:cs typeface="+mn-cs"/>
+                      </a:endParaRPr>
+                    </a:p>
+                  </a:txBody>
+                  <a:tcPr marL="36566" marR="36566" marT="6094" marB="6094"/>
+                </a:tc>
+                <a:tc>
+                  <a:txBody>
+                    <a:bodyPr/>
+                    <a:lstStyle/>
+                    <a:p>
+                      <a:pPr fontAlgn="t">
+                        <a:buNone/>
+                      </a:pPr>
+                      <a:r>
+                        <a:rPr lang="en-IL" sz="1700" kern="1200">
+                          <a:solidFill>
+                            <a:schemeClr val="dk1"/>
+                          </a:solidFill>
+                          <a:effectLst/>
+                        </a:rPr>
+                        <a:t>2013-09-26 19:48:47</a:t>
+                      </a:r>
+                      <a:endParaRPr lang="en-IL" sz="1700" kern="1200">
+                        <a:solidFill>
+                          <a:schemeClr val="dk1"/>
+                        </a:solidFill>
+                        <a:effectLst/>
+                        <a:latin typeface="+mn-lt"/>
+                        <a:ea typeface="+mn-ea"/>
+                        <a:cs typeface="+mn-cs"/>
+                      </a:endParaRPr>
+                    </a:p>
+                  </a:txBody>
+                  <a:tcPr marL="36566" marR="36566" marT="6094" marB="6094"/>
+                </a:tc>
+                <a:tc>
+                  <a:txBody>
+                    <a:bodyPr/>
+                    <a:lstStyle/>
+                    <a:p>
+                      <a:pPr fontAlgn="t">
+                        <a:buNone/>
+                      </a:pPr>
+                      <a:r>
+                        <a:rPr lang="en-GB" sz="1700" kern="1200" dirty="0">
+                          <a:solidFill>
+                            <a:schemeClr val="dk1"/>
+                          </a:solidFill>
+                          <a:effectLst/>
+                        </a:rPr>
+                        <a:t>keep.ca: Deputy warden can't remember talks with teen prisoner who killed herself - TORONTO - A... http://bit.ly/190ueDF # can't # Deputy</a:t>
+                      </a:r>
+                      <a:endParaRPr lang="en-GB" sz="1700" kern="1200" dirty="0">
+                        <a:solidFill>
+                          <a:schemeClr val="dk1"/>
+                        </a:solidFill>
+                        <a:effectLst/>
+                        <a:latin typeface="+mn-lt"/>
+                        <a:ea typeface="+mn-ea"/>
+                        <a:cs typeface="+mn-cs"/>
+                      </a:endParaRPr>
+                    </a:p>
+                  </a:txBody>
+                  <a:tcPr marL="36566" marR="36566" marT="6094" marB="6094"/>
+                </a:tc>
+                <a:extLst>
+                  <a:ext uri="{0D108BD9-81ED-4DB2-BD59-A6C34878D82A}">
+                    <a16:rowId xmlns:a16="http://schemas.microsoft.com/office/drawing/2014/main" val="3123395623"/>
+                  </a:ext>
+                </a:extLst>
+              </a:tr>
+              <a:tr h="676423">
+                <a:tc>
+                  <a:txBody>
+                    <a:bodyPr/>
+                    <a:lstStyle/>
+                    <a:p>
+                      <a:pPr algn="r" fontAlgn="t">
+                        <a:buNone/>
+                      </a:pPr>
+                      <a:r>
+                        <a:rPr lang="en-IL" sz="1700" kern="1200">
+                          <a:solidFill>
+                            <a:schemeClr val="dk1"/>
+                          </a:solidFill>
+                          <a:effectLst/>
+                        </a:rPr>
+                        <a:t>272</a:t>
+                      </a:r>
+                      <a:endParaRPr lang="en-IL" sz="1700" kern="1200">
+                        <a:solidFill>
+                          <a:schemeClr val="dk1"/>
+                        </a:solidFill>
+                        <a:effectLst/>
+                        <a:latin typeface="+mn-lt"/>
+                        <a:ea typeface="+mn-ea"/>
+                        <a:cs typeface="+mn-cs"/>
+                      </a:endParaRPr>
+                    </a:p>
+                  </a:txBody>
+                  <a:tcPr marL="36566" marR="36566" marT="6094" marB="6094"/>
+                </a:tc>
+                <a:tc>
+                  <a:txBody>
+                    <a:bodyPr/>
+                    <a:lstStyle/>
+                    <a:p>
+                      <a:pPr fontAlgn="t">
+                        <a:buNone/>
+                      </a:pPr>
+                      <a:r>
+                        <a:rPr lang="en-GB" sz="1700" kern="1200">
+                          <a:solidFill>
+                            <a:schemeClr val="dk1"/>
+                          </a:solidFill>
+                          <a:effectLst/>
+                        </a:rPr>
+                        <a:t>Global watchdog approves Syria disarmament plan</a:t>
+                      </a:r>
+                      <a:endParaRPr lang="en-GB" sz="1700" kern="1200">
+                        <a:solidFill>
+                          <a:schemeClr val="dk1"/>
+                        </a:solidFill>
+                        <a:effectLst/>
+                        <a:latin typeface="+mn-lt"/>
+                        <a:ea typeface="+mn-ea"/>
+                        <a:cs typeface="+mn-cs"/>
+                      </a:endParaRPr>
+                    </a:p>
+                  </a:txBody>
+                  <a:tcPr marL="36566" marR="36566" marT="6094" marB="6094"/>
+                </a:tc>
+                <a:tc>
+                  <a:txBody>
+                    <a:bodyPr/>
+                    <a:lstStyle/>
+                    <a:p>
+                      <a:pPr fontAlgn="t">
+                        <a:buNone/>
+                      </a:pPr>
+                      <a:r>
+                        <a:rPr lang="en-IL" sz="1700" kern="1200">
+                          <a:solidFill>
+                            <a:schemeClr val="dk1"/>
+                          </a:solidFill>
+                          <a:effectLst/>
+                        </a:rPr>
+                        <a:t>2013-08-08 22:29:57</a:t>
+                      </a:r>
+                      <a:endParaRPr lang="en-IL" sz="1700" kern="1200">
+                        <a:solidFill>
+                          <a:schemeClr val="dk1"/>
+                        </a:solidFill>
+                        <a:effectLst/>
+                        <a:latin typeface="+mn-lt"/>
+                        <a:ea typeface="+mn-ea"/>
+                        <a:cs typeface="+mn-cs"/>
+                      </a:endParaRPr>
+                    </a:p>
+                  </a:txBody>
+                  <a:tcPr marL="36566" marR="36566" marT="6094" marB="6094"/>
+                </a:tc>
+                <a:tc>
+                  <a:txBody>
+                    <a:bodyPr/>
+                    <a:lstStyle/>
+                    <a:p>
+                      <a:pPr fontAlgn="t">
+                        <a:buNone/>
+                      </a:pPr>
+                      <a:r>
+                        <a:rPr lang="en-GB" sz="1700" kern="1200">
+                          <a:solidFill>
+                            <a:schemeClr val="dk1"/>
+                          </a:solidFill>
+                          <a:effectLst/>
+                        </a:rPr>
+                        <a:t>keep.ca: IMF review gives former budget watchdog high marks - In a review of global budget... http://bit.ly/12ZBPX8 # budget # Former</a:t>
+                      </a:r>
+                      <a:endParaRPr lang="en-GB" sz="1700" kern="1200">
+                        <a:solidFill>
+                          <a:schemeClr val="dk1"/>
+                        </a:solidFill>
+                        <a:effectLst/>
+                        <a:latin typeface="+mn-lt"/>
+                        <a:ea typeface="+mn-ea"/>
+                        <a:cs typeface="+mn-cs"/>
+                      </a:endParaRPr>
+                    </a:p>
+                  </a:txBody>
+                  <a:tcPr marL="36566" marR="36566" marT="6094" marB="6094"/>
+                </a:tc>
+                <a:extLst>
+                  <a:ext uri="{0D108BD9-81ED-4DB2-BD59-A6C34878D82A}">
+                    <a16:rowId xmlns:a16="http://schemas.microsoft.com/office/drawing/2014/main" val="2433701538"/>
+                  </a:ext>
+                </a:extLst>
+              </a:tr>
+              <a:tr h="676423">
+                <a:tc>
+                  <a:txBody>
+                    <a:bodyPr/>
+                    <a:lstStyle/>
+                    <a:p>
+                      <a:pPr algn="r" fontAlgn="t">
+                        <a:buNone/>
+                      </a:pPr>
+                      <a:r>
+                        <a:rPr lang="en-IL" sz="1700" kern="1200">
+                          <a:solidFill>
+                            <a:schemeClr val="dk1"/>
+                          </a:solidFill>
+                          <a:effectLst/>
+                        </a:rPr>
+                        <a:t>272</a:t>
+                      </a:r>
+                      <a:endParaRPr lang="en-IL" sz="1700" kern="1200">
+                        <a:solidFill>
+                          <a:schemeClr val="dk1"/>
+                        </a:solidFill>
+                        <a:effectLst/>
+                        <a:latin typeface="+mn-lt"/>
+                        <a:ea typeface="+mn-ea"/>
+                        <a:cs typeface="+mn-cs"/>
+                      </a:endParaRPr>
+                    </a:p>
+                  </a:txBody>
+                  <a:tcPr marL="36566" marR="36566" marT="6094" marB="6094"/>
+                </a:tc>
+                <a:tc>
+                  <a:txBody>
+                    <a:bodyPr/>
+                    <a:lstStyle/>
+                    <a:p>
+                      <a:pPr fontAlgn="t">
+                        <a:buNone/>
+                      </a:pPr>
+                      <a:r>
+                        <a:rPr lang="en-GB" sz="1700" kern="1200">
+                          <a:solidFill>
+                            <a:schemeClr val="dk1"/>
+                          </a:solidFill>
+                          <a:effectLst/>
+                        </a:rPr>
+                        <a:t>Global watchdog approves Syria disarmament plan</a:t>
+                      </a:r>
+                      <a:endParaRPr lang="en-GB" sz="1700" kern="1200">
+                        <a:solidFill>
+                          <a:schemeClr val="dk1"/>
+                        </a:solidFill>
+                        <a:effectLst/>
+                        <a:latin typeface="+mn-lt"/>
+                        <a:ea typeface="+mn-ea"/>
+                        <a:cs typeface="+mn-cs"/>
+                      </a:endParaRPr>
+                    </a:p>
+                  </a:txBody>
+                  <a:tcPr marL="36566" marR="36566" marT="6094" marB="6094"/>
+                </a:tc>
+                <a:tc>
+                  <a:txBody>
+                    <a:bodyPr/>
+                    <a:lstStyle/>
+                    <a:p>
+                      <a:pPr fontAlgn="t">
+                        <a:buNone/>
+                      </a:pPr>
+                      <a:r>
+                        <a:rPr lang="en-IL" sz="1700" kern="1200">
+                          <a:solidFill>
+                            <a:schemeClr val="dk1"/>
+                          </a:solidFill>
+                          <a:effectLst/>
+                        </a:rPr>
+                        <a:t>2013-08-07 10:36:58</a:t>
+                      </a:r>
+                      <a:endParaRPr lang="en-IL" sz="1700" kern="1200">
+                        <a:solidFill>
+                          <a:schemeClr val="dk1"/>
+                        </a:solidFill>
+                        <a:effectLst/>
+                        <a:latin typeface="+mn-lt"/>
+                        <a:ea typeface="+mn-ea"/>
+                        <a:cs typeface="+mn-cs"/>
+                      </a:endParaRPr>
+                    </a:p>
+                  </a:txBody>
+                  <a:tcPr marL="36566" marR="36566" marT="6094" marB="6094"/>
+                </a:tc>
+                <a:tc>
+                  <a:txBody>
+                    <a:bodyPr/>
+                    <a:lstStyle/>
+                    <a:p>
+                      <a:pPr fontAlgn="t">
+                        <a:buNone/>
+                      </a:pPr>
+                      <a:r>
+                        <a:rPr lang="en-GB" sz="1700" kern="1200">
+                          <a:solidFill>
+                            <a:schemeClr val="dk1"/>
+                          </a:solidFill>
+                          <a:effectLst/>
+                        </a:rPr>
+                        <a:t>keep.ca: IMF review gives former budget watchdog high marks - In a review of global budget... http://bit.ly/12ZBPX8 # budget # Former</a:t>
+                      </a:r>
+                      <a:endParaRPr lang="en-GB" sz="1700" kern="1200">
+                        <a:solidFill>
+                          <a:schemeClr val="dk1"/>
+                        </a:solidFill>
+                        <a:effectLst/>
+                        <a:latin typeface="+mn-lt"/>
+                        <a:ea typeface="+mn-ea"/>
+                        <a:cs typeface="+mn-cs"/>
+                      </a:endParaRPr>
+                    </a:p>
+                  </a:txBody>
+                  <a:tcPr marL="36566" marR="36566" marT="6094" marB="6094"/>
+                </a:tc>
+                <a:extLst>
+                  <a:ext uri="{0D108BD9-81ED-4DB2-BD59-A6C34878D82A}">
+                    <a16:rowId xmlns:a16="http://schemas.microsoft.com/office/drawing/2014/main" val="4168958636"/>
+                  </a:ext>
+                </a:extLst>
+              </a:tr>
+              <a:tr h="762401">
+                <a:tc>
+                  <a:txBody>
+                    <a:bodyPr/>
+                    <a:lstStyle/>
+                    <a:p>
+                      <a:pPr algn="r" fontAlgn="t">
+                        <a:buNone/>
+                      </a:pPr>
+                      <a:r>
+                        <a:rPr lang="en-IL" sz="1700" kern="1200" dirty="0">
+                          <a:solidFill>
+                            <a:schemeClr val="dk1"/>
+                          </a:solidFill>
+                          <a:effectLst/>
+                        </a:rPr>
+                        <a:t>853</a:t>
+                      </a:r>
+                      <a:endParaRPr lang="en-IL" sz="1700" kern="1200" dirty="0">
+                        <a:solidFill>
+                          <a:schemeClr val="dk1"/>
+                        </a:solidFill>
+                        <a:effectLst/>
+                        <a:latin typeface="+mn-lt"/>
+                        <a:ea typeface="+mn-ea"/>
+                        <a:cs typeface="+mn-cs"/>
+                      </a:endParaRPr>
+                    </a:p>
+                  </a:txBody>
+                  <a:tcPr marL="36566" marR="36566" marT="6094" marB="6094"/>
+                </a:tc>
+                <a:tc>
+                  <a:txBody>
+                    <a:bodyPr/>
+                    <a:lstStyle/>
+                    <a:p>
+                      <a:pPr fontAlgn="t">
+                        <a:buNone/>
+                      </a:pPr>
+                      <a:r>
+                        <a:rPr lang="en-GB" sz="1700" kern="1200">
+                          <a:solidFill>
+                            <a:schemeClr val="dk1"/>
+                          </a:solidFill>
+                          <a:effectLst/>
+                        </a:rPr>
+                        <a:t>Three killed in attack on church wedding in Cairo</a:t>
+                      </a:r>
+                      <a:endParaRPr lang="en-GB" sz="1700" kern="1200">
+                        <a:solidFill>
+                          <a:schemeClr val="dk1"/>
+                        </a:solidFill>
+                        <a:effectLst/>
+                        <a:latin typeface="+mn-lt"/>
+                        <a:ea typeface="+mn-ea"/>
+                        <a:cs typeface="+mn-cs"/>
+                      </a:endParaRPr>
+                    </a:p>
+                  </a:txBody>
+                  <a:tcPr marL="36566" marR="36566" marT="6094" marB="6094"/>
+                </a:tc>
+                <a:tc>
+                  <a:txBody>
+                    <a:bodyPr/>
+                    <a:lstStyle/>
+                    <a:p>
+                      <a:pPr fontAlgn="t">
+                        <a:buNone/>
+                      </a:pPr>
+                      <a:r>
+                        <a:rPr lang="en-IL" sz="1700" kern="1200">
+                          <a:solidFill>
+                            <a:schemeClr val="dk1"/>
+                          </a:solidFill>
+                          <a:effectLst/>
+                        </a:rPr>
+                        <a:t>2013-10-20 23:22:29</a:t>
+                      </a:r>
+                      <a:endParaRPr lang="en-IL" sz="1700" kern="1200">
+                        <a:solidFill>
+                          <a:schemeClr val="dk1"/>
+                        </a:solidFill>
+                        <a:effectLst/>
+                        <a:latin typeface="+mn-lt"/>
+                        <a:ea typeface="+mn-ea"/>
+                        <a:cs typeface="+mn-cs"/>
+                      </a:endParaRPr>
+                    </a:p>
+                  </a:txBody>
+                  <a:tcPr marL="36566" marR="36566" marT="6094" marB="6094"/>
+                </a:tc>
+                <a:tc>
+                  <a:txBody>
+                    <a:bodyPr/>
+                    <a:lstStyle/>
+                    <a:p>
+                      <a:pPr fontAlgn="t">
+                        <a:buNone/>
+                      </a:pPr>
+                      <a:r>
+                        <a:rPr lang="en-GB" sz="1700" kern="1200" dirty="0">
+                          <a:solidFill>
+                            <a:schemeClr val="dk1"/>
+                          </a:solidFill>
+                          <a:effectLst/>
+                        </a:rPr>
+                        <a:t>keep.ca: Third attack in three weeks at UBC makes investigation top </a:t>
+                      </a:r>
+                      <a:r>
+                        <a:rPr lang="en-GB" sz="1700" kern="1200" dirty="0" err="1">
+                          <a:solidFill>
+                            <a:schemeClr val="dk1"/>
+                          </a:solidFill>
+                          <a:effectLst/>
+                        </a:rPr>
+                        <a:t>priority:RCMP</a:t>
+                      </a:r>
+                      <a:r>
+                        <a:rPr lang="en-GB" sz="1700" kern="1200" dirty="0">
+                          <a:solidFill>
+                            <a:schemeClr val="dk1"/>
+                          </a:solidFill>
+                          <a:effectLst/>
+                        </a:rPr>
+                        <a:t> - VANCOUVER - A third... http://bit.ly/1b4qQuy # attack</a:t>
+                      </a:r>
+                      <a:endParaRPr lang="en-GB" sz="1700" kern="1200" dirty="0">
+                        <a:solidFill>
+                          <a:schemeClr val="dk1"/>
+                        </a:solidFill>
+                        <a:effectLst/>
+                        <a:latin typeface="+mn-lt"/>
+                        <a:ea typeface="+mn-ea"/>
+                        <a:cs typeface="+mn-cs"/>
+                      </a:endParaRPr>
+                    </a:p>
+                  </a:txBody>
+                  <a:tcPr marL="36566" marR="36566" marT="6094" marB="6094"/>
+                </a:tc>
+                <a:extLst>
+                  <a:ext uri="{0D108BD9-81ED-4DB2-BD59-A6C34878D82A}">
+                    <a16:rowId xmlns:a16="http://schemas.microsoft.com/office/drawing/2014/main" val="3074120054"/>
+                  </a:ext>
+                </a:extLst>
+              </a:tr>
+            </a:tbl>
+          </a:graphicData>
+        </a:graphic>
+      </p:graphicFrame>
     </p:spTree>
     <p:extLst>
       <p:ext uri="{BB962C8B-B14F-4D97-AF65-F5344CB8AC3E}">
-        <p14:creationId xmlns:p14="http://schemas.microsoft.com/office/powerpoint/2010/main" val="2605016121"/>
+        <p14:creationId xmlns:p14="http://schemas.microsoft.com/office/powerpoint/2010/main" val="2663266407"/>
       </p:ext>
     </p:extLst>
   </p:cSld>
@@ -14366,21 +17596,6 @@
 </file>
 
 <file path=customXml/item1.xml><?xml version="1.0" encoding="utf-8"?>
-<p:properties xmlns:p="http://schemas.microsoft.com/office/2006/metadata/properties" xmlns:xsi="http://www.w3.org/2001/XMLSchema-instance" xmlns:pc="http://schemas.microsoft.com/office/infopath/2007/PartnerControls">
-  <documentManagement/>
-</p:properties>
-</file>
-
-<file path=customXml/item2.xml><?xml version="1.0" encoding="utf-8"?>
-<?mso-contentType ?>
-<FormTemplates xmlns="http://schemas.microsoft.com/sharepoint/v3/contenttype/forms">
-  <Display>DocumentLibraryForm</Display>
-  <Edit>DocumentLibraryForm</Edit>
-  <New>DocumentLibraryForm</New>
-</FormTemplates>
-</file>
-
-<file path=customXml/item3.xml><?xml version="1.0" encoding="utf-8"?>
 <ct:contentTypeSchema xmlns:ct="http://schemas.microsoft.com/office/2006/metadata/contentType" xmlns:ma="http://schemas.microsoft.com/office/2006/metadata/properties/metaAttributes" ct:_="" ma:_="" ma:contentTypeName="מסמך" ma:contentTypeID="0x0101009B09D47D9E93A4429F0CD6A06BF73F25" ma:contentTypeVersion="2" ma:contentTypeDescription="צור מסמך חדש." ma:contentTypeScope="" ma:versionID="73466d0f0cccf3377f8877b2c3dc97be">
   <xsd:schema xmlns:xsd="http://www.w3.org/2001/XMLSchema" xmlns:xs="http://www.w3.org/2001/XMLSchema" xmlns:p="http://schemas.microsoft.com/office/2006/metadata/properties" xmlns:ns3="ce6966b5-b9a2-4047-8ad7-6349593315f9" targetNamespace="http://schemas.microsoft.com/office/2006/metadata/properties" ma:root="true" ma:fieldsID="094fd2ba8f4c59d7ca49435bf2013b23" ns3:_="">
     <xsd:import namespace="ce6966b5-b9a2-4047-8ad7-6349593315f9"/>
@@ -14512,31 +17727,22 @@
 </ct:contentTypeSchema>
 </file>
 
-<file path=customXml/itemProps1.xml><?xml version="1.0" encoding="utf-8"?>
-<ds:datastoreItem xmlns:ds="http://schemas.openxmlformats.org/officeDocument/2006/customXml" ds:itemID="{54C27645-43BB-4483-8570-823D8715A1A2}">
-  <ds:schemaRefs>
-    <ds:schemaRef ds:uri="http://purl.org/dc/dcmitype/"/>
-    <ds:schemaRef ds:uri="http://purl.org/dc/terms/"/>
-    <ds:schemaRef ds:uri="http://schemas.openxmlformats.org/package/2006/metadata/core-properties"/>
-    <ds:schemaRef ds:uri="http://schemas.microsoft.com/office/infopath/2007/PartnerControls"/>
-    <ds:schemaRef ds:uri="http://www.w3.org/XML/1998/namespace"/>
-    <ds:schemaRef ds:uri="http://purl.org/dc/elements/1.1/"/>
-    <ds:schemaRef ds:uri="http://schemas.microsoft.com/office/2006/documentManagement/types"/>
-    <ds:schemaRef ds:uri="ce6966b5-b9a2-4047-8ad7-6349593315f9"/>
-    <ds:schemaRef ds:uri="http://schemas.microsoft.com/office/2006/metadata/properties"/>
-  </ds:schemaRefs>
-</ds:datastoreItem>
+<file path=customXml/item2.xml><?xml version="1.0" encoding="utf-8"?>
+<?mso-contentType ?>
+<FormTemplates xmlns="http://schemas.microsoft.com/sharepoint/v3/contenttype/forms">
+  <Display>DocumentLibraryForm</Display>
+  <Edit>DocumentLibraryForm</Edit>
+  <New>DocumentLibraryForm</New>
+</FormTemplates>
 </file>
 
-<file path=customXml/itemProps2.xml><?xml version="1.0" encoding="utf-8"?>
-<ds:datastoreItem xmlns:ds="http://schemas.openxmlformats.org/officeDocument/2006/customXml" ds:itemID="{ADC03A01-1150-476B-9960-38F69024617B}">
-  <ds:schemaRefs>
-    <ds:schemaRef ds:uri="http://schemas.microsoft.com/sharepoint/v3/contenttype/forms"/>
-  </ds:schemaRefs>
-</ds:datastoreItem>
+<file path=customXml/item3.xml><?xml version="1.0" encoding="utf-8"?>
+<p:properties xmlns:p="http://schemas.microsoft.com/office/2006/metadata/properties" xmlns:xsi="http://www.w3.org/2001/XMLSchema-instance" xmlns:pc="http://schemas.microsoft.com/office/infopath/2007/PartnerControls">
+  <documentManagement/>
+</p:properties>
 </file>
 
-<file path=customXml/itemProps3.xml><?xml version="1.0" encoding="utf-8"?>
+<file path=customXml/itemProps1.xml><?xml version="1.0" encoding="utf-8"?>
 <ds:datastoreItem xmlns:ds="http://schemas.openxmlformats.org/officeDocument/2006/customXml" ds:itemID="{0240CFFD-E930-4E06-8CC7-91623280D144}">
   <ds:schemaRefs>
     <ds:schemaRef ds:uri="http://schemas.microsoft.com/office/2006/metadata/contentType"/>
@@ -14552,4 +17758,28 @@
     <ds:schemaRef ds:uri="http://schemas.microsoft.com/internal/obd"/>
   </ds:schemaRefs>
 </ds:datastoreItem>
+</file>
+
+<file path=customXml/itemProps2.xml><?xml version="1.0" encoding="utf-8"?>
+<ds:datastoreItem xmlns:ds="http://schemas.openxmlformats.org/officeDocument/2006/customXml" ds:itemID="{ADC03A01-1150-476B-9960-38F69024617B}">
+  <ds:schemaRefs>
+    <ds:schemaRef ds:uri="http://schemas.microsoft.com/sharepoint/v3/contenttype/forms"/>
+  </ds:schemaRefs>
+</ds:datastoreItem>
+</file>
+
+<file path=customXml/itemProps3.xml><?xml version="1.0" encoding="utf-8"?>
+<ds:datastoreItem xmlns:ds="http://schemas.openxmlformats.org/officeDocument/2006/customXml" ds:itemID="{54C27645-43BB-4483-8570-823D8715A1A2}">
+  <ds:schemaRefs>
+    <ds:schemaRef ds:uri="http://purl.org/dc/dcmitype/"/>
+    <ds:schemaRef ds:uri="http://purl.org/dc/terms/"/>
+    <ds:schemaRef ds:uri="http://schemas.openxmlformats.org/package/2006/metadata/core-properties"/>
+    <ds:schemaRef ds:uri="http://schemas.microsoft.com/office/infopath/2007/PartnerControls"/>
+    <ds:schemaRef ds:uri="http://www.w3.org/XML/1998/namespace"/>
+    <ds:schemaRef ds:uri="http://purl.org/dc/elements/1.1/"/>
+    <ds:schemaRef ds:uri="http://schemas.microsoft.com/office/2006/documentManagement/types"/>
+    <ds:schemaRef ds:uri="ce6966b5-b9a2-4047-8ad7-6349593315f9"/>
+    <ds:schemaRef ds:uri="http://schemas.microsoft.com/office/2006/metadata/properties"/>
+  </ds:schemaRefs>
+</ds:datastoreItem>
 </file>